--- a/docs/汇报.pptx
+++ b/docs/汇报.pptx
@@ -1147,7 +1147,7 @@
           <a:lstStyle/>
           <a:p>
             <a:r>
-              <a:t>30 秒：强调 alice/bob 的课程级权限与 admin 的聚合边界；R01–R08 与报告需求表对应。</a:t>
+              <a:t>30 秒：强调 alice/bob 的课程级权限与 admin 的聚合边界；R01–R10 与报告需求表对应。</a:t>
             </a:r>
           </a:p>
         </p:txBody>
@@ -6207,8 +6207,8 @@
         </p:blipFill>
         <p:spPr>
           <a:xfrm>
-            <a:off x="8428623" y="1417320"/>
-            <a:ext cx="1064992" cy="4800600"/>
+            <a:off x="8450417" y="1417320"/>
+            <a:ext cx="1021404" cy="4800600"/>
           </a:xfrm>
           <a:prstGeom prst="rect">
             <a:avLst/>
@@ -8243,8 +8243,8 @@
         </p:blipFill>
         <p:spPr>
           <a:xfrm>
-            <a:off x="6556403" y="2331720"/>
-            <a:ext cx="4946593" cy="3840480"/>
+            <a:off x="6537960" y="2338165"/>
+            <a:ext cx="4983480" cy="3827589"/>
           </a:xfrm>
           <a:prstGeom prst="rect">
             <a:avLst/>
@@ -9683,7 +9683,7 @@
                 </a:solidFill>
                 <a:latin typeface="Microsoft YaHei"/>
               </a:rPr>
-              <a:t>116 项测试与 26 项端到端验收全部通过</a:t>
+              <a:t>184 项测试与 33 项端到端验收全部通过</a:t>
             </a:r>
           </a:p>
         </p:txBody>
@@ -9890,7 +9890,7 @@
                 </a:solidFill>
                 <a:latin typeface="Microsoft YaHei"/>
               </a:rPr>
-              <a:t>116</a:t>
+              <a:t>184</a:t>
             </a:r>
           </a:p>
         </p:txBody>
@@ -10015,7 +10015,7 @@
                 </a:solidFill>
                 <a:latin typeface="Microsoft YaHei"/>
               </a:rPr>
-              <a:t>26</a:t>
+              <a:t>33</a:t>
             </a:r>
           </a:p>
         </p:txBody>
@@ -10279,7 +10279,7 @@
                 </a:solidFill>
                 <a:latin typeface="Consolas"/>
               </a:rPr>
-              <a:t># 56 unit + 60 integration</a:t>
+              <a:t># 101 unit + 83 integration</a:t>
             </a:r>
           </a:p>
           <a:p>
@@ -10366,7 +10366,7 @@
                 </a:solidFill>
                 <a:latin typeface="Microsoft YaHei"/>
               </a:rPr>
-              <a:t>输出：26/26 PASS，0 FAIL，约 0.8 秒</a:t>
+              <a:t>输出：33/33 PASS，0 FAIL，约 0.7 秒</a:t>
             </a:r>
           </a:p>
           <a:p>
@@ -10640,7 +10640,7 @@
                 </a:solidFill>
                 <a:latin typeface="Microsoft YaHei"/>
               </a:rPr>
-              <a:t>✓  导入：幂等、重复、损坏文件、事务回滚</a:t>
+              <a:t>✓  导入：幂等、重复、损坏文件、平台适配</a:t>
             </a:r>
           </a:p>
         </p:txBody>
@@ -10726,7 +10726,7 @@
                 </a:solidFill>
                 <a:latin typeface="Microsoft YaHei"/>
               </a:rPr>
-              <a:t>✓  检索：关键词、课程、标签、上下文</a:t>
+              <a:t>✓  检索：关键词、课程、标签、全局搜索</a:t>
             </a:r>
           </a:p>
         </p:txBody>
@@ -10898,7 +10898,7 @@
                 </a:solidFill>
                 <a:latin typeface="Microsoft YaHei"/>
               </a:rPr>
-              <a:t>✓  Text2SQL：恶意 SQL、跨用户、只读兜底</a:t>
+              <a:t>✓  采集：令牌哈希、限流、Bearer 幂等入库</a:t>
             </a:r>
           </a:p>
         </p:txBody>
@@ -10984,7 +10984,7 @@
                 </a:solidFill>
                 <a:latin typeface="Microsoft YaHei"/>
               </a:rPr>
-              <a:t>✓  导出：CSV 与 Markdown 声明</a:t>
+              <a:t>✓  Text2SQL：恶意 SQL、跨用户、只读兜底</a:t>
             </a:r>
           </a:p>
         </p:txBody>
@@ -12433,7 +12433,7 @@
                 </a:solidFill>
                 <a:latin typeface="Microsoft YaHei"/>
               </a:rPr>
-              <a:t>• 8 个核心实体，12 张表，完整 E-R 与范式分析</a:t>
+              <a:t>• 8 个核心实体，14 张表，完整 E-R 与范式分析</a:t>
             </a:r>
           </a:p>
           <a:p>
@@ -12471,7 +12471,7 @@
                 </a:solidFill>
                 <a:latin typeface="Microsoft YaHei"/>
               </a:rPr>
-              <a:t>• Text2SQL 由只读视图与角色做最终兜底</a:t>
+              <a:t>• 令牌 + 扩展 + 平台导出，离线也可读可复习</a:t>
             </a:r>
           </a:p>
           <a:p>
@@ -12490,7 +12490,26 @@
                 </a:solidFill>
                 <a:latin typeface="Microsoft YaHei"/>
               </a:rPr>
-              <a:t>• 116 项测试 + 26 项验收，全部通过</a:t>
+              <a:t>• Text2SQL 由只读视图与角色做最终兜底</a:t>
+            </a:r>
+          </a:p>
+          <a:p>
+            <a:pPr>
+              <a:lnSpc>
+                <a:spcPct val="118000"/>
+              </a:lnSpc>
+              <a:spcAft>
+                <a:spcPts val="800"/>
+              </a:spcAft>
+            </a:pPr>
+            <a:r>
+              <a:rPr sz="1400">
+                <a:solidFill>
+                  <a:srgbClr val="D9C8A8"/>
+                </a:solidFill>
+                <a:latin typeface="Microsoft YaHei"/>
+              </a:rPr>
+              <a:t>• 184 项测试 + 33 项验收，全部通过</a:t>
             </a:r>
           </a:p>
           <a:p>
@@ -15260,7 +15279,7 @@
                 </a:solidFill>
                 <a:latin typeface="Microsoft YaHei"/>
               </a:rPr>
-              <a:t>八项功能需求</a:t>
+              <a:t>十项功能需求</a:t>
             </a:r>
           </a:p>
         </p:txBody>
@@ -15275,7 +15294,7 @@
         </p:nvGraphicFramePr>
         <p:xfrm>
           <a:off x="658368" y="3703320"/>
-          <a:ext cx="6812280" cy="2331720"/>
+          <a:ext cx="6812280" cy="2331714"/>
         </p:xfrm>
         <a:graphic>
           <a:graphicData uri="http://schemas.openxmlformats.org/drawingml/2006/table">
@@ -15288,7 +15307,7 @@
                 <a:gridCol w="1417320"/>
                 <a:gridCol w="4736592"/>
               </a:tblGrid>
-              <a:tr h="259080">
+              <a:tr h="211974">
                 <a:tc>
                   <a:txBody>
                     <a:bodyPr wrap="square"/>
@@ -15359,7 +15378,7 @@
                   </a:tcPr>
                 </a:tc>
               </a:tr>
-              <a:tr h="259080">
+              <a:tr h="211974">
                 <a:tc>
                   <a:txBody>
                     <a:bodyPr wrap="square"/>
@@ -15367,7 +15386,7 @@
                     <a:p>
                       <a:pPr algn="l"/>
                       <a:r>
-                        <a:rPr sz="1000" b="0">
+                        <a:rPr sz="950" b="0">
                           <a:solidFill>
                             <a:srgbClr val="1F2A24"/>
                           </a:solidFill>
@@ -15390,7 +15409,7 @@
                     <a:p>
                       <a:pPr algn="l"/>
                       <a:r>
-                        <a:rPr sz="1000" b="0">
+                        <a:rPr sz="950" b="0">
                           <a:solidFill>
                             <a:srgbClr val="1F2A24"/>
                           </a:solidFill>
@@ -15413,7 +15432,7 @@
                     <a:p>
                       <a:pPr algn="l"/>
                       <a:r>
-                        <a:rPr sz="1000" b="0">
+                        <a:rPr sz="950" b="0">
                           <a:solidFill>
                             <a:srgbClr val="1F2A24"/>
                           </a:solidFill>
@@ -15430,7 +15449,7 @@
                   </a:tcPr>
                 </a:tc>
               </a:tr>
-              <a:tr h="259080">
+              <a:tr h="211974">
                 <a:tc>
                   <a:txBody>
                     <a:bodyPr wrap="square"/>
@@ -15438,7 +15457,7 @@
                     <a:p>
                       <a:pPr algn="l"/>
                       <a:r>
-                        <a:rPr sz="1000" b="0">
+                        <a:rPr sz="950" b="0">
                           <a:solidFill>
                             <a:srgbClr val="1F2A24"/>
                           </a:solidFill>
@@ -15461,7 +15480,7 @@
                     <a:p>
                       <a:pPr algn="l"/>
                       <a:r>
-                        <a:rPr sz="1000" b="0">
+                        <a:rPr sz="950" b="0">
                           <a:solidFill>
                             <a:srgbClr val="1F2A24"/>
                           </a:solidFill>
@@ -15484,7 +15503,7 @@
                     <a:p>
                       <a:pPr algn="l"/>
                       <a:r>
-                        <a:rPr sz="1000" b="0">
+                        <a:rPr sz="950" b="0">
                           <a:solidFill>
                             <a:srgbClr val="1F2A24"/>
                           </a:solidFill>
@@ -15501,7 +15520,7 @@
                   </a:tcPr>
                 </a:tc>
               </a:tr>
-              <a:tr h="259080">
+              <a:tr h="211974">
                 <a:tc>
                   <a:txBody>
                     <a:bodyPr wrap="square"/>
@@ -15509,7 +15528,7 @@
                     <a:p>
                       <a:pPr algn="l"/>
                       <a:r>
-                        <a:rPr sz="1000" b="0">
+                        <a:rPr sz="950" b="0">
                           <a:solidFill>
                             <a:srgbClr val="1F2A24"/>
                           </a:solidFill>
@@ -15532,7 +15551,7 @@
                     <a:p>
                       <a:pPr algn="l"/>
                       <a:r>
-                        <a:rPr sz="1000" b="0">
+                        <a:rPr sz="950" b="0">
                           <a:solidFill>
                             <a:srgbClr val="1F2A24"/>
                           </a:solidFill>
@@ -15555,13 +15574,13 @@
                     <a:p>
                       <a:pPr algn="l"/>
                       <a:r>
-                        <a:rPr sz="1000" b="0">
+                        <a:rPr sz="950" b="0">
                           <a:solidFill>
                             <a:srgbClr val="1F2A24"/>
                           </a:solidFill>
                           <a:latin typeface="Microsoft YaHei"/>
                         </a:rPr>
-                        <a:t>trgm + ILIKE、分页、上下文</a:t>
+                        <a:t>trgm + ILIKE、全局搜索、上下文</a:t>
                       </a:r>
                     </a:p>
                   </a:txBody>
@@ -15572,7 +15591,7 @@
                   </a:tcPr>
                 </a:tc>
               </a:tr>
-              <a:tr h="259080">
+              <a:tr h="211974">
                 <a:tc>
                   <a:txBody>
                     <a:bodyPr wrap="square"/>
@@ -15580,7 +15599,7 @@
                     <a:p>
                       <a:pPr algn="l"/>
                       <a:r>
-                        <a:rPr sz="1000" b="0">
+                        <a:rPr sz="950" b="0">
                           <a:solidFill>
                             <a:srgbClr val="1F2A24"/>
                           </a:solidFill>
@@ -15603,7 +15622,7 @@
                     <a:p>
                       <a:pPr algn="l"/>
                       <a:r>
-                        <a:rPr sz="1000" b="0">
+                        <a:rPr sz="950" b="0">
                           <a:solidFill>
                             <a:srgbClr val="1F2A24"/>
                           </a:solidFill>
@@ -15626,13 +15645,13 @@
                     <a:p>
                       <a:pPr algn="l"/>
                       <a:r>
-                        <a:rPr sz="1000" b="0">
+                        <a:rPr sz="950" b="0">
                           <a:solidFill>
                             <a:srgbClr val="1F2A24"/>
                           </a:solidFill>
                           <a:latin typeface="Microsoft YaHei"/>
                         </a:rPr>
-                        <a:t>1:N、复合唯一键、部分索引</a:t>
+                        <a:t>1:N、复合唯一键、事件流水</a:t>
                       </a:r>
                     </a:p>
                   </a:txBody>
@@ -15643,7 +15662,7 @@
                   </a:tcPr>
                 </a:tc>
               </a:tr>
-              <a:tr h="259080">
+              <a:tr h="211974">
                 <a:tc>
                   <a:txBody>
                     <a:bodyPr wrap="square"/>
@@ -15651,7 +15670,7 @@
                     <a:p>
                       <a:pPr algn="l"/>
                       <a:r>
-                        <a:rPr sz="1000" b="0">
+                        <a:rPr sz="950" b="0">
                           <a:solidFill>
                             <a:srgbClr val="1F2A24"/>
                           </a:solidFill>
@@ -15674,7 +15693,7 @@
                     <a:p>
                       <a:pPr algn="l"/>
                       <a:r>
-                        <a:rPr sz="1000" b="0">
+                        <a:rPr sz="950" b="0">
                           <a:solidFill>
                             <a:srgbClr val="1F2A24"/>
                           </a:solidFill>
@@ -15697,7 +15716,7 @@
                     <a:p>
                       <a:pPr algn="l"/>
                       <a:r>
-                        <a:rPr sz="1000" b="0">
+                        <a:rPr sz="950" b="0">
                           <a:solidFill>
                             <a:srgbClr val="1F2A24"/>
                           </a:solidFill>
@@ -15714,7 +15733,7 @@
                   </a:tcPr>
                 </a:tc>
               </a:tr>
-              <a:tr h="259080">
+              <a:tr h="211974">
                 <a:tc>
                   <a:txBody>
                     <a:bodyPr wrap="square"/>
@@ -15722,7 +15741,7 @@
                     <a:p>
                       <a:pPr algn="l"/>
                       <a:r>
-                        <a:rPr sz="1000" b="0">
+                        <a:rPr sz="950" b="0">
                           <a:solidFill>
                             <a:srgbClr val="1F2A24"/>
                           </a:solidFill>
@@ -15745,7 +15764,7 @@
                     <a:p>
                       <a:pPr algn="l"/>
                       <a:r>
-                        <a:rPr sz="1000" b="0">
+                        <a:rPr sz="950" b="0">
                           <a:solidFill>
                             <a:srgbClr val="1F2A24"/>
                           </a:solidFill>
@@ -15768,7 +15787,7 @@
                     <a:p>
                       <a:pPr algn="l"/>
                       <a:r>
-                        <a:rPr sz="1000" b="0">
+                        <a:rPr sz="950" b="0">
                           <a:solidFill>
                             <a:srgbClr val="1F2A24"/>
                           </a:solidFill>
@@ -15785,7 +15804,7 @@
                   </a:tcPr>
                 </a:tc>
               </a:tr>
-              <a:tr h="259080">
+              <a:tr h="211974">
                 <a:tc>
                   <a:txBody>
                     <a:bodyPr wrap="square"/>
@@ -15793,7 +15812,7 @@
                     <a:p>
                       <a:pPr algn="l"/>
                       <a:r>
-                        <a:rPr sz="1000" b="0">
+                        <a:rPr sz="950" b="0">
                           <a:solidFill>
                             <a:srgbClr val="1F2A24"/>
                           </a:solidFill>
@@ -15816,7 +15835,7 @@
                     <a:p>
                       <a:pPr algn="l"/>
                       <a:r>
-                        <a:rPr sz="1000" b="0">
+                        <a:rPr sz="950" b="0">
                           <a:solidFill>
                             <a:srgbClr val="1F2A24"/>
                           </a:solidFill>
@@ -15839,7 +15858,7 @@
                     <a:p>
                       <a:pPr algn="l"/>
                       <a:r>
-                        <a:rPr sz="1000" b="0">
+                        <a:rPr sz="950" b="0">
                           <a:solidFill>
                             <a:srgbClr val="1F2A24"/>
                           </a:solidFill>
@@ -15856,7 +15875,7 @@
                   </a:tcPr>
                 </a:tc>
               </a:tr>
-              <a:tr h="259080">
+              <a:tr h="211974">
                 <a:tc>
                   <a:txBody>
                     <a:bodyPr wrap="square"/>
@@ -15864,7 +15883,7 @@
                     <a:p>
                       <a:pPr algn="l"/>
                       <a:r>
-                        <a:rPr sz="1000" b="0">
+                        <a:rPr sz="950" b="0">
                           <a:solidFill>
                             <a:srgbClr val="1F2A24"/>
                           </a:solidFill>
@@ -15887,7 +15906,7 @@
                     <a:p>
                       <a:pPr algn="l"/>
                       <a:r>
-                        <a:rPr sz="1000" b="0">
+                        <a:rPr sz="950" b="0">
                           <a:solidFill>
                             <a:srgbClr val="1F2A24"/>
                           </a:solidFill>
@@ -15910,13 +15929,155 @@
                     <a:p>
                       <a:pPr algn="l"/>
                       <a:r>
-                        <a:rPr sz="1000" b="0">
+                        <a:rPr sz="950" b="0">
                           <a:solidFill>
                             <a:srgbClr val="1F2A24"/>
                           </a:solidFill>
                           <a:latin typeface="Microsoft YaHei"/>
                         </a:rPr>
                         <a:t>聚合查询、账号启停</a:t>
+                      </a:r>
+                    </a:p>
+                  </a:txBody>
+                  <a:tcPr marL="73152" marR="54864" marT="27432" marB="27432" anchor="ctr">
+                    <a:solidFill>
+                      <a:srgbClr val="ECE7DA"/>
+                    </a:solidFill>
+                  </a:tcPr>
+                </a:tc>
+              </a:tr>
+              <a:tr h="211974">
+                <a:tc>
+                  <a:txBody>
+                    <a:bodyPr wrap="square"/>
+                    <a:lstStyle/>
+                    <a:p>
+                      <a:pPr algn="l"/>
+                      <a:r>
+                        <a:rPr sz="950" b="0">
+                          <a:solidFill>
+                            <a:srgbClr val="1F2A24"/>
+                          </a:solidFill>
+                          <a:latin typeface="Microsoft YaHei"/>
+                        </a:rPr>
+                        <a:t>R09</a:t>
+                      </a:r>
+                    </a:p>
+                  </a:txBody>
+                  <a:tcPr marL="73152" marR="54864" marT="27432" marB="27432" anchor="ctr">
+                    <a:solidFill>
+                      <a:srgbClr val="FFFFFF"/>
+                    </a:solidFill>
+                  </a:tcPr>
+                </a:tc>
+                <a:tc>
+                  <a:txBody>
+                    <a:bodyPr wrap="square"/>
+                    <a:lstStyle/>
+                    <a:p>
+                      <a:pPr algn="l"/>
+                      <a:r>
+                        <a:rPr sz="950" b="0">
+                          <a:solidFill>
+                            <a:srgbClr val="1F2A24"/>
+                          </a:solidFill>
+                          <a:latin typeface="Microsoft YaHei"/>
+                        </a:rPr>
+                        <a:t>快速采集</a:t>
+                      </a:r>
+                    </a:p>
+                  </a:txBody>
+                  <a:tcPr marL="73152" marR="54864" marT="27432" marB="27432" anchor="ctr">
+                    <a:solidFill>
+                      <a:srgbClr val="FFFFFF"/>
+                    </a:solidFill>
+                  </a:tcPr>
+                </a:tc>
+                <a:tc>
+                  <a:txBody>
+                    <a:bodyPr wrap="square"/>
+                    <a:lstStyle/>
+                    <a:p>
+                      <a:pPr algn="l"/>
+                      <a:r>
+                        <a:rPr sz="950" b="0">
+                          <a:solidFill>
+                            <a:srgbClr val="1F2A24"/>
+                          </a:solidFill>
+                          <a:latin typeface="Microsoft YaHei"/>
+                        </a:rPr>
+                        <a:t>令牌哈希、限流、Bearer 复用事务</a:t>
+                      </a:r>
+                    </a:p>
+                  </a:txBody>
+                  <a:tcPr marL="73152" marR="54864" marT="27432" marB="27432" anchor="ctr">
+                    <a:solidFill>
+                      <a:srgbClr val="FFFFFF"/>
+                    </a:solidFill>
+                  </a:tcPr>
+                </a:tc>
+              </a:tr>
+              <a:tr h="211974">
+                <a:tc>
+                  <a:txBody>
+                    <a:bodyPr wrap="square"/>
+                    <a:lstStyle/>
+                    <a:p>
+                      <a:pPr algn="l"/>
+                      <a:r>
+                        <a:rPr sz="950" b="0">
+                          <a:solidFill>
+                            <a:srgbClr val="1F2A24"/>
+                          </a:solidFill>
+                          <a:latin typeface="Microsoft YaHei"/>
+                        </a:rPr>
+                        <a:t>R10</a:t>
+                      </a:r>
+                    </a:p>
+                  </a:txBody>
+                  <a:tcPr marL="73152" marR="54864" marT="27432" marB="27432" anchor="ctr">
+                    <a:solidFill>
+                      <a:srgbClr val="ECE7DA"/>
+                    </a:solidFill>
+                  </a:tcPr>
+                </a:tc>
+                <a:tc>
+                  <a:txBody>
+                    <a:bodyPr wrap="square"/>
+                    <a:lstStyle/>
+                    <a:p>
+                      <a:pPr algn="l"/>
+                      <a:r>
+                        <a:rPr sz="950" b="0">
+                          <a:solidFill>
+                            <a:srgbClr val="1F2A24"/>
+                          </a:solidFill>
+                          <a:latin typeface="Microsoft YaHei"/>
+                        </a:rPr>
+                        <a:t>离线学习</a:t>
+                      </a:r>
+                    </a:p>
+                  </a:txBody>
+                  <a:tcPr marL="73152" marR="54864" marT="27432" marB="27432" anchor="ctr">
+                    <a:solidFill>
+                      <a:srgbClr val="ECE7DA"/>
+                    </a:solidFill>
+                  </a:tcPr>
+                </a:tc>
+                <a:tc>
+                  <a:txBody>
+                    <a:bodyPr wrap="square"/>
+                    <a:lstStyle/>
+                    <a:p>
+                      <a:pPr algn="l"/>
+                      <a:r>
+                        <a:rPr sz="950" b="0">
+                          <a:solidFill>
+                            <a:srgbClr val="1F2A24"/>
+                          </a:solidFill>
+                          <a:latin typeface="Microsoft YaHei"/>
+                        </a:rPr>
+                        <a:t>IndexedDB、事件 ID 幂等同步</a:t>
                       </a:r>
                     </a:p>
                   </a:txBody>
@@ -17407,7 +17568,7 @@
                 </a:solidFill>
                 <a:latin typeface="Microsoft YaHei"/>
               </a:rPr>
-              <a:t>结构化字段完整，便于校验与映射；真实平台导出可加适配层。</a:t>
+              <a:t>结构化字段完整；已适配 ChatGPT conversations.json 与 Qoder 会话导出。</a:t>
             </a:r>
           </a:p>
         </p:txBody>
@@ -17575,7 +17736,7 @@
                 </a:solidFill>
                 <a:latin typeface="Microsoft YaHei"/>
               </a:rPr>
-              <a:t># 标题 + 课程/标签元信息 + 用户/助手分段。</a:t>
+              <a:t># 标题 + 课程/标签元信息 + 用户/助手分段；兼容 DeepSeek 原生标题。</a:t>
             </a:r>
           </a:p>
         </p:txBody>
@@ -18148,7 +18309,7 @@
                 </a:solidFill>
                 <a:latin typeface="Microsoft YaHei"/>
               </a:rPr>
-              <a:t>• 课程成员、导入批次、Text2SQL 日志是操作型实体</a:t>
+              <a:t>• 课程成员、导入批次、Text2SQL 日志、复习事件、采集令牌是操作型实体</a:t>
             </a:r>
           </a:p>
           <a:p>
@@ -18534,7 +18695,7 @@
                 </a:solidFill>
                 <a:latin typeface="Microsoft YaHei"/>
               </a:rPr>
-              <a:t>12 张表：核心业务与操作型数据分离</a:t>
+              <a:t>14 张表：核心业务与操作型数据分离</a:t>
             </a:r>
           </a:p>
         </p:txBody>
@@ -19004,7 +19165,7 @@
                           </a:solidFill>
                           <a:latin typeface="Microsoft YaHei"/>
                         </a:rPr>
-                        <a:t>annotations · review_items</a:t>
+                        <a:t>annotations · review_items · review_logs</a:t>
                       </a:r>
                     </a:p>
                   </a:txBody>
@@ -19027,7 +19188,7 @@
                           </a:solidFill>
                           <a:latin typeface="Microsoft YaHei"/>
                         </a:rPr>
-                        <a:t>UNIQUE(user_id, annotation_id)；级联删除</a:t>
+                        <a:t>UNIQUE(user_id, annotation_id)；事件流水幂等</a:t>
                       </a:r>
                     </a:p>
                   </a:txBody>
@@ -19052,7 +19213,7 @@
                           </a:solidFill>
                           <a:latin typeface="Microsoft YaHei"/>
                         </a:rPr>
-                        <a:t>运维</a:t>
+                        <a:t>采集与运维</a:t>
                       </a:r>
                     </a:p>
                   </a:txBody>
@@ -19075,7 +19236,7 @@
                           </a:solidFill>
                           <a:latin typeface="Microsoft YaHei"/>
                         </a:rPr>
-                        <a:t>import_batches · text2sql_log</a:t>
+                        <a:t>import_batches · api_tokens · text2sql_log</a:t>
                       </a:r>
                     </a:p>
                   </a:txBody>
@@ -19098,7 +19259,7 @@
                           </a:solidFill>
                           <a:latin typeface="Microsoft YaHei"/>
                         </a:rPr>
-                        <a:t>预览 token 唯一；执行结果审计</a:t>
+                        <a:t>预览 token 唯一；令牌只存哈希；执行审计</a:t>
                       </a:r>
                     </a:p>
                   </a:txBody>
@@ -20179,7 +20340,7 @@
                           </a:solidFill>
                           <a:latin typeface="Microsoft YaHei"/>
                         </a:rPr>
-                        <a:t>12 张表全部有 PK；关键关系均有 FK</a:t>
+                        <a:t>14 张表全部有 PK；关键关系均有 FK</a:t>
                       </a:r>
                     </a:p>
                   </a:txBody>
@@ -21961,8 +22122,8 @@
         </p:blipFill>
         <p:spPr>
           <a:xfrm>
-            <a:off x="1843020" y="3017520"/>
-            <a:ext cx="4442974" cy="3017520"/>
+            <a:off x="2012936" y="3017520"/>
+            <a:ext cx="4103143" cy="3017520"/>
           </a:xfrm>
           <a:prstGeom prst="rect">
             <a:avLst/>
@@ -22283,6 +22444,25 @@
                 <a:latin typeface="Microsoft YaHei"/>
               </a:rPr>
               <a:t>• 重复导入只补新增消息</a:t>
+            </a:r>
+          </a:p>
+          <a:p>
+            <a:pPr>
+              <a:lnSpc>
+                <a:spcPct val="118000"/>
+              </a:lnSpc>
+              <a:spcAft>
+                <a:spcPts val="500"/>
+              </a:spcAft>
+            </a:pPr>
+            <a:r>
+              <a:rPr sz="1150">
+                <a:solidFill>
+                  <a:srgbClr val="2F5D4E"/>
+                </a:solidFill>
+                <a:latin typeface="Microsoft YaHei"/>
+              </a:rPr>
+              <a:t>• 平台导出与 Bearer 接口共用同一事务</a:t>
             </a:r>
           </a:p>
         </p:txBody>

--- a/docs/汇报.pptx
+++ b/docs/汇报.pptx
@@ -7692,7 +7692,7 @@
                 </a:solidFill>
                 <a:latin typeface="Microsoft YaHei"/>
               </a:rPr>
-              <a:t>SQL 守卫</a:t>
+              <a:t>AST 守卫/预检</a:t>
             </a:r>
           </a:p>
         </p:txBody>
@@ -7980,7 +7980,7 @@
                 </a:solidFill>
                 <a:latin typeface="Microsoft YaHei"/>
               </a:rPr>
-              <a:t>• 只允许多一条 SELECT / WITH，拒绝 DDL、DML、注释</a:t>
+              <a:t>• sqlglot 只允许一条 SELECT/WITH，拒绝嵌套 DML 与表函数</a:t>
             </a:r>
           </a:p>
           <a:p>
@@ -8000,6 +8000,25 @@
                 <a:latin typeface="Microsoft YaHei"/>
               </a:rPr>
               <a:t>• 对象白名单：13 个 t2s 视图，禁止 app / pg_catalog</a:t>
+            </a:r>
+          </a:p>
+          <a:p>
+            <a:pPr>
+              <a:lnSpc>
+                <a:spcPct val="118000"/>
+              </a:lnSpc>
+              <a:spcAft>
+                <a:spcPts val="800"/>
+              </a:spcAft>
+            </a:pPr>
+            <a:r>
+              <a:rPr sz="1250">
+                <a:solidFill>
+                  <a:srgbClr val="2F5D4E"/>
+                </a:solidFill>
+                <a:latin typeface="Microsoft YaHei"/>
+              </a:rPr>
+              <a:t>• EXPLAIN 预检代价与估算行数，超限直接拒绝</a:t>
             </a:r>
           </a:p>
           <a:p>
@@ -8243,8 +8262,8 @@
         </p:blipFill>
         <p:spPr>
           <a:xfrm>
-            <a:off x="6537960" y="2338165"/>
-            <a:ext cx="4983480" cy="3827589"/>
+            <a:off x="6556403" y="2331720"/>
+            <a:ext cx="4946593" cy="3840480"/>
           </a:xfrm>
           <a:prstGeom prst="rect">
             <a:avLst/>
@@ -9683,7 +9702,7 @@
                 </a:solidFill>
                 <a:latin typeface="Microsoft YaHei"/>
               </a:rPr>
-              <a:t>184 项测试与 33 项端到端验收全部通过</a:t>
+              <a:t>208 项测试与 35 项端到端验收全部通过</a:t>
             </a:r>
           </a:p>
         </p:txBody>
@@ -9890,7 +9909,7 @@
                 </a:solidFill>
                 <a:latin typeface="Microsoft YaHei"/>
               </a:rPr>
-              <a:t>184</a:t>
+              <a:t>208</a:t>
             </a:r>
           </a:p>
         </p:txBody>
@@ -10015,7 +10034,7 @@
                 </a:solidFill>
                 <a:latin typeface="Microsoft YaHei"/>
               </a:rPr>
-              <a:t>33</a:t>
+              <a:t>35</a:t>
             </a:r>
           </a:p>
         </p:txBody>
@@ -10279,7 +10298,7 @@
                 </a:solidFill>
                 <a:latin typeface="Consolas"/>
               </a:rPr>
-              <a:t># 101 unit + 83 integration</a:t>
+              <a:t># 121 unit + 87 integration</a:t>
             </a:r>
           </a:p>
           <a:p>
@@ -10366,7 +10385,7 @@
                 </a:solidFill>
                 <a:latin typeface="Microsoft YaHei"/>
               </a:rPr>
-              <a:t>输出：33/33 PASS，0 FAIL，约 0.7 秒</a:t>
+              <a:t>输出：35/35 PASS，0 FAIL，约 1.4 秒</a:t>
             </a:r>
           </a:p>
           <a:p>
@@ -10984,7 +11003,7 @@
                 </a:solidFill>
                 <a:latin typeface="Microsoft YaHei"/>
               </a:rPr>
-              <a:t>✓  Text2SQL：恶意 SQL、跨用户、只读兜底</a:t>
+              <a:t>✓  Text2SQL：AST / 预检 / 金标准评测</a:t>
             </a:r>
           </a:p>
         </p:txBody>
@@ -12509,7 +12528,7 @@
                 </a:solidFill>
                 <a:latin typeface="Microsoft YaHei"/>
               </a:rPr>
-              <a:t>• 184 项测试 + 33 项验收，全部通过</a:t>
+              <a:t>• 208 项测试 + 35 项验收，全部通过</a:t>
             </a:r>
           </a:p>
           <a:p>

--- a/docs/汇报.pptx
+++ b/docs/汇报.pptx
@@ -1567,7 +1567,7 @@
           <a:lstStyle/>
           <a:p>
             <a:r>
-              <a:t>35 秒：搜索“隔离级别”进入会话详情，讲 trgm、分页和上下文。</a:t>
+              <a:t>35 秒：搜索“隔离级别”进入会话详情；说明无模型时纯词法，配置后自动混合检索。</a:t>
             </a:r>
           </a:p>
         </p:txBody>
@@ -9702,7 +9702,7 @@
                 </a:solidFill>
                 <a:latin typeface="Microsoft YaHei"/>
               </a:rPr>
-              <a:t>208 项测试与 35 项端到端验收全部通过</a:t>
+              <a:t>220 项测试与 37 项端到端验收全部通过</a:t>
             </a:r>
           </a:p>
         </p:txBody>
@@ -9909,7 +9909,7 @@
                 </a:solidFill>
                 <a:latin typeface="Microsoft YaHei"/>
               </a:rPr>
-              <a:t>208</a:t>
+              <a:t>220</a:t>
             </a:r>
           </a:p>
         </p:txBody>
@@ -10034,7 +10034,7 @@
                 </a:solidFill>
                 <a:latin typeface="Microsoft YaHei"/>
               </a:rPr>
-              <a:t>35</a:t>
+              <a:t>37</a:t>
             </a:r>
           </a:p>
         </p:txBody>
@@ -10298,7 +10298,7 @@
                 </a:solidFill>
                 <a:latin typeface="Consolas"/>
               </a:rPr>
-              <a:t># 121 unit + 87 integration</a:t>
+              <a:t># 128 unit + 92 integration</a:t>
             </a:r>
           </a:p>
           <a:p>
@@ -10385,7 +10385,7 @@
                 </a:solidFill>
                 <a:latin typeface="Microsoft YaHei"/>
               </a:rPr>
-              <a:t>输出：35/35 PASS，0 FAIL，约 1.4 秒</a:t>
+              <a:t>输出：37/37 PASS，0 FAIL，约 1–4 秒</a:t>
             </a:r>
           </a:p>
           <a:p>
@@ -10745,7 +10745,7 @@
                 </a:solidFill>
                 <a:latin typeface="Microsoft YaHei"/>
               </a:rPr>
-              <a:t>✓  检索：关键词、课程、标签、全局搜索</a:t>
+              <a:t>✓  检索：关键词、课程、标签、全局搜索、混合检索</a:t>
             </a:r>
           </a:p>
         </p:txBody>
@@ -11376,7 +11376,7 @@
                           </a:solidFill>
                           <a:latin typeface="Microsoft YaHei"/>
                         </a:rPr>
-                        <a:t>复用 ReviewMate 向量模型</a:t>
+                        <a:t>把向量检索作为核心</a:t>
                       </a:r>
                     </a:p>
                   </a:txBody>
@@ -11399,7 +11399,7 @@
                           </a:solidFill>
                           <a:latin typeface="Microsoft YaHei"/>
                         </a:rPr>
-                        <a:t>经典关系模型</a:t>
+                        <a:t>经典关系模型 + 可选向量</a:t>
                       </a:r>
                     </a:p>
                   </a:txBody>
@@ -12528,7 +12528,7 @@
                 </a:solidFill>
                 <a:latin typeface="Microsoft YaHei"/>
               </a:rPr>
-              <a:t>• 208 项测试 + 35 项验收，全部通过</a:t>
+              <a:t>• 220 项测试 + 37 项验收，全部通过</a:t>
             </a:r>
           </a:p>
           <a:p>
@@ -22821,6 +22821,25 @@
                 </a:solidFill>
                 <a:latin typeface="Microsoft YaHei"/>
               </a:rPr>
+              <a:t>• 可选 pgvector + HNSW，RRF 融合词法与语义</a:t>
+            </a:r>
+          </a:p>
+          <a:p>
+            <a:pPr>
+              <a:lnSpc>
+                <a:spcPct val="118000"/>
+              </a:lnSpc>
+              <a:spcAft>
+                <a:spcPts val="1000"/>
+              </a:spcAft>
+            </a:pPr>
+            <a:r>
+              <a:rPr sz="1400">
+                <a:solidFill>
+                  <a:srgbClr val="2F5D4E"/>
+                </a:solidFill>
+                <a:latin typeface="Microsoft YaHei"/>
+              </a:rPr>
               <a:t>• count(*) OVER() 一次查询拿到分页总数</a:t>
             </a:r>
           </a:p>

--- a/docs/汇报.pptx
+++ b/docs/汇报.pptx
@@ -1567,7 +1567,7 @@
           <a:lstStyle/>
           <a:p>
             <a:r>
-              <a:t>35 秒：搜索“隔离级别”进入会话详情；说明无模型时纯词法，配置后自动混合检索。</a:t>
+              <a:t>35 秒：搜索“隔离级别”进入会话详情；说明无模型时纯词法，配置后自动混合检索；AI 建议只回填表单，保存后才写库。</a:t>
             </a:r>
           </a:p>
         </p:txBody>
@@ -9702,7 +9702,7 @@
                 </a:solidFill>
                 <a:latin typeface="Microsoft YaHei"/>
               </a:rPr>
-              <a:t>220 项测试与 37 项端到端验收全部通过</a:t>
+              <a:t>231 项测试与 38 项端到端验收全部通过</a:t>
             </a:r>
           </a:p>
         </p:txBody>
@@ -9909,7 +9909,7 @@
                 </a:solidFill>
                 <a:latin typeface="Microsoft YaHei"/>
               </a:rPr>
-              <a:t>220</a:t>
+              <a:t>231</a:t>
             </a:r>
           </a:p>
         </p:txBody>
@@ -10034,7 +10034,7 @@
                 </a:solidFill>
                 <a:latin typeface="Microsoft YaHei"/>
               </a:rPr>
-              <a:t>37</a:t>
+              <a:t>38</a:t>
             </a:r>
           </a:p>
         </p:txBody>
@@ -10298,7 +10298,7 @@
                 </a:solidFill>
                 <a:latin typeface="Consolas"/>
               </a:rPr>
-              <a:t># 128 unit + 92 integration</a:t>
+              <a:t># 135 unit + 96 integration</a:t>
             </a:r>
           </a:p>
           <a:p>
@@ -10385,7 +10385,7 @@
                 </a:solidFill>
                 <a:latin typeface="Microsoft YaHei"/>
               </a:rPr>
-              <a:t>输出：37/37 PASS，0 FAIL，约 1–4 秒</a:t>
+              <a:t>输出：38/38 PASS，0 FAIL，约 1–4 秒</a:t>
             </a:r>
           </a:p>
           <a:p>
@@ -10745,7 +10745,7 @@
                 </a:solidFill>
                 <a:latin typeface="Microsoft YaHei"/>
               </a:rPr>
-              <a:t>✓  检索：关键词、课程、标签、全局搜索、混合检索</a:t>
+              <a:t>✓  检索：关键词、课程、标签、全局搜索、混合检索、AI 建议</a:t>
             </a:r>
           </a:p>
         </p:txBody>
@@ -11278,7 +11278,7 @@
         </p:nvGraphicFramePr>
         <p:xfrm>
           <a:off x="658368" y="1481328"/>
-          <a:ext cx="7406640" cy="3383275"/>
+          <a:ext cx="7406640" cy="3383280"/>
         </p:xfrm>
         <a:graphic>
           <a:graphicData uri="http://schemas.openxmlformats.org/drawingml/2006/table">
@@ -11291,7 +11291,7 @@
                 <a:gridCol w="2423160"/>
                 <a:gridCol w="2011680"/>
               </a:tblGrid>
-              <a:tr h="483325">
+              <a:tr h="422910">
                 <a:tc>
                   <a:txBody>
                     <a:bodyPr wrap="square"/>
@@ -11362,7 +11362,7 @@
                   </a:tcPr>
                 </a:tc>
               </a:tr>
-              <a:tr h="483325">
+              <a:tr h="422910">
                 <a:tc>
                   <a:txBody>
                     <a:bodyPr wrap="square"/>
@@ -11433,7 +11433,7 @@
                   </a:tcPr>
                 </a:tc>
               </a:tr>
-              <a:tr h="483325">
+              <a:tr h="422910">
                 <a:tc>
                   <a:txBody>
                     <a:bodyPr wrap="square"/>
@@ -11504,7 +11504,7 @@
                   </a:tcPr>
                 </a:tc>
               </a:tr>
-              <a:tr h="483325">
+              <a:tr h="422910">
                 <a:tc>
                   <a:txBody>
                     <a:bodyPr wrap="square"/>
@@ -11575,7 +11575,7 @@
                   </a:tcPr>
                 </a:tc>
               </a:tr>
-              <a:tr h="483325">
+              <a:tr h="422910">
                 <a:tc>
                   <a:txBody>
                     <a:bodyPr wrap="square"/>
@@ -11646,7 +11646,7 @@
                   </a:tcPr>
                 </a:tc>
               </a:tr>
-              <a:tr h="483325">
+              <a:tr h="422910">
                 <a:tc>
                   <a:txBody>
                     <a:bodyPr wrap="square"/>
@@ -11717,7 +11717,7 @@
                   </a:tcPr>
                 </a:tc>
               </a:tr>
-              <a:tr h="483325">
+              <a:tr h="422910">
                 <a:tc>
                   <a:txBody>
                     <a:bodyPr wrap="square"/>
@@ -11731,7 +11731,7 @@
                           </a:solidFill>
                           <a:latin typeface="Microsoft YaHei"/>
                         </a:rPr>
-                        <a:t>中文全文检索</a:t>
+                        <a:t>AI 建议直接入库</a:t>
                       </a:r>
                     </a:p>
                   </a:txBody>
@@ -11754,7 +11754,7 @@
                           </a:solidFill>
                           <a:latin typeface="Microsoft YaHei"/>
                         </a:rPr>
-                        <a:t>pg_trgm + ILIKE</a:t>
+                        <a:t>人工确认 + 复用总结批注</a:t>
                       </a:r>
                     </a:p>
                   </a:txBody>
@@ -11777,13 +11777,84 @@
                           </a:solidFill>
                           <a:latin typeface="Microsoft YaHei"/>
                         </a:rPr>
+                        <a:t>避免污染与重复表</a:t>
+                      </a:r>
+                    </a:p>
+                  </a:txBody>
+                  <a:tcPr marL="73152" marR="54864" marT="27432" marB="27432" anchor="ctr">
+                    <a:solidFill>
+                      <a:srgbClr val="ECE7DA"/>
+                    </a:solidFill>
+                  </a:tcPr>
+                </a:tc>
+              </a:tr>
+              <a:tr h="422910">
+                <a:tc>
+                  <a:txBody>
+                    <a:bodyPr wrap="square"/>
+                    <a:lstStyle/>
+                    <a:p>
+                      <a:pPr algn="l"/>
+                      <a:r>
+                        <a:rPr sz="1000" b="0">
+                          <a:solidFill>
+                            <a:srgbClr val="1F2A24"/>
+                          </a:solidFill>
+                          <a:latin typeface="Microsoft YaHei"/>
+                        </a:rPr>
+                        <a:t>中文全文检索</a:t>
+                      </a:r>
+                    </a:p>
+                  </a:txBody>
+                  <a:tcPr marL="73152" marR="54864" marT="27432" marB="27432" anchor="ctr">
+                    <a:solidFill>
+                      <a:srgbClr val="FFFFFF"/>
+                    </a:solidFill>
+                  </a:tcPr>
+                </a:tc>
+                <a:tc>
+                  <a:txBody>
+                    <a:bodyPr wrap="square"/>
+                    <a:lstStyle/>
+                    <a:p>
+                      <a:pPr algn="l"/>
+                      <a:r>
+                        <a:rPr sz="1000" b="0">
+                          <a:solidFill>
+                            <a:srgbClr val="1F2A24"/>
+                          </a:solidFill>
+                          <a:latin typeface="Microsoft YaHei"/>
+                        </a:rPr>
+                        <a:t>pg_trgm + ILIKE</a:t>
+                      </a:r>
+                    </a:p>
+                  </a:txBody>
+                  <a:tcPr marL="73152" marR="54864" marT="27432" marB="27432" anchor="ctr">
+                    <a:solidFill>
+                      <a:srgbClr val="FFFFFF"/>
+                    </a:solidFill>
+                  </a:tcPr>
+                </a:tc>
+                <a:tc>
+                  <a:txBody>
+                    <a:bodyPr wrap="square"/>
+                    <a:lstStyle/>
+                    <a:p>
+                      <a:pPr algn="l"/>
+                      <a:r>
+                        <a:rPr sz="1000" b="0">
+                          <a:solidFill>
+                            <a:srgbClr val="1F2A24"/>
+                          </a:solidFill>
+                          <a:latin typeface="Microsoft YaHei"/>
+                        </a:rPr>
                         <a:t>中文分词不可靠</a:t>
                       </a:r>
                     </a:p>
                   </a:txBody>
                   <a:tcPr marL="73152" marR="54864" marT="27432" marB="27432" anchor="ctr">
                     <a:solidFill>
-                      <a:srgbClr val="ECE7DA"/>
+                      <a:srgbClr val="FFFFFF"/>
                     </a:solidFill>
                   </a:tcPr>
                 </a:tc>
@@ -12528,7 +12599,7 @@
                 </a:solidFill>
                 <a:latin typeface="Microsoft YaHei"/>
               </a:rPr>
-              <a:t>• 220 项测试 + 37 项验收，全部通过</a:t>
+              <a:t>• 231 项测试 + 38 项验收，全部通过</a:t>
             </a:r>
           </a:p>
           <a:p>
@@ -15576,7 +15647,7 @@
                           </a:solidFill>
                           <a:latin typeface="Microsoft YaHei"/>
                         </a:rPr>
-                        <a:t>检索阅读</a:t>
+                        <a:t>检索与整理</a:t>
                       </a:r>
                     </a:p>
                   </a:txBody>
@@ -15599,7 +15670,7 @@
                           </a:solidFill>
                           <a:latin typeface="Microsoft YaHei"/>
                         </a:rPr>
-                        <a:t>trgm + ILIKE、全局搜索、上下文</a:t>
+                        <a:t>trgm + ILIKE、RRF、建议回填</a:t>
                       </a:r>
                     </a:p>
                   </a:txBody>
@@ -22898,6 +22969,25 @@
                 <a:latin typeface="Microsoft YaHei"/>
               </a:rPr>
               <a:t>• 关键词在标题和正文中高亮显示</a:t>
+            </a:r>
+          </a:p>
+          <a:p>
+            <a:pPr>
+              <a:lnSpc>
+                <a:spcPct val="118000"/>
+              </a:lnSpc>
+              <a:spcAft>
+                <a:spcPts val="1000"/>
+              </a:spcAft>
+            </a:pPr>
+            <a:r>
+              <a:rPr sz="1400">
+                <a:solidFill>
+                  <a:srgbClr val="2F5D4E"/>
+                </a:solidFill>
+                <a:latin typeface="Microsoft YaHei"/>
+              </a:rPr>
+              <a:t>• 可选 AI 建议：摘要与标签只回填，确认后入库</a:t>
             </a:r>
           </a:p>
         </p:txBody>

--- a/docs/汇报.pptx
+++ b/docs/汇报.pptx
@@ -21,6 +21,7 @@
     <p:sldId id="269" r:id="rId21"/>
     <p:sldId id="270" r:id="rId22"/>
     <p:sldId id="271" r:id="rId23"/>
+    <p:sldId id="272" r:id="rId24"/>
   </p:sldIdLst>
   <p:sldSz cx="12191695" cy="6858000" type="screen4x3"/>
   <p:notesSz cx="6858000" cy="9144000"/>
@@ -657,7 +658,7 @@
           <a:lstStyle/>
           <a:p>
             <a:r>
-              <a:t>35 秒：指统计页的课程排名、月度活跃、标签 Top、重复检测；说明导出。</a:t>
+              <a:t>35 秒：讲边表、触发器防环、递归闭包；指出页面拆成 6 张课程子图，避免一张巨图。</a:t>
             </a:r>
           </a:p>
         </p:txBody>
@@ -727,7 +728,7 @@
           <a:lstStyle/>
           <a:p>
             <a:r>
-              <a:t>45 秒：提交“每个课程有多少会话和消息？”；强调多层守卫和只读角色兜底。</a:t>
+              <a:t>35 秒：指统计页的课程排名、月度活跃、标签 Top、重复检测；说明导出。</a:t>
             </a:r>
           </a:p>
         </p:txBody>
@@ -797,7 +798,7 @@
           <a:lstStyle/>
           <a:p>
             <a:r>
-              <a:t>35 秒：讲矩阵；现场用 bob 访问编辑 URL 展示 403，admin 只做聚合。</a:t>
+              <a:t>45 秒：提交“每个课程有多少会话和消息？”；强调多层守卫和只读角色兜底。</a:t>
             </a:r>
           </a:p>
         </p:txBody>
@@ -867,7 +868,7 @@
           <a:lstStyle/>
           <a:p>
             <a:r>
-              <a:t>30 秒：报数字，强调集成测试使用独立 _test 库、验收写入全部回滚。</a:t>
+              <a:t>35 秒：讲矩阵；现场用 bob 访问编辑 URL 展示 403，admin 只做聚合。</a:t>
             </a:r>
           </a:p>
         </p:txBody>
@@ -937,7 +938,7 @@
           <a:lstStyle/>
           <a:p>
             <a:r>
-              <a:t>30 秒：举 2 个被否方案，说明人机分工；不把 AI 生成当作正确性证明。</a:t>
+              <a:t>30 秒：报数字，强调集成测试使用独立 _test 库、验收写入全部回滚。</a:t>
             </a:r>
           </a:p>
         </p:txBody>
@@ -963,6 +964,76 @@
 </file>
 
 <file path=ppt/notesSlides/notesSlide16.xml><?xml version="1.0" encoding="utf-8"?>
+<p:notes xmlns:a="http://schemas.openxmlformats.org/drawingml/2006/main" xmlns:p="http://schemas.openxmlformats.org/presentationml/2006/main" xmlns:r="http://schemas.openxmlformats.org/officeDocument/2006/relationships">
+  <p:cSld>
+    <p:spTree>
+      <p:nvGrpSpPr>
+        <p:cNvPr id="1" name=""/>
+        <p:cNvGrpSpPr/>
+        <p:nvPr/>
+      </p:nvGrpSpPr>
+      <p:grpSpPr>
+        <a:xfrm>
+          <a:off x="0" y="0"/>
+          <a:ext cx="0" cy="0"/>
+          <a:chOff x="0" y="0"/>
+          <a:chExt cx="0" cy="0"/>
+        </a:xfrm>
+      </p:grpSpPr>
+      <p:sp>
+        <p:nvSpPr>
+          <p:cNvPr id="2" name="Slide Image Placeholder 1"/>
+          <p:cNvSpPr>
+            <a:spLocks noGrp="1"/>
+          </p:cNvSpPr>
+          <p:nvPr>
+            <p:ph type="sldImg" idx="2"/>
+          </p:nvPr>
+        </p:nvSpPr>
+        <p:spPr/>
+      </p:sp>
+      <p:sp>
+        <p:nvSpPr>
+          <p:cNvPr id="3" name="Notes Placeholder 2"/>
+          <p:cNvSpPr>
+            <a:spLocks noGrp="1"/>
+          </p:cNvSpPr>
+          <p:nvPr>
+            <p:ph type="body" idx="3" sz="quarter"/>
+          </p:nvPr>
+        </p:nvSpPr>
+        <p:spPr/>
+        <p:txBody>
+          <a:bodyPr/>
+          <a:lstStyle/>
+          <a:p>
+            <a:r>
+              <a:t>30 秒：举 2 个被否方案，说明人机分工；不把 AI 生成当作正确性证明。</a:t>
+            </a:r>
+          </a:p>
+        </p:txBody>
+      </p:sp>
+      <p:sp>
+        <p:nvSpPr>
+          <p:cNvPr id="4" name="Slide Number Placeholder 3"/>
+          <p:cNvSpPr>
+            <a:spLocks noGrp="1"/>
+          </p:cNvSpPr>
+          <p:nvPr>
+            <p:ph type="sldNum" idx="5" sz="quarter"/>
+          </p:nvPr>
+        </p:nvSpPr>
+        <p:spPr/>
+      </p:sp>
+    </p:spTree>
+  </p:cSld>
+  <p:clrMapOvr>
+    <a:masterClrMapping/>
+  </p:clrMapOvr>
+</p:notes>
+</file>
+
+<file path=ppt/notesSlides/notesSlide17.xml><?xml version="1.0" encoding="utf-8"?>
 <p:notes xmlns:a="http://schemas.openxmlformats.org/drawingml/2006/main" xmlns:p="http://schemas.openxmlformats.org/presentationml/2006/main" xmlns:r="http://schemas.openxmlformats.org/officeDocument/2006/relationships">
   <p:cSld>
     <p:spTree>
@@ -6310,7 +6381,7 @@
                 </a:solidFill>
                 <a:latin typeface="Microsoft YaHei"/>
               </a:rPr>
-              <a:t>10 / 统计与导出</a:t>
+              <a:t>10 / 知识先修图</a:t>
             </a:r>
           </a:p>
         </p:txBody>
@@ -6349,7 +6420,7 @@
                 </a:solidFill>
                 <a:latin typeface="Microsoft YaHei"/>
               </a:rPr>
-              <a:t>把课程里的聚合查询真正用起来</a:t>
+              <a:t>把标签连成 DAG：先学什么，后学什么</a:t>
             </a:r>
           </a:p>
         </p:txBody>
@@ -6484,7 +6555,7 @@
         <p:spPr>
           <a:xfrm>
             <a:off x="658368" y="1481328"/>
-            <a:ext cx="5349240" cy="786384"/>
+            <a:ext cx="1719072" cy="1097280"/>
           </a:xfrm>
           <a:prstGeom prst="roundRect">
             <a:avLst>
@@ -6524,14 +6595,57 @@
       </p:sp>
       <p:sp>
         <p:nvSpPr>
-          <p:cNvPr id="9" name="TextBox 8"/>
+          <p:cNvPr id="9" name="Rectangle 8"/>
+          <p:cNvSpPr/>
+          <p:nvPr/>
+        </p:nvSpPr>
+        <p:spPr>
+          <a:xfrm>
+            <a:off x="658368" y="1481328"/>
+            <a:ext cx="73152" cy="1097280"/>
+          </a:xfrm>
+          <a:prstGeom prst="rect">
+            <a:avLst/>
+          </a:prstGeom>
+          <a:solidFill>
+            <a:srgbClr val="2F5D4E"/>
+          </a:solidFill>
+          <a:ln>
+            <a:noFill/>
+          </a:ln>
+        </p:spPr>
+        <p:style>
+          <a:lnRef idx="1">
+            <a:schemeClr val="accent1"/>
+          </a:lnRef>
+          <a:fillRef idx="3">
+            <a:schemeClr val="accent1"/>
+          </a:fillRef>
+          <a:effectRef idx="2">
+            <a:schemeClr val="accent1"/>
+          </a:effectRef>
+          <a:fontRef idx="minor">
+            <a:schemeClr val="lt1"/>
+          </a:fontRef>
+        </p:style>
+        <p:txBody>
+          <a:bodyPr rtlCol="0" anchor="ctr"/>
+          <a:lstStyle/>
+          <a:p>
+            <a:pPr algn="ctr"/>
+          </a:p>
+        </p:txBody>
+      </p:sp>
+      <p:sp>
+        <p:nvSpPr>
+          <p:cNvPr id="10" name="TextBox 9"/>
           <p:cNvSpPr txBox="1"/>
           <p:nvPr/>
         </p:nvSpPr>
         <p:spPr>
           <a:xfrm>
-            <a:off x="822960" y="1572768"/>
-            <a:ext cx="1234440" cy="256032"/>
+            <a:off x="877824" y="1645920"/>
+            <a:ext cx="1298448" cy="310896"/>
           </a:xfrm>
           <a:prstGeom prst="rect">
             <a:avLst/>
@@ -6550,27 +6664,27 @@
               </a:lnSpc>
             </a:pPr>
             <a:r>
-              <a:rPr sz="1150" b="1">
+              <a:rPr sz="1500" b="1">
                 <a:solidFill>
                   <a:srgbClr val="2F5D4E"/>
                 </a:solidFill>
                 <a:latin typeface="Microsoft YaHei"/>
               </a:rPr>
-              <a:t>课程排名</a:t>
-            </a:r>
-          </a:p>
-        </p:txBody>
-      </p:sp>
-      <p:sp>
-        <p:nvSpPr>
-          <p:cNvPr id="10" name="TextBox 9"/>
+              <a:t>图模型</a:t>
+            </a:r>
+          </a:p>
+        </p:txBody>
+      </p:sp>
+      <p:sp>
+        <p:nvSpPr>
+          <p:cNvPr id="11" name="TextBox 10"/>
           <p:cNvSpPr txBox="1"/>
           <p:nvPr/>
         </p:nvSpPr>
         <p:spPr>
           <a:xfrm>
-            <a:off x="2057400" y="1572768"/>
-            <a:ext cx="3794760" cy="530352"/>
+            <a:off x="877824" y="2029968"/>
+            <a:ext cx="1298448" cy="566928"/>
           </a:xfrm>
           <a:prstGeom prst="rect">
             <a:avLst/>
@@ -6585,31 +6699,47 @@
           <a:p>
             <a:pPr algn="l">
               <a:lnSpc>
-                <a:spcPct val="105000"/>
-              </a:lnSpc>
-            </a:pPr>
-            <a:r>
-              <a:rPr sz="1050" b="0">
+                <a:spcPct val="112000"/>
+              </a:lnSpc>
+            </a:pPr>
+            <a:r>
+              <a:rPr sz="1200" b="0">
                 <a:solidFill>
                   <a:srgbClr val="6C756F"/>
                 </a:solidFill>
-                <a:latin typeface="Consolas"/>
-              </a:rPr>
-              <a:t>RANK() OVER (ORDER BY message_count DESC)</a:t>
-            </a:r>
-          </a:p>
-        </p:txBody>
-      </p:sp>
-      <p:sp>
-        <p:nvSpPr>
-          <p:cNvPr id="11" name="Rounded Rectangle 10"/>
+                <a:latin typeface="Microsoft YaHei"/>
+              </a:rPr>
+              <a:t>tag_edges</a:t>
+            </a:r>
+          </a:p>
+          <a:p>
+            <a:pPr algn="l">
+              <a:lnSpc>
+                <a:spcPct val="112000"/>
+              </a:lnSpc>
+            </a:pPr>
+            <a:r>
+              <a:rPr sz="1200" b="0">
+                <a:solidFill>
+                  <a:srgbClr val="6C756F"/>
+                </a:solidFill>
+                <a:latin typeface="Microsoft YaHei"/>
+              </a:rPr>
+              <a:t>(from → to)</a:t>
+            </a:r>
+          </a:p>
+        </p:txBody>
+      </p:sp>
+      <p:sp>
+        <p:nvSpPr>
+          <p:cNvPr id="12" name="Rounded Rectangle 11"/>
           <p:cNvSpPr/>
           <p:nvPr/>
         </p:nvSpPr>
         <p:spPr>
           <a:xfrm>
-            <a:off x="658368" y="2414016"/>
-            <a:ext cx="5349240" cy="786384"/>
+            <a:off x="2532887" y="1481328"/>
+            <a:ext cx="1719072" cy="1097280"/>
           </a:xfrm>
           <a:prstGeom prst="roundRect">
             <a:avLst>
@@ -6649,14 +6779,57 @@
       </p:sp>
       <p:sp>
         <p:nvSpPr>
-          <p:cNvPr id="12" name="TextBox 11"/>
+          <p:cNvPr id="13" name="Rectangle 12"/>
+          <p:cNvSpPr/>
+          <p:nvPr/>
+        </p:nvSpPr>
+        <p:spPr>
+          <a:xfrm>
+            <a:off x="2532887" y="1481328"/>
+            <a:ext cx="73152" cy="1097280"/>
+          </a:xfrm>
+          <a:prstGeom prst="rect">
+            <a:avLst/>
+          </a:prstGeom>
+          <a:solidFill>
+            <a:srgbClr val="B4693F"/>
+          </a:solidFill>
+          <a:ln>
+            <a:noFill/>
+          </a:ln>
+        </p:spPr>
+        <p:style>
+          <a:lnRef idx="1">
+            <a:schemeClr val="accent1"/>
+          </a:lnRef>
+          <a:fillRef idx="3">
+            <a:schemeClr val="accent1"/>
+          </a:fillRef>
+          <a:effectRef idx="2">
+            <a:schemeClr val="accent1"/>
+          </a:effectRef>
+          <a:fontRef idx="minor">
+            <a:schemeClr val="lt1"/>
+          </a:fontRef>
+        </p:style>
+        <p:txBody>
+          <a:bodyPr rtlCol="0" anchor="ctr"/>
+          <a:lstStyle/>
+          <a:p>
+            <a:pPr algn="ctr"/>
+          </a:p>
+        </p:txBody>
+      </p:sp>
+      <p:sp>
+        <p:nvSpPr>
+          <p:cNvPr id="14" name="TextBox 13"/>
           <p:cNvSpPr txBox="1"/>
           <p:nvPr/>
         </p:nvSpPr>
         <p:spPr>
           <a:xfrm>
-            <a:off x="822960" y="2505456"/>
-            <a:ext cx="1234440" cy="256032"/>
+            <a:off x="2752344" y="1645920"/>
+            <a:ext cx="1298448" cy="310896"/>
           </a:xfrm>
           <a:prstGeom prst="rect">
             <a:avLst/>
@@ -6675,27 +6848,27 @@
               </a:lnSpc>
             </a:pPr>
             <a:r>
-              <a:rPr sz="1150" b="1">
-                <a:solidFill>
-                  <a:srgbClr val="2F5D4E"/>
-                </a:solidFill>
-                <a:latin typeface="Microsoft YaHei"/>
-              </a:rPr>
-              <a:t>解决率</a:t>
-            </a:r>
-          </a:p>
-        </p:txBody>
-      </p:sp>
-      <p:sp>
-        <p:nvSpPr>
-          <p:cNvPr id="13" name="TextBox 12"/>
+              <a:rPr sz="1500" b="1">
+                <a:solidFill>
+                  <a:srgbClr val="B4693F"/>
+                </a:solidFill>
+                <a:latin typeface="Microsoft YaHei"/>
+              </a:rPr>
+              <a:t>防环</a:t>
+            </a:r>
+          </a:p>
+        </p:txBody>
+      </p:sp>
+      <p:sp>
+        <p:nvSpPr>
+          <p:cNvPr id="15" name="TextBox 14"/>
           <p:cNvSpPr txBox="1"/>
           <p:nvPr/>
         </p:nvSpPr>
         <p:spPr>
           <a:xfrm>
-            <a:off x="2057400" y="2505456"/>
-            <a:ext cx="3794760" cy="530352"/>
+            <a:off x="2752344" y="2029968"/>
+            <a:ext cx="1298448" cy="566928"/>
           </a:xfrm>
           <a:prstGeom prst="rect">
             <a:avLst/>
@@ -6710,31 +6883,47 @@
           <a:p>
             <a:pPr algn="l">
               <a:lnSpc>
-                <a:spcPct val="105000"/>
-              </a:lnSpc>
-            </a:pPr>
-            <a:r>
-              <a:rPr sz="1050" b="0">
+                <a:spcPct val="112000"/>
+              </a:lnSpc>
+            </a:pPr>
+            <a:r>
+              <a:rPr sz="1200" b="0">
                 <a:solidFill>
                   <a:srgbClr val="6C756F"/>
                 </a:solidFill>
-                <a:latin typeface="Consolas"/>
-              </a:rPr>
-              <a:t>COUNT(*) FILTER (WHERE status = 'resolved')</a:t>
-            </a:r>
-          </a:p>
-        </p:txBody>
-      </p:sp>
-      <p:sp>
-        <p:nvSpPr>
-          <p:cNvPr id="14" name="Rounded Rectangle 13"/>
+                <a:latin typeface="Microsoft YaHei"/>
+              </a:rPr>
+              <a:t>触发器</a:t>
+            </a:r>
+          </a:p>
+          <a:p>
+            <a:pPr algn="l">
+              <a:lnSpc>
+                <a:spcPct val="112000"/>
+              </a:lnSpc>
+            </a:pPr>
+            <a:r>
+              <a:rPr sz="1200" b="0">
+                <a:solidFill>
+                  <a:srgbClr val="6C756F"/>
+                </a:solidFill>
+                <a:latin typeface="Microsoft YaHei"/>
+              </a:rPr>
+              <a:t>递归 CTE</a:t>
+            </a:r>
+          </a:p>
+        </p:txBody>
+      </p:sp>
+      <p:sp>
+        <p:nvSpPr>
+          <p:cNvPr id="16" name="Rounded Rectangle 15"/>
           <p:cNvSpPr/>
           <p:nvPr/>
         </p:nvSpPr>
         <p:spPr>
           <a:xfrm>
-            <a:off x="658368" y="3346704"/>
-            <a:ext cx="5349240" cy="786384"/>
+            <a:off x="4407407" y="1481328"/>
+            <a:ext cx="1719072" cy="1097280"/>
           </a:xfrm>
           <a:prstGeom prst="roundRect">
             <a:avLst>
@@ -6774,105 +6963,23 @@
       </p:sp>
       <p:sp>
         <p:nvSpPr>
-          <p:cNvPr id="15" name="TextBox 14"/>
-          <p:cNvSpPr txBox="1"/>
-          <p:nvPr/>
-        </p:nvSpPr>
-        <p:spPr>
-          <a:xfrm>
-            <a:off x="822960" y="3438144"/>
-            <a:ext cx="1234440" cy="256032"/>
-          </a:xfrm>
-          <a:prstGeom prst="rect">
-            <a:avLst/>
-          </a:prstGeom>
-          <a:noFill/>
-        </p:spPr>
-        <p:txBody>
-          <a:bodyPr wrap="square" anchor="t" lIns="36576" tIns="27432" rIns="36576" bIns="27432">
-            <a:spAutoFit/>
-          </a:bodyPr>
-          <a:lstStyle/>
-          <a:p>
-            <a:pPr algn="l">
-              <a:lnSpc>
-                <a:spcPct val="115000"/>
-              </a:lnSpc>
-            </a:pPr>
-            <a:r>
-              <a:rPr sz="1150" b="1">
-                <a:solidFill>
-                  <a:srgbClr val="2F5D4E"/>
-                </a:solidFill>
-                <a:latin typeface="Microsoft YaHei"/>
-              </a:rPr>
-              <a:t>月度补零</a:t>
-            </a:r>
-          </a:p>
-        </p:txBody>
-      </p:sp>
-      <p:sp>
-        <p:nvSpPr>
-          <p:cNvPr id="16" name="TextBox 15"/>
-          <p:cNvSpPr txBox="1"/>
-          <p:nvPr/>
-        </p:nvSpPr>
-        <p:spPr>
-          <a:xfrm>
-            <a:off x="2057400" y="3438144"/>
-            <a:ext cx="3794760" cy="530352"/>
-          </a:xfrm>
-          <a:prstGeom prst="rect">
-            <a:avLst/>
-          </a:prstGeom>
-          <a:noFill/>
-        </p:spPr>
-        <p:txBody>
-          <a:bodyPr wrap="square" anchor="t" lIns="36576" tIns="27432" rIns="36576" bIns="27432">
-            <a:spAutoFit/>
-          </a:bodyPr>
-          <a:lstStyle/>
-          <a:p>
-            <a:pPr algn="l">
-              <a:lnSpc>
-                <a:spcPct val="105000"/>
-              </a:lnSpc>
-            </a:pPr>
-            <a:r>
-              <a:rPr sz="1050" b="0">
-                <a:solidFill>
-                  <a:srgbClr val="6C756F"/>
-                </a:solidFill>
-                <a:latin typeface="Consolas"/>
-              </a:rPr>
-              <a:t>generate_series(date_trunc('month', ...), ...)</a:t>
-            </a:r>
-          </a:p>
-        </p:txBody>
-      </p:sp>
-      <p:sp>
-        <p:nvSpPr>
-          <p:cNvPr id="17" name="Rounded Rectangle 16"/>
+          <p:cNvPr id="17" name="Rectangle 16"/>
           <p:cNvSpPr/>
           <p:nvPr/>
         </p:nvSpPr>
         <p:spPr>
           <a:xfrm>
-            <a:off x="658368" y="4279392"/>
-            <a:ext cx="5349240" cy="786384"/>
-          </a:xfrm>
-          <a:prstGeom prst="roundRect">
-            <a:avLst>
-              <a:gd name="adj" fmla="val 6000"/>
-            </a:avLst>
+            <a:off x="4407407" y="1481328"/>
+            <a:ext cx="73152" cy="1097280"/>
+          </a:xfrm>
+          <a:prstGeom prst="rect">
+            <a:avLst/>
           </a:prstGeom>
           <a:solidFill>
-            <a:srgbClr val="FFFFFF"/>
+            <a:srgbClr val="224339"/>
           </a:solidFill>
-          <a:ln w="8890">
-            <a:solidFill>
-              <a:srgbClr val="D8D1C0"/>
-            </a:solidFill>
+          <a:ln>
+            <a:noFill/>
           </a:ln>
         </p:spPr>
         <p:style>
@@ -6905,8 +7012,8 @@
         </p:nvSpPr>
         <p:spPr>
           <a:xfrm>
-            <a:off x="822960" y="4370831"/>
-            <a:ext cx="1234440" cy="256032"/>
+            <a:off x="4626864" y="1645920"/>
+            <a:ext cx="1298448" cy="310896"/>
           </a:xfrm>
           <a:prstGeom prst="rect">
             <a:avLst/>
@@ -6925,13 +7032,13 @@
               </a:lnSpc>
             </a:pPr>
             <a:r>
-              <a:rPr sz="1150" b="1">
-                <a:solidFill>
-                  <a:srgbClr val="2F5D4E"/>
-                </a:solidFill>
-                <a:latin typeface="Microsoft YaHei"/>
-              </a:rPr>
-              <a:t>重复检测</a:t>
+              <a:rPr sz="1500" b="1">
+                <a:solidFill>
+                  <a:srgbClr val="224339"/>
+                </a:solidFill>
+                <a:latin typeface="Microsoft YaHei"/>
+              </a:rPr>
+              <a:t>闭包</a:t>
             </a:r>
           </a:p>
         </p:txBody>
@@ -6944,8 +7051,8 @@
         </p:nvSpPr>
         <p:spPr>
           <a:xfrm>
-            <a:off x="2057400" y="4370831"/>
-            <a:ext cx="3794760" cy="530352"/>
+            <a:off x="4626864" y="2029968"/>
+            <a:ext cx="1298448" cy="566928"/>
           </a:xfrm>
           <a:prstGeom prst="rect">
             <a:avLst/>
@@ -6960,17 +7067,33 @@
           <a:p>
             <a:pPr algn="l">
               <a:lnSpc>
-                <a:spcPct val="105000"/>
-              </a:lnSpc>
-            </a:pPr>
-            <a:r>
-              <a:rPr sz="1050" b="0">
+                <a:spcPct val="112000"/>
+              </a:lnSpc>
+            </a:pPr>
+            <a:r>
+              <a:rPr sz="1200" b="0">
                 <a:solidFill>
                   <a:srgbClr val="6C756F"/>
                 </a:solidFill>
-                <a:latin typeface="Consolas"/>
-              </a:rPr>
-              <a:t>GROUP BY md5(content) HAVING count(*) &gt; 1</a:t>
+                <a:latin typeface="Microsoft YaHei"/>
+              </a:rPr>
+              <a:t>视图实时</a:t>
+            </a:r>
+          </a:p>
+          <a:p>
+            <a:pPr algn="l">
+              <a:lnSpc>
+                <a:spcPct val="112000"/>
+              </a:lnSpc>
+            </a:pPr>
+            <a:r>
+              <a:rPr sz="1200" b="0">
+                <a:solidFill>
+                  <a:srgbClr val="6C756F"/>
+                </a:solidFill>
+                <a:latin typeface="Microsoft YaHei"/>
+              </a:rPr>
+              <a:t>最短深度</a:t>
             </a:r>
           </a:p>
         </p:txBody>
@@ -6983,8 +7106,8 @@
         </p:nvSpPr>
         <p:spPr>
           <a:xfrm>
-            <a:off x="658368" y="5349240"/>
-            <a:ext cx="5349240" cy="914400"/>
+            <a:off x="658368" y="2788920"/>
+            <a:ext cx="5577840" cy="1828800"/>
           </a:xfrm>
           <a:prstGeom prst="rect">
             <a:avLst/>
@@ -7002,7 +7125,7 @@
                 <a:spcPct val="118000"/>
               </a:lnSpc>
               <a:spcAft>
-                <a:spcPts val="400"/>
+                <a:spcPts val="600"/>
               </a:spcAft>
             </a:pPr>
             <a:r>
@@ -7012,7 +7135,7 @@
                 </a:solidFill>
                 <a:latin typeface="Microsoft YaHei"/>
               </a:rPr>
-              <a:t>• 全部计数实时计算，不落冗余统计表</a:t>
+              <a:t>• 先修边唯一 (from_tag_id, to_tag_id)，两端必须同一属主</a:t>
             </a:r>
           </a:p>
           <a:p>
@@ -7021,7 +7144,7 @@
                 <a:spcPct val="118000"/>
               </a:lnSpc>
               <a:spcAft>
-                <a:spcPts val="400"/>
+                <a:spcPts val="600"/>
               </a:spcAft>
             </a:pPr>
             <a:r>
@@ -7031,7 +7154,45 @@
                 </a:solidFill>
                 <a:latin typeface="Microsoft YaHei"/>
               </a:rPr>
-              <a:t>• CSV 统计导出 + 单会话 Markdown 导出</a:t>
+              <a:t>• 写入前从后继出发递归检查，能回到先修就拒绝</a:t>
+            </a:r>
+          </a:p>
+          <a:p>
+            <a:pPr>
+              <a:lnSpc>
+                <a:spcPct val="118000"/>
+              </a:lnSpc>
+              <a:spcAft>
+                <a:spcPts val="600"/>
+              </a:spcAft>
+            </a:pPr>
+            <a:r>
+              <a:rPr sz="1150">
+                <a:solidFill>
+                  <a:srgbClr val="2F5D4E"/>
+                </a:solidFill>
+                <a:latin typeface="Microsoft YaHei"/>
+              </a:rPr>
+              <a:t>• 闭包不落表，边变化后立即生效，无冗余一致性问题</a:t>
+            </a:r>
+          </a:p>
+          <a:p>
+            <a:pPr>
+              <a:lnSpc>
+                <a:spcPct val="118000"/>
+              </a:lnSpc>
+              <a:spcAft>
+                <a:spcPts val="600"/>
+              </a:spcAft>
+            </a:pPr>
+            <a:r>
+              <a:rPr sz="1150">
+                <a:solidFill>
+                  <a:srgbClr val="2F5D4E"/>
+                </a:solidFill>
+                <a:latin typeface="Microsoft YaHei"/>
+              </a:rPr>
+              <a:t>• 页面按主导课程拆成 6 张 SVG 子图，最长路径分层</a:t>
             </a:r>
           </a:p>
         </p:txBody>
@@ -7044,8 +7205,8 @@
         </p:nvSpPr>
         <p:spPr>
           <a:xfrm>
-            <a:off x="6217920" y="1371600"/>
-            <a:ext cx="5349240" cy="4892040"/>
+            <a:off x="658368" y="4800600"/>
+            <a:ext cx="5577840" cy="1508760"/>
           </a:xfrm>
           <a:prstGeom prst="roundRect">
             <a:avLst>
@@ -7053,12 +7214,10 @@
             </a:avLst>
           </a:prstGeom>
           <a:solidFill>
-            <a:srgbClr val="FFFFFF"/>
+            <a:srgbClr val="224339"/>
           </a:solidFill>
-          <a:ln w="10160">
-            <a:solidFill>
-              <a:srgbClr val="D8D1C0"/>
-            </a:solidFill>
+          <a:ln>
+            <a:noFill/>
           </a:ln>
         </p:spPr>
         <p:style>
@@ -7083,30 +7242,515 @@
           </a:p>
         </p:txBody>
       </p:sp>
-      <p:pic>
-        <p:nvPicPr>
-          <p:cNvPr id="22" name="Picture 21" descr="11-stats.png"/>
-          <p:cNvPicPr>
-            <a:picLocks noChangeAspect="1"/>
-          </p:cNvPicPr>
-          <p:nvPr/>
-        </p:nvPicPr>
-        <p:blipFill>
-          <a:blip r:embed="rId2"/>
-          <a:stretch>
-            <a:fillRect/>
-          </a:stretch>
-        </p:blipFill>
-        <p:spPr>
-          <a:xfrm>
-            <a:off x="6693791" y="1417320"/>
-            <a:ext cx="4397496" cy="4800600"/>
-          </a:xfrm>
-          <a:prstGeom prst="rect">
-            <a:avLst/>
-          </a:prstGeom>
-        </p:spPr>
-      </p:pic>
+      <p:sp>
+        <p:nvSpPr>
+          <p:cNvPr id="22" name="TextBox 21"/>
+          <p:cNvSpPr txBox="1"/>
+          <p:nvPr/>
+        </p:nvSpPr>
+        <p:spPr>
+          <a:xfrm>
+            <a:off x="804672" y="4910328"/>
+            <a:ext cx="5285231" cy="1289304"/>
+          </a:xfrm>
+          <a:prstGeom prst="rect">
+            <a:avLst/>
+          </a:prstGeom>
+          <a:noFill/>
+        </p:spPr>
+        <p:txBody>
+          <a:bodyPr wrap="square" anchor="t" lIns="36576" tIns="27432" rIns="36576" bIns="27432">
+            <a:spAutoFit/>
+          </a:bodyPr>
+          <a:lstStyle/>
+          <a:p>
+            <a:pPr algn="l">
+              <a:lnSpc>
+                <a:spcPct val="110000"/>
+              </a:lnSpc>
+            </a:pPr>
+            <a:r>
+              <a:rPr sz="800" b="0">
+                <a:solidFill>
+                  <a:srgbClr val="ECF2EA"/>
+                </a:solidFill>
+                <a:latin typeface="Consolas"/>
+              </a:rPr>
+              <a:t>WITH RECURSIVE walk AS (</a:t>
+            </a:r>
+          </a:p>
+          <a:p>
+            <a:pPr algn="l">
+              <a:lnSpc>
+                <a:spcPct val="110000"/>
+              </a:lnSpc>
+            </a:pPr>
+            <a:r>
+              <a:rPr sz="800" b="0">
+                <a:solidFill>
+                  <a:srgbClr val="ECF2EA"/>
+                </a:solidFill>
+                <a:latin typeface="Consolas"/>
+              </a:rPr>
+              <a:t>  SELECT id AS tag, id AS prereq, 0 AS depth, ARRAY[id] AS path</a:t>
+            </a:r>
+          </a:p>
+          <a:p>
+            <a:pPr algn="l">
+              <a:lnSpc>
+                <a:spcPct val="110000"/>
+              </a:lnSpc>
+            </a:pPr>
+            <a:r>
+              <a:rPr sz="800" b="0">
+                <a:solidFill>
+                  <a:srgbClr val="ECF2EA"/>
+                </a:solidFill>
+                <a:latin typeface="Consolas"/>
+              </a:rPr>
+              <a:t>    FROM app.tags WHERE owner_id = :uid</a:t>
+            </a:r>
+          </a:p>
+          <a:p>
+            <a:pPr algn="l">
+              <a:lnSpc>
+                <a:spcPct val="110000"/>
+              </a:lnSpc>
+            </a:pPr>
+            <a:r>
+              <a:rPr sz="800" b="0">
+                <a:solidFill>
+                  <a:srgbClr val="ECF2EA"/>
+                </a:solidFill>
+                <a:latin typeface="Consolas"/>
+              </a:rPr>
+              <a:t>  UNION ALL</a:t>
+            </a:r>
+          </a:p>
+          <a:p>
+            <a:pPr algn="l">
+              <a:lnSpc>
+                <a:spcPct val="110000"/>
+              </a:lnSpc>
+            </a:pPr>
+            <a:r>
+              <a:rPr sz="800" b="0">
+                <a:solidFill>
+                  <a:srgbClr val="ECF2EA"/>
+                </a:solidFill>
+                <a:latin typeface="Consolas"/>
+              </a:rPr>
+              <a:t>  SELECT w.tag, e.from_tag_id, w.depth + 1, w.path || e.from_tag_id</a:t>
+            </a:r>
+          </a:p>
+          <a:p>
+            <a:pPr algn="l">
+              <a:lnSpc>
+                <a:spcPct val="110000"/>
+              </a:lnSpc>
+            </a:pPr>
+            <a:r>
+              <a:rPr sz="800" b="0">
+                <a:solidFill>
+                  <a:srgbClr val="ECF2EA"/>
+                </a:solidFill>
+                <a:latin typeface="Consolas"/>
+              </a:rPr>
+              <a:t>    FROM walk w JOIN app.tag_edges e ON e.to_tag_id = w.prereq</a:t>
+            </a:r>
+          </a:p>
+          <a:p>
+            <a:pPr algn="l">
+              <a:lnSpc>
+                <a:spcPct val="110000"/>
+              </a:lnSpc>
+            </a:pPr>
+            <a:r>
+              <a:rPr sz="800" b="0">
+                <a:solidFill>
+                  <a:srgbClr val="ECF2EA"/>
+                </a:solidFill>
+                <a:latin typeface="Consolas"/>
+              </a:rPr>
+              <a:t>   WHERE NOT e.from_tag_id = ANY (w.path)</a:t>
+            </a:r>
+          </a:p>
+          <a:p>
+            <a:pPr algn="l">
+              <a:lnSpc>
+                <a:spcPct val="110000"/>
+              </a:lnSpc>
+            </a:pPr>
+            <a:r>
+              <a:rPr sz="800" b="0">
+                <a:solidFill>
+                  <a:srgbClr val="ECF2EA"/>
+                </a:solidFill>
+                <a:latin typeface="Consolas"/>
+              </a:rPr>
+              <a:t>) SELECT DISTINCT ON (tag, prereq) ...</a:t>
+            </a:r>
+          </a:p>
+        </p:txBody>
+      </p:sp>
+      <p:graphicFrame>
+        <p:nvGraphicFramePr>
+          <p:cNvPr id="23" name="Table 22"/>
+          <p:cNvGraphicFramePr>
+            <a:graphicFrameLocks noGrp="1"/>
+          </p:cNvGraphicFramePr>
+          <p:nvPr/>
+        </p:nvGraphicFramePr>
+        <p:xfrm>
+          <a:off x="6629400" y="1481328"/>
+          <a:ext cx="4800600" cy="1417320"/>
+        </p:xfrm>
+        <a:graphic>
+          <a:graphicData uri="http://schemas.openxmlformats.org/drawingml/2006/table">
+            <a:tbl>
+              <a:tblPr firstRow="1" bandRow="1">
+                <a:tableStyleId>{5C22544A-7EE6-4342-B048-85BDC9FD1C3A}</a:tableStyleId>
+              </a:tblPr>
+              <a:tblGrid>
+                <a:gridCol w="1691640"/>
+                <a:gridCol w="2194560"/>
+                <a:gridCol w="914400"/>
+              </a:tblGrid>
+              <a:tr h="472440">
+                <a:tc>
+                  <a:txBody>
+                    <a:bodyPr wrap="square"/>
+                    <a:lstStyle/>
+                    <a:p>
+                      <a:pPr algn="l"/>
+                      <a:r>
+                        <a:rPr sz="1100" b="1">
+                          <a:solidFill>
+                            <a:srgbClr val="FFFFFF"/>
+                          </a:solidFill>
+                          <a:latin typeface="Microsoft YaHei"/>
+                        </a:rPr>
+                        <a:t>标签</a:t>
+                      </a:r>
+                    </a:p>
+                  </a:txBody>
+                  <a:tcPr marL="73152" marR="54864" marT="27432" marB="27432" anchor="ctr">
+                    <a:solidFill>
+                      <a:srgbClr val="2F5D4E"/>
+                    </a:solidFill>
+                  </a:tcPr>
+                </a:tc>
+                <a:tc>
+                  <a:txBody>
+                    <a:bodyPr wrap="square"/>
+                    <a:lstStyle/>
+                    <a:p>
+                      <a:pPr algn="l"/>
+                      <a:r>
+                        <a:rPr sz="1100" b="1">
+                          <a:solidFill>
+                            <a:srgbClr val="FFFFFF"/>
+                          </a:solidFill>
+                          <a:latin typeface="Microsoft YaHei"/>
+                        </a:rPr>
+                        <a:t>先修（间接）</a:t>
+                      </a:r>
+                    </a:p>
+                  </a:txBody>
+                  <a:tcPr marL="73152" marR="54864" marT="27432" marB="27432" anchor="ctr">
+                    <a:solidFill>
+                      <a:srgbClr val="2F5D4E"/>
+                    </a:solidFill>
+                  </a:tcPr>
+                </a:tc>
+                <a:tc>
+                  <a:txBody>
+                    <a:bodyPr wrap="square"/>
+                    <a:lstStyle/>
+                    <a:p>
+                      <a:pPr algn="l"/>
+                      <a:r>
+                        <a:rPr sz="1100" b="1">
+                          <a:solidFill>
+                            <a:srgbClr val="FFFFFF"/>
+                          </a:solidFill>
+                          <a:latin typeface="Microsoft YaHei"/>
+                        </a:rPr>
+                        <a:t>深度</a:t>
+                      </a:r>
+                    </a:p>
+                  </a:txBody>
+                  <a:tcPr marL="73152" marR="54864" marT="27432" marB="27432" anchor="ctr">
+                    <a:solidFill>
+                      <a:srgbClr val="2F5D4E"/>
+                    </a:solidFill>
+                  </a:tcPr>
+                </a:tc>
+              </a:tr>
+              <a:tr h="472440">
+                <a:tc>
+                  <a:txBody>
+                    <a:bodyPr wrap="square"/>
+                    <a:lstStyle/>
+                    <a:p>
+                      <a:pPr algn="l"/>
+                      <a:r>
+                        <a:rPr sz="1100" b="0">
+                          <a:solidFill>
+                            <a:srgbClr val="1F2A24"/>
+                          </a:solidFill>
+                          <a:latin typeface="Microsoft YaHei"/>
+                        </a:rPr>
+                        <a:t>B+树</a:t>
+                      </a:r>
+                    </a:p>
+                  </a:txBody>
+                  <a:tcPr marL="73152" marR="54864" marT="27432" marB="27432" anchor="ctr">
+                    <a:solidFill>
+                      <a:srgbClr val="FFFFFF"/>
+                    </a:solidFill>
+                  </a:tcPr>
+                </a:tc>
+                <a:tc>
+                  <a:txBody>
+                    <a:bodyPr wrap="square"/>
+                    <a:lstStyle/>
+                    <a:p>
+                      <a:pPr algn="l"/>
+                      <a:r>
+                        <a:rPr sz="1100" b="0">
+                          <a:solidFill>
+                            <a:srgbClr val="1F2A24"/>
+                          </a:solidFill>
+                          <a:latin typeface="Microsoft YaHei"/>
+                        </a:rPr>
+                        <a:t>SQL</a:t>
+                      </a:r>
+                    </a:p>
+                  </a:txBody>
+                  <a:tcPr marL="73152" marR="54864" marT="27432" marB="27432" anchor="ctr">
+                    <a:solidFill>
+                      <a:srgbClr val="FFFFFF"/>
+                    </a:solidFill>
+                  </a:tcPr>
+                </a:tc>
+                <a:tc>
+                  <a:txBody>
+                    <a:bodyPr wrap="square"/>
+                    <a:lstStyle/>
+                    <a:p>
+                      <a:pPr algn="l"/>
+                      <a:r>
+                        <a:rPr sz="1100" b="0">
+                          <a:solidFill>
+                            <a:srgbClr val="1F2A24"/>
+                          </a:solidFill>
+                          <a:latin typeface="Microsoft YaHei"/>
+                        </a:rPr>
+                        <a:t>2</a:t>
+                      </a:r>
+                    </a:p>
+                  </a:txBody>
+                  <a:tcPr marL="73152" marR="54864" marT="27432" marB="27432" anchor="ctr">
+                    <a:solidFill>
+                      <a:srgbClr val="FFFFFF"/>
+                    </a:solidFill>
+                  </a:tcPr>
+                </a:tc>
+              </a:tr>
+              <a:tr h="472440">
+                <a:tc>
+                  <a:txBody>
+                    <a:bodyPr wrap="square"/>
+                    <a:lstStyle/>
+                    <a:p>
+                      <a:pPr algn="l"/>
+                      <a:r>
+                        <a:rPr sz="1100" b="0">
+                          <a:solidFill>
+                            <a:srgbClr val="1F2A24"/>
+                          </a:solidFill>
+                          <a:latin typeface="Microsoft YaHei"/>
+                        </a:rPr>
+                        <a:t>Dijkstra</a:t>
+                      </a:r>
+                    </a:p>
+                  </a:txBody>
+                  <a:tcPr marL="73152" marR="54864" marT="27432" marB="27432" anchor="ctr">
+                    <a:solidFill>
+                      <a:srgbClr val="ECE7DA"/>
+                    </a:solidFill>
+                  </a:tcPr>
+                </a:tc>
+                <a:tc>
+                  <a:txBody>
+                    <a:bodyPr wrap="square"/>
+                    <a:lstStyle/>
+                    <a:p>
+                      <a:pPr algn="l"/>
+                      <a:r>
+                        <a:rPr sz="1100" b="0">
+                          <a:solidFill>
+                            <a:srgbClr val="1F2A24"/>
+                          </a:solidFill>
+                          <a:latin typeface="Microsoft YaHei"/>
+                        </a:rPr>
+                        <a:t>图</a:t>
+                      </a:r>
+                    </a:p>
+                  </a:txBody>
+                  <a:tcPr marL="73152" marR="54864" marT="27432" marB="27432" anchor="ctr">
+                    <a:solidFill>
+                      <a:srgbClr val="ECE7DA"/>
+                    </a:solidFill>
+                  </a:tcPr>
+                </a:tc>
+                <a:tc>
+                  <a:txBody>
+                    <a:bodyPr wrap="square"/>
+                    <a:lstStyle/>
+                    <a:p>
+                      <a:pPr algn="l"/>
+                      <a:r>
+                        <a:rPr sz="1100" b="0">
+                          <a:solidFill>
+                            <a:srgbClr val="1F2A24"/>
+                          </a:solidFill>
+                          <a:latin typeface="Microsoft YaHei"/>
+                        </a:rPr>
+                        <a:t>2</a:t>
+                      </a:r>
+                    </a:p>
+                  </a:txBody>
+                  <a:tcPr marL="73152" marR="54864" marT="27432" marB="27432" anchor="ctr">
+                    <a:solidFill>
+                      <a:srgbClr val="ECE7DA"/>
+                    </a:solidFill>
+                  </a:tcPr>
+                </a:tc>
+              </a:tr>
+            </a:tbl>
+          </a:graphicData>
+        </a:graphic>
+      </p:graphicFrame>
+      <p:sp>
+        <p:nvSpPr>
+          <p:cNvPr id="24" name="TextBox 23"/>
+          <p:cNvSpPr txBox="1"/>
+          <p:nvPr/>
+        </p:nvSpPr>
+        <p:spPr>
+          <a:xfrm>
+            <a:off x="6629400" y="3154680"/>
+            <a:ext cx="4800600" cy="3063240"/>
+          </a:xfrm>
+          <a:prstGeom prst="rect">
+            <a:avLst/>
+          </a:prstGeom>
+          <a:noFill/>
+        </p:spPr>
+        <p:txBody>
+          <a:bodyPr wrap="square" lIns="0" rIns="0" tIns="0" bIns="0">
+            <a:spAutoFit/>
+          </a:bodyPr>
+          <a:lstStyle/>
+          <a:p>
+            <a:pPr>
+              <a:lnSpc>
+                <a:spcPct val="118000"/>
+              </a:lnSpc>
+              <a:spcAft>
+                <a:spcPts val="600"/>
+              </a:spcAft>
+            </a:pPr>
+            <a:r>
+              <a:rPr sz="1150">
+                <a:solidFill>
+                  <a:srgbClr val="2F5D4E"/>
+                </a:solidFill>
+                <a:latin typeface="Microsoft YaHei"/>
+              </a:rPr>
+              <a:t>• 直接先修深度为 1，如 索引 → SQL、最短路径 → 图</a:t>
+            </a:r>
+          </a:p>
+          <a:p>
+            <a:pPr>
+              <a:lnSpc>
+                <a:spcPct val="118000"/>
+              </a:lnSpc>
+              <a:spcAft>
+                <a:spcPts val="600"/>
+              </a:spcAft>
+            </a:pPr>
+            <a:r>
+              <a:rPr sz="1150">
+                <a:solidFill>
+                  <a:srgbClr val="2F5D4E"/>
+                </a:solidFill>
+                <a:latin typeface="Microsoft YaHei"/>
+              </a:rPr>
+              <a:t>• DISTINCT ON 只保留每对标签的最短路径</a:t>
+            </a:r>
+          </a:p>
+          <a:p>
+            <a:pPr>
+              <a:lnSpc>
+                <a:spcPct val="118000"/>
+              </a:lnSpc>
+              <a:spcAft>
+                <a:spcPts val="600"/>
+              </a:spcAft>
+            </a:pPr>
+            <a:r>
+              <a:rPr sz="1150">
+                <a:solidFill>
+                  <a:srgbClr val="2F5D4E"/>
+                </a:solidFill>
+                <a:latin typeface="Microsoft YaHei"/>
+              </a:rPr>
+              <a:t>• path 数组同时防止环路重复展开与无限递归</a:t>
+            </a:r>
+          </a:p>
+          <a:p>
+            <a:pPr>
+              <a:lnSpc>
+                <a:spcPct val="118000"/>
+              </a:lnSpc>
+              <a:spcAft>
+                <a:spcPts val="600"/>
+              </a:spcAft>
+            </a:pPr>
+            <a:r>
+              <a:rPr sz="1150">
+                <a:solidFill>
+                  <a:srgbClr val="2F5D4E"/>
+                </a:solidFill>
+                <a:latin typeface="Microsoft YaHei"/>
+              </a:rPr>
+              <a:t>• t2s.v_my_tag_prerequisites 对 Text2SQL 暴露同一闭包</a:t>
+            </a:r>
+          </a:p>
+          <a:p>
+            <a:pPr>
+              <a:lnSpc>
+                <a:spcPct val="118000"/>
+              </a:lnSpc>
+              <a:spcAft>
+                <a:spcPts val="600"/>
+              </a:spcAft>
+            </a:pPr>
+            <a:r>
+              <a:rPr sz="1150">
+                <a:solidFill>
+                  <a:srgbClr val="2F5D4E"/>
+                </a:solidFill>
+                <a:latin typeface="Microsoft YaHei"/>
+              </a:rPr>
+              <a:t>• 种子数据：59 标签、32 条先修边、6 张课程卡</a:t>
+            </a:r>
+          </a:p>
+        </p:txBody>
+      </p:sp>
     </p:spTree>
   </p:cSld>
   <p:clrMapOvr>
@@ -7202,7 +7846,7 @@
                 </a:solidFill>
                 <a:latin typeface="Microsoft YaHei"/>
               </a:rPr>
-              <a:t>11 / Text2SQL</a:t>
+              <a:t>11 / 统计与导出</a:t>
             </a:r>
           </a:p>
         </p:txBody>
@@ -7241,7 +7885,7 @@
                 </a:solidFill>
                 <a:latin typeface="Microsoft YaHei"/>
               </a:rPr>
-              <a:t>自然语言查询，但权限在数据库层兜底</a:t>
+              <a:t>把课程里的聚合查询真正用起来</a:t>
             </a:r>
           </a:p>
         </p:txBody>
@@ -7376,7 +8020,7 @@
         <p:spPr>
           <a:xfrm>
             <a:off x="658368" y="1481328"/>
-            <a:ext cx="1874519" cy="585216"/>
+            <a:ext cx="5349240" cy="786384"/>
           </a:xfrm>
           <a:prstGeom prst="roundRect">
             <a:avLst>
@@ -7384,10 +8028,12 @@
             </a:avLst>
           </a:prstGeom>
           <a:solidFill>
-            <a:srgbClr val="2F5D4E"/>
+            <a:srgbClr val="FFFFFF"/>
           </a:solidFill>
-          <a:ln>
-            <a:noFill/>
+          <a:ln w="8890">
+            <a:solidFill>
+              <a:srgbClr val="D8D1C0"/>
+            </a:solidFill>
           </a:ln>
         </p:spPr>
         <p:style>
@@ -7420,8 +8066,8 @@
         </p:nvSpPr>
         <p:spPr>
           <a:xfrm>
-            <a:off x="658368" y="1554480"/>
-            <a:ext cx="1874519" cy="365760"/>
+            <a:off x="822960" y="1572768"/>
+            <a:ext cx="1234440" cy="256032"/>
           </a:xfrm>
           <a:prstGeom prst="rect">
             <a:avLst/>
@@ -7434,7 +8080,7 @@
           </a:bodyPr>
           <a:lstStyle/>
           <a:p>
-            <a:pPr algn="ctr">
+            <a:pPr algn="l">
               <a:lnSpc>
                 <a:spcPct val="115000"/>
               </a:lnSpc>
@@ -7442,11 +8088,11 @@
             <a:r>
               <a:rPr sz="1150" b="1">
                 <a:solidFill>
-                  <a:srgbClr val="FFFFFF"/>
-                </a:solidFill>
-                <a:latin typeface="Microsoft YaHei"/>
-              </a:rPr>
-              <a:t>自然语言</a:t>
+                  <a:srgbClr val="2F5D4E"/>
+                </a:solidFill>
+                <a:latin typeface="Microsoft YaHei"/>
+              </a:rPr>
+              <a:t>课程排名</a:t>
             </a:r>
           </a:p>
         </p:txBody>
@@ -7459,8 +8105,8 @@
         </p:nvSpPr>
         <p:spPr>
           <a:xfrm>
-            <a:off x="2542032" y="1572768"/>
-            <a:ext cx="274320" cy="320040"/>
+            <a:off x="2057400" y="1572768"/>
+            <a:ext cx="3794760" cy="530352"/>
           </a:xfrm>
           <a:prstGeom prst="rect">
             <a:avLst/>
@@ -7475,17 +8121,17 @@
           <a:p>
             <a:pPr algn="l">
               <a:lnSpc>
-                <a:spcPct val="115000"/>
-              </a:lnSpc>
-            </a:pPr>
-            <a:r>
-              <a:rPr sz="1300" b="1">
-                <a:solidFill>
-                  <a:srgbClr val="B4693F"/>
-                </a:solidFill>
-                <a:latin typeface="Microsoft YaHei"/>
-              </a:rPr>
-              <a:t>→</a:t>
+                <a:spcPct val="105000"/>
+              </a:lnSpc>
+            </a:pPr>
+            <a:r>
+              <a:rPr sz="1050" b="0">
+                <a:solidFill>
+                  <a:srgbClr val="6C756F"/>
+                </a:solidFill>
+                <a:latin typeface="Consolas"/>
+              </a:rPr>
+              <a:t>RANK() OVER (ORDER BY message_count DESC)</a:t>
             </a:r>
           </a:p>
         </p:txBody>
@@ -7498,8 +8144,8 @@
         </p:nvSpPr>
         <p:spPr>
           <a:xfrm>
-            <a:off x="2871215" y="1481328"/>
-            <a:ext cx="1874519" cy="585216"/>
+            <a:off x="658368" y="2414016"/>
+            <a:ext cx="5349240" cy="786384"/>
           </a:xfrm>
           <a:prstGeom prst="roundRect">
             <a:avLst>
@@ -7507,10 +8153,12 @@
             </a:avLst>
           </a:prstGeom>
           <a:solidFill>
-            <a:srgbClr val="224339"/>
+            <a:srgbClr val="FFFFFF"/>
           </a:solidFill>
-          <a:ln>
-            <a:noFill/>
+          <a:ln w="8890">
+            <a:solidFill>
+              <a:srgbClr val="D8D1C0"/>
+            </a:solidFill>
           </a:ln>
         </p:spPr>
         <p:style>
@@ -7543,8 +8191,8 @@
         </p:nvSpPr>
         <p:spPr>
           <a:xfrm>
-            <a:off x="2871215" y="1554480"/>
-            <a:ext cx="1874519" cy="365760"/>
+            <a:off x="822960" y="2505456"/>
+            <a:ext cx="1234440" cy="256032"/>
           </a:xfrm>
           <a:prstGeom prst="rect">
             <a:avLst/>
@@ -7557,7 +8205,7 @@
           </a:bodyPr>
           <a:lstStyle/>
           <a:p>
-            <a:pPr algn="ctr">
+            <a:pPr algn="l">
               <a:lnSpc>
                 <a:spcPct val="115000"/>
               </a:lnSpc>
@@ -7565,11 +8213,11 @@
             <a:r>
               <a:rPr sz="1150" b="1">
                 <a:solidFill>
-                  <a:srgbClr val="FFFFFF"/>
-                </a:solidFill>
-                <a:latin typeface="Microsoft YaHei"/>
-              </a:rPr>
-              <a:t>LLM / 本地规则</a:t>
+                  <a:srgbClr val="2F5D4E"/>
+                </a:solidFill>
+                <a:latin typeface="Microsoft YaHei"/>
+              </a:rPr>
+              <a:t>解决率</a:t>
             </a:r>
           </a:p>
         </p:txBody>
@@ -7582,8 +8230,8 @@
         </p:nvSpPr>
         <p:spPr>
           <a:xfrm>
-            <a:off x="4754879" y="1572768"/>
-            <a:ext cx="274320" cy="320040"/>
+            <a:off x="2057400" y="2505456"/>
+            <a:ext cx="3794760" cy="530352"/>
           </a:xfrm>
           <a:prstGeom prst="rect">
             <a:avLst/>
@@ -7598,17 +8246,17 @@
           <a:p>
             <a:pPr algn="l">
               <a:lnSpc>
-                <a:spcPct val="115000"/>
-              </a:lnSpc>
-            </a:pPr>
-            <a:r>
-              <a:rPr sz="1300" b="1">
-                <a:solidFill>
-                  <a:srgbClr val="B4693F"/>
-                </a:solidFill>
-                <a:latin typeface="Microsoft YaHei"/>
-              </a:rPr>
-              <a:t>→</a:t>
+                <a:spcPct val="105000"/>
+              </a:lnSpc>
+            </a:pPr>
+            <a:r>
+              <a:rPr sz="1050" b="0">
+                <a:solidFill>
+                  <a:srgbClr val="6C756F"/>
+                </a:solidFill>
+                <a:latin typeface="Consolas"/>
+              </a:rPr>
+              <a:t>COUNT(*) FILTER (WHERE status = 'resolved')</a:t>
             </a:r>
           </a:p>
         </p:txBody>
@@ -7621,8 +8269,8 @@
         </p:nvSpPr>
         <p:spPr>
           <a:xfrm>
-            <a:off x="5084064" y="1481328"/>
-            <a:ext cx="1874519" cy="585216"/>
+            <a:off x="658368" y="3346704"/>
+            <a:ext cx="5349240" cy="786384"/>
           </a:xfrm>
           <a:prstGeom prst="roundRect">
             <a:avLst>
@@ -7630,10 +8278,12 @@
             </a:avLst>
           </a:prstGeom>
           <a:solidFill>
-            <a:srgbClr val="224339"/>
+            <a:srgbClr val="FFFFFF"/>
           </a:solidFill>
-          <a:ln>
-            <a:noFill/>
+          <a:ln w="8890">
+            <a:solidFill>
+              <a:srgbClr val="D8D1C0"/>
+            </a:solidFill>
           </a:ln>
         </p:spPr>
         <p:style>
@@ -7666,8 +8316,8 @@
         </p:nvSpPr>
         <p:spPr>
           <a:xfrm>
-            <a:off x="5084064" y="1554480"/>
-            <a:ext cx="1874519" cy="365760"/>
+            <a:off x="822960" y="3438144"/>
+            <a:ext cx="1234440" cy="256032"/>
           </a:xfrm>
           <a:prstGeom prst="rect">
             <a:avLst/>
@@ -7680,7 +8330,7 @@
           </a:bodyPr>
           <a:lstStyle/>
           <a:p>
-            <a:pPr algn="ctr">
+            <a:pPr algn="l">
               <a:lnSpc>
                 <a:spcPct val="115000"/>
               </a:lnSpc>
@@ -7688,11 +8338,11 @@
             <a:r>
               <a:rPr sz="1150" b="1">
                 <a:solidFill>
-                  <a:srgbClr val="FFFFFF"/>
-                </a:solidFill>
-                <a:latin typeface="Microsoft YaHei"/>
-              </a:rPr>
-              <a:t>AST 守卫/预检</a:t>
+                  <a:srgbClr val="2F5D4E"/>
+                </a:solidFill>
+                <a:latin typeface="Microsoft YaHei"/>
+              </a:rPr>
+              <a:t>月度补零</a:t>
             </a:r>
           </a:p>
         </p:txBody>
@@ -7705,8 +8355,8 @@
         </p:nvSpPr>
         <p:spPr>
           <a:xfrm>
-            <a:off x="6967727" y="1572768"/>
-            <a:ext cx="274320" cy="320040"/>
+            <a:off x="2057400" y="3438144"/>
+            <a:ext cx="3794760" cy="530352"/>
           </a:xfrm>
           <a:prstGeom prst="rect">
             <a:avLst/>
@@ -7721,17 +8371,17 @@
           <a:p>
             <a:pPr algn="l">
               <a:lnSpc>
-                <a:spcPct val="115000"/>
-              </a:lnSpc>
-            </a:pPr>
-            <a:r>
-              <a:rPr sz="1300" b="1">
-                <a:solidFill>
-                  <a:srgbClr val="B4693F"/>
-                </a:solidFill>
-                <a:latin typeface="Microsoft YaHei"/>
-              </a:rPr>
-              <a:t>→</a:t>
+                <a:spcPct val="105000"/>
+              </a:lnSpc>
+            </a:pPr>
+            <a:r>
+              <a:rPr sz="1050" b="0">
+                <a:solidFill>
+                  <a:srgbClr val="6C756F"/>
+                </a:solidFill>
+                <a:latin typeface="Consolas"/>
+              </a:rPr>
+              <a:t>generate_series(date_trunc('month', ...), ...)</a:t>
             </a:r>
           </a:p>
         </p:txBody>
@@ -7744,8 +8394,8 @@
         </p:nvSpPr>
         <p:spPr>
           <a:xfrm>
-            <a:off x="7296912" y="1481328"/>
-            <a:ext cx="1874519" cy="585216"/>
+            <a:off x="658368" y="4279392"/>
+            <a:ext cx="5349240" cy="786384"/>
           </a:xfrm>
           <a:prstGeom prst="roundRect">
             <a:avLst>
@@ -7753,10 +8403,12 @@
             </a:avLst>
           </a:prstGeom>
           <a:solidFill>
-            <a:srgbClr val="224339"/>
+            <a:srgbClr val="FFFFFF"/>
           </a:solidFill>
-          <a:ln>
-            <a:noFill/>
+          <a:ln w="8890">
+            <a:solidFill>
+              <a:srgbClr val="D8D1C0"/>
+            </a:solidFill>
           </a:ln>
         </p:spPr>
         <p:style>
@@ -7789,8 +8441,8 @@
         </p:nvSpPr>
         <p:spPr>
           <a:xfrm>
-            <a:off x="7296912" y="1554480"/>
-            <a:ext cx="1874519" cy="365760"/>
+            <a:off x="822960" y="4370831"/>
+            <a:ext cx="1234440" cy="256032"/>
           </a:xfrm>
           <a:prstGeom prst="rect">
             <a:avLst/>
@@ -7803,7 +8455,7 @@
           </a:bodyPr>
           <a:lstStyle/>
           <a:p>
-            <a:pPr algn="ctr">
+            <a:pPr algn="l">
               <a:lnSpc>
                 <a:spcPct val="115000"/>
               </a:lnSpc>
@@ -7811,11 +8463,11 @@
             <a:r>
               <a:rPr sz="1150" b="1">
                 <a:solidFill>
-                  <a:srgbClr val="FFFFFF"/>
-                </a:solidFill>
-                <a:latin typeface="Microsoft YaHei"/>
-              </a:rPr>
-              <a:t>只读视图</a:t>
+                  <a:srgbClr val="2F5D4E"/>
+                </a:solidFill>
+                <a:latin typeface="Microsoft YaHei"/>
+              </a:rPr>
+              <a:t>重复检测</a:t>
             </a:r>
           </a:p>
         </p:txBody>
@@ -7828,8 +8480,8 @@
         </p:nvSpPr>
         <p:spPr>
           <a:xfrm>
-            <a:off x="9180576" y="1572768"/>
-            <a:ext cx="274320" cy="320040"/>
+            <a:off x="2057400" y="4370831"/>
+            <a:ext cx="3794760" cy="530352"/>
           </a:xfrm>
           <a:prstGeom prst="rect">
             <a:avLst/>
@@ -7844,115 +8496,31 @@
           <a:p>
             <a:pPr algn="l">
               <a:lnSpc>
-                <a:spcPct val="115000"/>
-              </a:lnSpc>
-            </a:pPr>
-            <a:r>
-              <a:rPr sz="1300" b="1">
-                <a:solidFill>
-                  <a:srgbClr val="B4693F"/>
-                </a:solidFill>
-                <a:latin typeface="Microsoft YaHei"/>
-              </a:rPr>
-              <a:t>→</a:t>
-            </a:r>
-          </a:p>
-        </p:txBody>
-      </p:sp>
-      <p:sp>
-        <p:nvSpPr>
-          <p:cNvPr id="20" name="Rounded Rectangle 19"/>
-          <p:cNvSpPr/>
-          <p:nvPr/>
-        </p:nvSpPr>
-        <p:spPr>
-          <a:xfrm>
-            <a:off x="9509760" y="1481328"/>
-            <a:ext cx="1874519" cy="585216"/>
-          </a:xfrm>
-          <a:prstGeom prst="roundRect">
-            <a:avLst>
-              <a:gd name="adj" fmla="val 6000"/>
-            </a:avLst>
-          </a:prstGeom>
-          <a:solidFill>
-            <a:srgbClr val="2F5D4E"/>
-          </a:solidFill>
-          <a:ln>
-            <a:noFill/>
-          </a:ln>
-        </p:spPr>
-        <p:style>
-          <a:lnRef idx="1">
-            <a:schemeClr val="accent1"/>
-          </a:lnRef>
-          <a:fillRef idx="3">
-            <a:schemeClr val="accent1"/>
-          </a:fillRef>
-          <a:effectRef idx="2">
-            <a:schemeClr val="accent1"/>
-          </a:effectRef>
-          <a:fontRef idx="minor">
-            <a:schemeClr val="lt1"/>
-          </a:fontRef>
-        </p:style>
-        <p:txBody>
-          <a:bodyPr rtlCol="0" anchor="ctr"/>
-          <a:lstStyle/>
-          <a:p>
-            <a:pPr algn="ctr"/>
-          </a:p>
-        </p:txBody>
-      </p:sp>
-      <p:sp>
-        <p:nvSpPr>
-          <p:cNvPr id="21" name="TextBox 20"/>
+                <a:spcPct val="105000"/>
+              </a:lnSpc>
+            </a:pPr>
+            <a:r>
+              <a:rPr sz="1050" b="0">
+                <a:solidFill>
+                  <a:srgbClr val="6C756F"/>
+                </a:solidFill>
+                <a:latin typeface="Consolas"/>
+              </a:rPr>
+              <a:t>GROUP BY md5(content) HAVING count(*) &gt; 1</a:t>
+            </a:r>
+          </a:p>
+        </p:txBody>
+      </p:sp>
+      <p:sp>
+        <p:nvSpPr>
+          <p:cNvPr id="20" name="TextBox 19"/>
           <p:cNvSpPr txBox="1"/>
           <p:nvPr/>
         </p:nvSpPr>
         <p:spPr>
           <a:xfrm>
-            <a:off x="9509760" y="1554480"/>
-            <a:ext cx="1874519" cy="365760"/>
-          </a:xfrm>
-          <a:prstGeom prst="rect">
-            <a:avLst/>
-          </a:prstGeom>
-          <a:noFill/>
-        </p:spPr>
-        <p:txBody>
-          <a:bodyPr wrap="square" anchor="t" lIns="36576" tIns="27432" rIns="36576" bIns="27432">
-            <a:spAutoFit/>
-          </a:bodyPr>
-          <a:lstStyle/>
-          <a:p>
-            <a:pPr algn="ctr">
-              <a:lnSpc>
-                <a:spcPct val="115000"/>
-              </a:lnSpc>
-            </a:pPr>
-            <a:r>
-              <a:rPr sz="1150" b="1">
-                <a:solidFill>
-                  <a:srgbClr val="FFFFFF"/>
-                </a:solidFill>
-                <a:latin typeface="Microsoft YaHei"/>
-              </a:rPr>
-              <a:t>结果 + 审计</a:t>
-            </a:r>
-          </a:p>
-        </p:txBody>
-      </p:sp>
-      <p:sp>
-        <p:nvSpPr>
-          <p:cNvPr id="22" name="TextBox 21"/>
-          <p:cNvSpPr txBox="1"/>
-          <p:nvPr/>
-        </p:nvSpPr>
-        <p:spPr>
-          <a:xfrm>
-            <a:off x="658368" y="2423160"/>
-            <a:ext cx="5623560" cy="3108960"/>
+            <a:off x="658368" y="5349240"/>
+            <a:ext cx="5349240" cy="914400"/>
           </a:xfrm>
           <a:prstGeom prst="rect">
             <a:avLst/>
@@ -7970,17 +8538,17 @@
                 <a:spcPct val="118000"/>
               </a:lnSpc>
               <a:spcAft>
-                <a:spcPts val="800"/>
+                <a:spcPts val="400"/>
               </a:spcAft>
             </a:pPr>
             <a:r>
-              <a:rPr sz="1250">
+              <a:rPr sz="1150">
                 <a:solidFill>
                   <a:srgbClr val="2F5D4E"/>
                 </a:solidFill>
                 <a:latin typeface="Microsoft YaHei"/>
               </a:rPr>
-              <a:t>• sqlglot 只允许一条 SELECT/WITH，拒绝嵌套 DML 与表函数</a:t>
+              <a:t>• 全部计数实时计算，不落冗余统计表</a:t>
             </a:r>
           </a:p>
           <a:p>
@@ -7989,226 +8557,31 @@
                 <a:spcPct val="118000"/>
               </a:lnSpc>
               <a:spcAft>
-                <a:spcPts val="800"/>
+                <a:spcPts val="400"/>
               </a:spcAft>
             </a:pPr>
             <a:r>
-              <a:rPr sz="1250">
+              <a:rPr sz="1150">
                 <a:solidFill>
                   <a:srgbClr val="2F5D4E"/>
                 </a:solidFill>
                 <a:latin typeface="Microsoft YaHei"/>
               </a:rPr>
-              <a:t>• 对象白名单：13 个 t2s 视图，禁止 app / pg_catalog</a:t>
-            </a:r>
-          </a:p>
-          <a:p>
-            <a:pPr>
-              <a:lnSpc>
-                <a:spcPct val="118000"/>
-              </a:lnSpc>
-              <a:spcAft>
-                <a:spcPts val="800"/>
-              </a:spcAft>
-            </a:pPr>
-            <a:r>
-              <a:rPr sz="1250">
-                <a:solidFill>
-                  <a:srgbClr val="2F5D4E"/>
-                </a:solidFill>
-                <a:latin typeface="Microsoft YaHei"/>
-              </a:rPr>
-              <a:t>• EXPLAIN 预检代价与估算行数，超限直接拒绝</a:t>
-            </a:r>
-          </a:p>
-          <a:p>
-            <a:pPr>
-              <a:lnSpc>
-                <a:spcPct val="118000"/>
-              </a:lnSpc>
-              <a:spcAft>
-                <a:spcPts val="800"/>
-              </a:spcAft>
-            </a:pPr>
-            <a:r>
-              <a:rPr sz="1250">
-                <a:solidFill>
-                  <a:srgbClr val="2F5D4E"/>
-                </a:solidFill>
-                <a:latin typeface="Microsoft YaHei"/>
-              </a:rPr>
-              <a:t>• 包裹 200 行上限；t2s_reader 只读事务、3 秒超时</a:t>
-            </a:r>
-          </a:p>
-          <a:p>
-            <a:pPr>
-              <a:lnSpc>
-                <a:spcPct val="118000"/>
-              </a:lnSpc>
-              <a:spcAft>
-                <a:spcPts val="800"/>
-              </a:spcAft>
-            </a:pPr>
-            <a:r>
-              <a:rPr sz="1250">
-                <a:solidFill>
-                  <a:srgbClr val="2F5D4E"/>
-                </a:solidFill>
-                <a:latin typeface="Microsoft YaHei"/>
-              </a:rPr>
-              <a:t>• 视图 security_barrier，按 app.user_id 过滤</a:t>
-            </a:r>
-          </a:p>
-          <a:p>
-            <a:pPr>
-              <a:lnSpc>
-                <a:spcPct val="118000"/>
-              </a:lnSpc>
-              <a:spcAft>
-                <a:spcPts val="800"/>
-              </a:spcAft>
-            </a:pPr>
-            <a:r>
-              <a:rPr sz="1250">
-                <a:solidFill>
-                  <a:srgbClr val="2F5D4E"/>
-                </a:solidFill>
-                <a:latin typeface="Microsoft YaHei"/>
-              </a:rPr>
-              <a:t>• 成功、拒绝、异常全部写 text2sql_log</a:t>
-            </a:r>
-          </a:p>
-          <a:p>
-            <a:pPr>
-              <a:lnSpc>
-                <a:spcPct val="118000"/>
-              </a:lnSpc>
-              <a:spcAft>
-                <a:spcPts val="800"/>
-              </a:spcAft>
-            </a:pPr>
-            <a:r>
-              <a:rPr sz="1250">
-                <a:solidFill>
-                  <a:srgbClr val="2F5D4E"/>
-                </a:solidFill>
-                <a:latin typeface="Microsoft YaHei"/>
-              </a:rPr>
-              <a:t>• 无 Key 走 mock，配置 Key 走 OpenAI 兼容接口</a:t>
-            </a:r>
-          </a:p>
-        </p:txBody>
-      </p:sp>
-      <p:sp>
-        <p:nvSpPr>
-          <p:cNvPr id="23" name="Rounded Rectangle 22"/>
+              <a:t>• CSV 统计导出 + 单会话 Markdown 导出</a:t>
+            </a:r>
+          </a:p>
+        </p:txBody>
+      </p:sp>
+      <p:sp>
+        <p:nvSpPr>
+          <p:cNvPr id="21" name="Rounded Rectangle 20"/>
           <p:cNvSpPr/>
           <p:nvPr/>
         </p:nvSpPr>
         <p:spPr>
           <a:xfrm>
-            <a:off x="658368" y="5440680"/>
-            <a:ext cx="5623560" cy="749808"/>
-          </a:xfrm>
-          <a:prstGeom prst="roundRect">
-            <a:avLst>
-              <a:gd name="adj" fmla="val 6000"/>
-            </a:avLst>
-          </a:prstGeom>
-          <a:solidFill>
-            <a:srgbClr val="224339"/>
-          </a:solidFill>
-          <a:ln>
-            <a:noFill/>
-          </a:ln>
-        </p:spPr>
-        <p:style>
-          <a:lnRef idx="1">
-            <a:schemeClr val="accent1"/>
-          </a:lnRef>
-          <a:fillRef idx="3">
-            <a:schemeClr val="accent1"/>
-          </a:fillRef>
-          <a:effectRef idx="2">
-            <a:schemeClr val="accent1"/>
-          </a:effectRef>
-          <a:fontRef idx="minor">
-            <a:schemeClr val="lt1"/>
-          </a:fontRef>
-        </p:style>
-        <p:txBody>
-          <a:bodyPr rtlCol="0" anchor="ctr"/>
-          <a:lstStyle/>
-          <a:p>
-            <a:pPr algn="ctr"/>
-          </a:p>
-        </p:txBody>
-      </p:sp>
-      <p:sp>
-        <p:nvSpPr>
-          <p:cNvPr id="24" name="TextBox 23"/>
-          <p:cNvSpPr txBox="1"/>
-          <p:nvPr/>
-        </p:nvSpPr>
-        <p:spPr>
-          <a:xfrm>
-            <a:off x="804672" y="5550408"/>
-            <a:ext cx="5330952" cy="530352"/>
-          </a:xfrm>
-          <a:prstGeom prst="rect">
-            <a:avLst/>
-          </a:prstGeom>
-          <a:noFill/>
-        </p:spPr>
-        <p:txBody>
-          <a:bodyPr wrap="square" anchor="t" lIns="36576" tIns="27432" rIns="36576" bIns="27432">
-            <a:spAutoFit/>
-          </a:bodyPr>
-          <a:lstStyle/>
-          <a:p>
-            <a:pPr algn="l">
-              <a:lnSpc>
-                <a:spcPct val="110000"/>
-              </a:lnSpc>
-            </a:pPr>
-            <a:r>
-              <a:rPr sz="919" b="0">
-                <a:solidFill>
-                  <a:srgbClr val="ECF2EA"/>
-                </a:solidFill>
-                <a:latin typeface="Consolas"/>
-              </a:rPr>
-              <a:t>t2s_reader: CONNECT + USAGE(t2s) + SELECT 视图</a:t>
-            </a:r>
-          </a:p>
-          <a:p>
-            <a:pPr algn="l">
-              <a:lnSpc>
-                <a:spcPct val="110000"/>
-              </a:lnSpc>
-            </a:pPr>
-            <a:r>
-              <a:rPr sz="919" b="0">
-                <a:solidFill>
-                  <a:srgbClr val="ECF2EA"/>
-                </a:solidFill>
-                <a:latin typeface="Consolas"/>
-              </a:rPr>
-              <a:t>default_transaction_read_only = on</a:t>
-            </a:r>
-          </a:p>
-        </p:txBody>
-      </p:sp>
-      <p:sp>
-        <p:nvSpPr>
-          <p:cNvPr id="25" name="Rounded Rectangle 24"/>
-          <p:cNvSpPr/>
-          <p:nvPr/>
-        </p:nvSpPr>
-        <p:spPr>
-          <a:xfrm>
-            <a:off x="6492240" y="2286000"/>
-            <a:ext cx="5074920" cy="3931920"/>
+            <a:off x="6217920" y="1371600"/>
+            <a:ext cx="5349240" cy="4892040"/>
           </a:xfrm>
           <a:prstGeom prst="roundRect">
             <a:avLst>
@@ -8248,7 +8621,7 @@
       </p:sp>
       <p:pic>
         <p:nvPicPr>
-          <p:cNvPr id="26" name="Picture 25" descr="13-text2sql-result.png"/>
+          <p:cNvPr id="22" name="Picture 21" descr="11-stats.png"/>
           <p:cNvPicPr>
             <a:picLocks noChangeAspect="1"/>
           </p:cNvPicPr>
@@ -8262,8 +8635,8 @@
         </p:blipFill>
         <p:spPr>
           <a:xfrm>
-            <a:off x="6556403" y="2331720"/>
-            <a:ext cx="4946593" cy="3840480"/>
+            <a:off x="6693791" y="1417320"/>
+            <a:ext cx="4397496" cy="4800600"/>
           </a:xfrm>
           <a:prstGeom prst="rect">
             <a:avLst/>
@@ -8365,7 +8738,7 @@
                 </a:solidFill>
                 <a:latin typeface="Microsoft YaHei"/>
               </a:rPr>
-              <a:t>12 / 权限模型</a:t>
+              <a:t>12 / Text2SQL</a:t>
             </a:r>
           </a:p>
         </p:txBody>
@@ -8404,7 +8777,7 @@
                 </a:solidFill>
                 <a:latin typeface="Microsoft YaHei"/>
               </a:rPr>
-              <a:t>应用层、SQL 作用域、数据库约束三层防护</a:t>
+              <a:t>自然语言查询，但权限在数据库层兜底</a:t>
             </a:r>
           </a:p>
         </p:txBody>
@@ -8487,6 +8860,1169 @@
                 <a:latin typeface="Microsoft YaHei"/>
               </a:rPr>
               <a:t>13</a:t>
+            </a:r>
+          </a:p>
+        </p:txBody>
+      </p:sp>
+      <p:sp>
+        <p:nvSpPr>
+          <p:cNvPr id="7" name="TextBox 6"/>
+          <p:cNvSpPr txBox="1"/>
+          <p:nvPr/>
+        </p:nvSpPr>
+        <p:spPr>
+          <a:xfrm>
+            <a:off x="658368" y="6455664"/>
+            <a:ext cx="6217920" cy="228600"/>
+          </a:xfrm>
+          <a:prstGeom prst="rect">
+            <a:avLst/>
+          </a:prstGeom>
+          <a:noFill/>
+        </p:spPr>
+        <p:txBody>
+          <a:bodyPr wrap="square" anchor="t" lIns="36576" tIns="27432" rIns="36576" bIns="27432">
+            <a:spAutoFit/>
+          </a:bodyPr>
+          <a:lstStyle/>
+          <a:p>
+            <a:pPr algn="l">
+              <a:lnSpc>
+                <a:spcPct val="115000"/>
+              </a:lnSpc>
+            </a:pPr>
+            <a:r>
+              <a:rPr sz="900" b="0">
+                <a:solidFill>
+                  <a:srgbClr val="6C756F"/>
+                </a:solidFill>
+                <a:latin typeface="Microsoft YaHei"/>
+              </a:rPr>
+              <a:t>个人学习空间 · 《数据库系统概论》大作业</a:t>
+            </a:r>
+          </a:p>
+        </p:txBody>
+      </p:sp>
+      <p:sp>
+        <p:nvSpPr>
+          <p:cNvPr id="8" name="Rounded Rectangle 7"/>
+          <p:cNvSpPr/>
+          <p:nvPr/>
+        </p:nvSpPr>
+        <p:spPr>
+          <a:xfrm>
+            <a:off x="658368" y="1481328"/>
+            <a:ext cx="1874519" cy="585216"/>
+          </a:xfrm>
+          <a:prstGeom prst="roundRect">
+            <a:avLst>
+              <a:gd name="adj" fmla="val 6000"/>
+            </a:avLst>
+          </a:prstGeom>
+          <a:solidFill>
+            <a:srgbClr val="2F5D4E"/>
+          </a:solidFill>
+          <a:ln>
+            <a:noFill/>
+          </a:ln>
+        </p:spPr>
+        <p:style>
+          <a:lnRef idx="1">
+            <a:schemeClr val="accent1"/>
+          </a:lnRef>
+          <a:fillRef idx="3">
+            <a:schemeClr val="accent1"/>
+          </a:fillRef>
+          <a:effectRef idx="2">
+            <a:schemeClr val="accent1"/>
+          </a:effectRef>
+          <a:fontRef idx="minor">
+            <a:schemeClr val="lt1"/>
+          </a:fontRef>
+        </p:style>
+        <p:txBody>
+          <a:bodyPr rtlCol="0" anchor="ctr"/>
+          <a:lstStyle/>
+          <a:p>
+            <a:pPr algn="ctr"/>
+          </a:p>
+        </p:txBody>
+      </p:sp>
+      <p:sp>
+        <p:nvSpPr>
+          <p:cNvPr id="9" name="TextBox 8"/>
+          <p:cNvSpPr txBox="1"/>
+          <p:nvPr/>
+        </p:nvSpPr>
+        <p:spPr>
+          <a:xfrm>
+            <a:off x="658368" y="1554480"/>
+            <a:ext cx="1874519" cy="365760"/>
+          </a:xfrm>
+          <a:prstGeom prst="rect">
+            <a:avLst/>
+          </a:prstGeom>
+          <a:noFill/>
+        </p:spPr>
+        <p:txBody>
+          <a:bodyPr wrap="square" anchor="t" lIns="36576" tIns="27432" rIns="36576" bIns="27432">
+            <a:spAutoFit/>
+          </a:bodyPr>
+          <a:lstStyle/>
+          <a:p>
+            <a:pPr algn="ctr">
+              <a:lnSpc>
+                <a:spcPct val="115000"/>
+              </a:lnSpc>
+            </a:pPr>
+            <a:r>
+              <a:rPr sz="1150" b="1">
+                <a:solidFill>
+                  <a:srgbClr val="FFFFFF"/>
+                </a:solidFill>
+                <a:latin typeface="Microsoft YaHei"/>
+              </a:rPr>
+              <a:t>自然语言</a:t>
+            </a:r>
+          </a:p>
+        </p:txBody>
+      </p:sp>
+      <p:sp>
+        <p:nvSpPr>
+          <p:cNvPr id="10" name="TextBox 9"/>
+          <p:cNvSpPr txBox="1"/>
+          <p:nvPr/>
+        </p:nvSpPr>
+        <p:spPr>
+          <a:xfrm>
+            <a:off x="2542032" y="1572768"/>
+            <a:ext cx="274320" cy="320040"/>
+          </a:xfrm>
+          <a:prstGeom prst="rect">
+            <a:avLst/>
+          </a:prstGeom>
+          <a:noFill/>
+        </p:spPr>
+        <p:txBody>
+          <a:bodyPr wrap="square" anchor="t" lIns="36576" tIns="27432" rIns="36576" bIns="27432">
+            <a:spAutoFit/>
+          </a:bodyPr>
+          <a:lstStyle/>
+          <a:p>
+            <a:pPr algn="l">
+              <a:lnSpc>
+                <a:spcPct val="115000"/>
+              </a:lnSpc>
+            </a:pPr>
+            <a:r>
+              <a:rPr sz="1300" b="1">
+                <a:solidFill>
+                  <a:srgbClr val="B4693F"/>
+                </a:solidFill>
+                <a:latin typeface="Microsoft YaHei"/>
+              </a:rPr>
+              <a:t>→</a:t>
+            </a:r>
+          </a:p>
+        </p:txBody>
+      </p:sp>
+      <p:sp>
+        <p:nvSpPr>
+          <p:cNvPr id="11" name="Rounded Rectangle 10"/>
+          <p:cNvSpPr/>
+          <p:nvPr/>
+        </p:nvSpPr>
+        <p:spPr>
+          <a:xfrm>
+            <a:off x="2871215" y="1481328"/>
+            <a:ext cx="1874519" cy="585216"/>
+          </a:xfrm>
+          <a:prstGeom prst="roundRect">
+            <a:avLst>
+              <a:gd name="adj" fmla="val 6000"/>
+            </a:avLst>
+          </a:prstGeom>
+          <a:solidFill>
+            <a:srgbClr val="224339"/>
+          </a:solidFill>
+          <a:ln>
+            <a:noFill/>
+          </a:ln>
+        </p:spPr>
+        <p:style>
+          <a:lnRef idx="1">
+            <a:schemeClr val="accent1"/>
+          </a:lnRef>
+          <a:fillRef idx="3">
+            <a:schemeClr val="accent1"/>
+          </a:fillRef>
+          <a:effectRef idx="2">
+            <a:schemeClr val="accent1"/>
+          </a:effectRef>
+          <a:fontRef idx="minor">
+            <a:schemeClr val="lt1"/>
+          </a:fontRef>
+        </p:style>
+        <p:txBody>
+          <a:bodyPr rtlCol="0" anchor="ctr"/>
+          <a:lstStyle/>
+          <a:p>
+            <a:pPr algn="ctr"/>
+          </a:p>
+        </p:txBody>
+      </p:sp>
+      <p:sp>
+        <p:nvSpPr>
+          <p:cNvPr id="12" name="TextBox 11"/>
+          <p:cNvSpPr txBox="1"/>
+          <p:nvPr/>
+        </p:nvSpPr>
+        <p:spPr>
+          <a:xfrm>
+            <a:off x="2871215" y="1554480"/>
+            <a:ext cx="1874519" cy="365760"/>
+          </a:xfrm>
+          <a:prstGeom prst="rect">
+            <a:avLst/>
+          </a:prstGeom>
+          <a:noFill/>
+        </p:spPr>
+        <p:txBody>
+          <a:bodyPr wrap="square" anchor="t" lIns="36576" tIns="27432" rIns="36576" bIns="27432">
+            <a:spAutoFit/>
+          </a:bodyPr>
+          <a:lstStyle/>
+          <a:p>
+            <a:pPr algn="ctr">
+              <a:lnSpc>
+                <a:spcPct val="115000"/>
+              </a:lnSpc>
+            </a:pPr>
+            <a:r>
+              <a:rPr sz="1150" b="1">
+                <a:solidFill>
+                  <a:srgbClr val="FFFFFF"/>
+                </a:solidFill>
+                <a:latin typeface="Microsoft YaHei"/>
+              </a:rPr>
+              <a:t>LLM / 本地规则</a:t>
+            </a:r>
+          </a:p>
+        </p:txBody>
+      </p:sp>
+      <p:sp>
+        <p:nvSpPr>
+          <p:cNvPr id="13" name="TextBox 12"/>
+          <p:cNvSpPr txBox="1"/>
+          <p:nvPr/>
+        </p:nvSpPr>
+        <p:spPr>
+          <a:xfrm>
+            <a:off x="4754879" y="1572768"/>
+            <a:ext cx="274320" cy="320040"/>
+          </a:xfrm>
+          <a:prstGeom prst="rect">
+            <a:avLst/>
+          </a:prstGeom>
+          <a:noFill/>
+        </p:spPr>
+        <p:txBody>
+          <a:bodyPr wrap="square" anchor="t" lIns="36576" tIns="27432" rIns="36576" bIns="27432">
+            <a:spAutoFit/>
+          </a:bodyPr>
+          <a:lstStyle/>
+          <a:p>
+            <a:pPr algn="l">
+              <a:lnSpc>
+                <a:spcPct val="115000"/>
+              </a:lnSpc>
+            </a:pPr>
+            <a:r>
+              <a:rPr sz="1300" b="1">
+                <a:solidFill>
+                  <a:srgbClr val="B4693F"/>
+                </a:solidFill>
+                <a:latin typeface="Microsoft YaHei"/>
+              </a:rPr>
+              <a:t>→</a:t>
+            </a:r>
+          </a:p>
+        </p:txBody>
+      </p:sp>
+      <p:sp>
+        <p:nvSpPr>
+          <p:cNvPr id="14" name="Rounded Rectangle 13"/>
+          <p:cNvSpPr/>
+          <p:nvPr/>
+        </p:nvSpPr>
+        <p:spPr>
+          <a:xfrm>
+            <a:off x="5084064" y="1481328"/>
+            <a:ext cx="1874519" cy="585216"/>
+          </a:xfrm>
+          <a:prstGeom prst="roundRect">
+            <a:avLst>
+              <a:gd name="adj" fmla="val 6000"/>
+            </a:avLst>
+          </a:prstGeom>
+          <a:solidFill>
+            <a:srgbClr val="224339"/>
+          </a:solidFill>
+          <a:ln>
+            <a:noFill/>
+          </a:ln>
+        </p:spPr>
+        <p:style>
+          <a:lnRef idx="1">
+            <a:schemeClr val="accent1"/>
+          </a:lnRef>
+          <a:fillRef idx="3">
+            <a:schemeClr val="accent1"/>
+          </a:fillRef>
+          <a:effectRef idx="2">
+            <a:schemeClr val="accent1"/>
+          </a:effectRef>
+          <a:fontRef idx="minor">
+            <a:schemeClr val="lt1"/>
+          </a:fontRef>
+        </p:style>
+        <p:txBody>
+          <a:bodyPr rtlCol="0" anchor="ctr"/>
+          <a:lstStyle/>
+          <a:p>
+            <a:pPr algn="ctr"/>
+          </a:p>
+        </p:txBody>
+      </p:sp>
+      <p:sp>
+        <p:nvSpPr>
+          <p:cNvPr id="15" name="TextBox 14"/>
+          <p:cNvSpPr txBox="1"/>
+          <p:nvPr/>
+        </p:nvSpPr>
+        <p:spPr>
+          <a:xfrm>
+            <a:off x="5084064" y="1554480"/>
+            <a:ext cx="1874519" cy="365760"/>
+          </a:xfrm>
+          <a:prstGeom prst="rect">
+            <a:avLst/>
+          </a:prstGeom>
+          <a:noFill/>
+        </p:spPr>
+        <p:txBody>
+          <a:bodyPr wrap="square" anchor="t" lIns="36576" tIns="27432" rIns="36576" bIns="27432">
+            <a:spAutoFit/>
+          </a:bodyPr>
+          <a:lstStyle/>
+          <a:p>
+            <a:pPr algn="ctr">
+              <a:lnSpc>
+                <a:spcPct val="115000"/>
+              </a:lnSpc>
+            </a:pPr>
+            <a:r>
+              <a:rPr sz="1150" b="1">
+                <a:solidFill>
+                  <a:srgbClr val="FFFFFF"/>
+                </a:solidFill>
+                <a:latin typeface="Microsoft YaHei"/>
+              </a:rPr>
+              <a:t>AST 守卫/预检</a:t>
+            </a:r>
+          </a:p>
+        </p:txBody>
+      </p:sp>
+      <p:sp>
+        <p:nvSpPr>
+          <p:cNvPr id="16" name="TextBox 15"/>
+          <p:cNvSpPr txBox="1"/>
+          <p:nvPr/>
+        </p:nvSpPr>
+        <p:spPr>
+          <a:xfrm>
+            <a:off x="6967727" y="1572768"/>
+            <a:ext cx="274320" cy="320040"/>
+          </a:xfrm>
+          <a:prstGeom prst="rect">
+            <a:avLst/>
+          </a:prstGeom>
+          <a:noFill/>
+        </p:spPr>
+        <p:txBody>
+          <a:bodyPr wrap="square" anchor="t" lIns="36576" tIns="27432" rIns="36576" bIns="27432">
+            <a:spAutoFit/>
+          </a:bodyPr>
+          <a:lstStyle/>
+          <a:p>
+            <a:pPr algn="l">
+              <a:lnSpc>
+                <a:spcPct val="115000"/>
+              </a:lnSpc>
+            </a:pPr>
+            <a:r>
+              <a:rPr sz="1300" b="1">
+                <a:solidFill>
+                  <a:srgbClr val="B4693F"/>
+                </a:solidFill>
+                <a:latin typeface="Microsoft YaHei"/>
+              </a:rPr>
+              <a:t>→</a:t>
+            </a:r>
+          </a:p>
+        </p:txBody>
+      </p:sp>
+      <p:sp>
+        <p:nvSpPr>
+          <p:cNvPr id="17" name="Rounded Rectangle 16"/>
+          <p:cNvSpPr/>
+          <p:nvPr/>
+        </p:nvSpPr>
+        <p:spPr>
+          <a:xfrm>
+            <a:off x="7296912" y="1481328"/>
+            <a:ext cx="1874519" cy="585216"/>
+          </a:xfrm>
+          <a:prstGeom prst="roundRect">
+            <a:avLst>
+              <a:gd name="adj" fmla="val 6000"/>
+            </a:avLst>
+          </a:prstGeom>
+          <a:solidFill>
+            <a:srgbClr val="224339"/>
+          </a:solidFill>
+          <a:ln>
+            <a:noFill/>
+          </a:ln>
+        </p:spPr>
+        <p:style>
+          <a:lnRef idx="1">
+            <a:schemeClr val="accent1"/>
+          </a:lnRef>
+          <a:fillRef idx="3">
+            <a:schemeClr val="accent1"/>
+          </a:fillRef>
+          <a:effectRef idx="2">
+            <a:schemeClr val="accent1"/>
+          </a:effectRef>
+          <a:fontRef idx="minor">
+            <a:schemeClr val="lt1"/>
+          </a:fontRef>
+        </p:style>
+        <p:txBody>
+          <a:bodyPr rtlCol="0" anchor="ctr"/>
+          <a:lstStyle/>
+          <a:p>
+            <a:pPr algn="ctr"/>
+          </a:p>
+        </p:txBody>
+      </p:sp>
+      <p:sp>
+        <p:nvSpPr>
+          <p:cNvPr id="18" name="TextBox 17"/>
+          <p:cNvSpPr txBox="1"/>
+          <p:nvPr/>
+        </p:nvSpPr>
+        <p:spPr>
+          <a:xfrm>
+            <a:off x="7296912" y="1554480"/>
+            <a:ext cx="1874519" cy="365760"/>
+          </a:xfrm>
+          <a:prstGeom prst="rect">
+            <a:avLst/>
+          </a:prstGeom>
+          <a:noFill/>
+        </p:spPr>
+        <p:txBody>
+          <a:bodyPr wrap="square" anchor="t" lIns="36576" tIns="27432" rIns="36576" bIns="27432">
+            <a:spAutoFit/>
+          </a:bodyPr>
+          <a:lstStyle/>
+          <a:p>
+            <a:pPr algn="ctr">
+              <a:lnSpc>
+                <a:spcPct val="115000"/>
+              </a:lnSpc>
+            </a:pPr>
+            <a:r>
+              <a:rPr sz="1150" b="1">
+                <a:solidFill>
+                  <a:srgbClr val="FFFFFF"/>
+                </a:solidFill>
+                <a:latin typeface="Microsoft YaHei"/>
+              </a:rPr>
+              <a:t>只读视图</a:t>
+            </a:r>
+          </a:p>
+        </p:txBody>
+      </p:sp>
+      <p:sp>
+        <p:nvSpPr>
+          <p:cNvPr id="19" name="TextBox 18"/>
+          <p:cNvSpPr txBox="1"/>
+          <p:nvPr/>
+        </p:nvSpPr>
+        <p:spPr>
+          <a:xfrm>
+            <a:off x="9180576" y="1572768"/>
+            <a:ext cx="274320" cy="320040"/>
+          </a:xfrm>
+          <a:prstGeom prst="rect">
+            <a:avLst/>
+          </a:prstGeom>
+          <a:noFill/>
+        </p:spPr>
+        <p:txBody>
+          <a:bodyPr wrap="square" anchor="t" lIns="36576" tIns="27432" rIns="36576" bIns="27432">
+            <a:spAutoFit/>
+          </a:bodyPr>
+          <a:lstStyle/>
+          <a:p>
+            <a:pPr algn="l">
+              <a:lnSpc>
+                <a:spcPct val="115000"/>
+              </a:lnSpc>
+            </a:pPr>
+            <a:r>
+              <a:rPr sz="1300" b="1">
+                <a:solidFill>
+                  <a:srgbClr val="B4693F"/>
+                </a:solidFill>
+                <a:latin typeface="Microsoft YaHei"/>
+              </a:rPr>
+              <a:t>→</a:t>
+            </a:r>
+          </a:p>
+        </p:txBody>
+      </p:sp>
+      <p:sp>
+        <p:nvSpPr>
+          <p:cNvPr id="20" name="Rounded Rectangle 19"/>
+          <p:cNvSpPr/>
+          <p:nvPr/>
+        </p:nvSpPr>
+        <p:spPr>
+          <a:xfrm>
+            <a:off x="9509760" y="1481328"/>
+            <a:ext cx="1874519" cy="585216"/>
+          </a:xfrm>
+          <a:prstGeom prst="roundRect">
+            <a:avLst>
+              <a:gd name="adj" fmla="val 6000"/>
+            </a:avLst>
+          </a:prstGeom>
+          <a:solidFill>
+            <a:srgbClr val="2F5D4E"/>
+          </a:solidFill>
+          <a:ln>
+            <a:noFill/>
+          </a:ln>
+        </p:spPr>
+        <p:style>
+          <a:lnRef idx="1">
+            <a:schemeClr val="accent1"/>
+          </a:lnRef>
+          <a:fillRef idx="3">
+            <a:schemeClr val="accent1"/>
+          </a:fillRef>
+          <a:effectRef idx="2">
+            <a:schemeClr val="accent1"/>
+          </a:effectRef>
+          <a:fontRef idx="minor">
+            <a:schemeClr val="lt1"/>
+          </a:fontRef>
+        </p:style>
+        <p:txBody>
+          <a:bodyPr rtlCol="0" anchor="ctr"/>
+          <a:lstStyle/>
+          <a:p>
+            <a:pPr algn="ctr"/>
+          </a:p>
+        </p:txBody>
+      </p:sp>
+      <p:sp>
+        <p:nvSpPr>
+          <p:cNvPr id="21" name="TextBox 20"/>
+          <p:cNvSpPr txBox="1"/>
+          <p:nvPr/>
+        </p:nvSpPr>
+        <p:spPr>
+          <a:xfrm>
+            <a:off x="9509760" y="1554480"/>
+            <a:ext cx="1874519" cy="365760"/>
+          </a:xfrm>
+          <a:prstGeom prst="rect">
+            <a:avLst/>
+          </a:prstGeom>
+          <a:noFill/>
+        </p:spPr>
+        <p:txBody>
+          <a:bodyPr wrap="square" anchor="t" lIns="36576" tIns="27432" rIns="36576" bIns="27432">
+            <a:spAutoFit/>
+          </a:bodyPr>
+          <a:lstStyle/>
+          <a:p>
+            <a:pPr algn="ctr">
+              <a:lnSpc>
+                <a:spcPct val="115000"/>
+              </a:lnSpc>
+            </a:pPr>
+            <a:r>
+              <a:rPr sz="1150" b="1">
+                <a:solidFill>
+                  <a:srgbClr val="FFFFFF"/>
+                </a:solidFill>
+                <a:latin typeface="Microsoft YaHei"/>
+              </a:rPr>
+              <a:t>结果 + 审计</a:t>
+            </a:r>
+          </a:p>
+        </p:txBody>
+      </p:sp>
+      <p:sp>
+        <p:nvSpPr>
+          <p:cNvPr id="22" name="TextBox 21"/>
+          <p:cNvSpPr txBox="1"/>
+          <p:nvPr/>
+        </p:nvSpPr>
+        <p:spPr>
+          <a:xfrm>
+            <a:off x="658368" y="2423160"/>
+            <a:ext cx="5623560" cy="3108960"/>
+          </a:xfrm>
+          <a:prstGeom prst="rect">
+            <a:avLst/>
+          </a:prstGeom>
+          <a:noFill/>
+        </p:spPr>
+        <p:txBody>
+          <a:bodyPr wrap="square" lIns="0" rIns="0" tIns="0" bIns="0">
+            <a:spAutoFit/>
+          </a:bodyPr>
+          <a:lstStyle/>
+          <a:p>
+            <a:pPr>
+              <a:lnSpc>
+                <a:spcPct val="118000"/>
+              </a:lnSpc>
+              <a:spcAft>
+                <a:spcPts val="800"/>
+              </a:spcAft>
+            </a:pPr>
+            <a:r>
+              <a:rPr sz="1250">
+                <a:solidFill>
+                  <a:srgbClr val="2F5D4E"/>
+                </a:solidFill>
+                <a:latin typeface="Microsoft YaHei"/>
+              </a:rPr>
+              <a:t>• sqlglot 只允许一条 SELECT/WITH，拒绝嵌套 DML 与表函数</a:t>
+            </a:r>
+          </a:p>
+          <a:p>
+            <a:pPr>
+              <a:lnSpc>
+                <a:spcPct val="118000"/>
+              </a:lnSpc>
+              <a:spcAft>
+                <a:spcPts val="800"/>
+              </a:spcAft>
+            </a:pPr>
+            <a:r>
+              <a:rPr sz="1250">
+                <a:solidFill>
+                  <a:srgbClr val="2F5D4E"/>
+                </a:solidFill>
+                <a:latin typeface="Microsoft YaHei"/>
+              </a:rPr>
+              <a:t>• 对象白名单：15 个 t2s 视图，禁止 app / pg_catalog</a:t>
+            </a:r>
+          </a:p>
+          <a:p>
+            <a:pPr>
+              <a:lnSpc>
+                <a:spcPct val="118000"/>
+              </a:lnSpc>
+              <a:spcAft>
+                <a:spcPts val="800"/>
+              </a:spcAft>
+            </a:pPr>
+            <a:r>
+              <a:rPr sz="1250">
+                <a:solidFill>
+                  <a:srgbClr val="2F5D4E"/>
+                </a:solidFill>
+                <a:latin typeface="Microsoft YaHei"/>
+              </a:rPr>
+              <a:t>• EXPLAIN 预检代价与估算行数，超限直接拒绝</a:t>
+            </a:r>
+          </a:p>
+          <a:p>
+            <a:pPr>
+              <a:lnSpc>
+                <a:spcPct val="118000"/>
+              </a:lnSpc>
+              <a:spcAft>
+                <a:spcPts val="800"/>
+              </a:spcAft>
+            </a:pPr>
+            <a:r>
+              <a:rPr sz="1250">
+                <a:solidFill>
+                  <a:srgbClr val="2F5D4E"/>
+                </a:solidFill>
+                <a:latin typeface="Microsoft YaHei"/>
+              </a:rPr>
+              <a:t>• 包裹 200 行上限；t2s_reader 只读事务、3 秒超时</a:t>
+            </a:r>
+          </a:p>
+          <a:p>
+            <a:pPr>
+              <a:lnSpc>
+                <a:spcPct val="118000"/>
+              </a:lnSpc>
+              <a:spcAft>
+                <a:spcPts val="800"/>
+              </a:spcAft>
+            </a:pPr>
+            <a:r>
+              <a:rPr sz="1250">
+                <a:solidFill>
+                  <a:srgbClr val="2F5D4E"/>
+                </a:solidFill>
+                <a:latin typeface="Microsoft YaHei"/>
+              </a:rPr>
+              <a:t>• 视图 security_barrier，按 app.user_id 过滤</a:t>
+            </a:r>
+          </a:p>
+          <a:p>
+            <a:pPr>
+              <a:lnSpc>
+                <a:spcPct val="118000"/>
+              </a:lnSpc>
+              <a:spcAft>
+                <a:spcPts val="800"/>
+              </a:spcAft>
+            </a:pPr>
+            <a:r>
+              <a:rPr sz="1250">
+                <a:solidFill>
+                  <a:srgbClr val="2F5D4E"/>
+                </a:solidFill>
+                <a:latin typeface="Microsoft YaHei"/>
+              </a:rPr>
+              <a:t>• 成功、拒绝、异常全部写 text2sql_log</a:t>
+            </a:r>
+          </a:p>
+          <a:p>
+            <a:pPr>
+              <a:lnSpc>
+                <a:spcPct val="118000"/>
+              </a:lnSpc>
+              <a:spcAft>
+                <a:spcPts val="800"/>
+              </a:spcAft>
+            </a:pPr>
+            <a:r>
+              <a:rPr sz="1250">
+                <a:solidFill>
+                  <a:srgbClr val="2F5D4E"/>
+                </a:solidFill>
+                <a:latin typeface="Microsoft YaHei"/>
+              </a:rPr>
+              <a:t>• 无 Key 走 mock，配置 Key 走 OpenAI 兼容接口</a:t>
+            </a:r>
+          </a:p>
+        </p:txBody>
+      </p:sp>
+      <p:sp>
+        <p:nvSpPr>
+          <p:cNvPr id="23" name="Rounded Rectangle 22"/>
+          <p:cNvSpPr/>
+          <p:nvPr/>
+        </p:nvSpPr>
+        <p:spPr>
+          <a:xfrm>
+            <a:off x="658368" y="5440680"/>
+            <a:ext cx="5623560" cy="749808"/>
+          </a:xfrm>
+          <a:prstGeom prst="roundRect">
+            <a:avLst>
+              <a:gd name="adj" fmla="val 6000"/>
+            </a:avLst>
+          </a:prstGeom>
+          <a:solidFill>
+            <a:srgbClr val="224339"/>
+          </a:solidFill>
+          <a:ln>
+            <a:noFill/>
+          </a:ln>
+        </p:spPr>
+        <p:style>
+          <a:lnRef idx="1">
+            <a:schemeClr val="accent1"/>
+          </a:lnRef>
+          <a:fillRef idx="3">
+            <a:schemeClr val="accent1"/>
+          </a:fillRef>
+          <a:effectRef idx="2">
+            <a:schemeClr val="accent1"/>
+          </a:effectRef>
+          <a:fontRef idx="minor">
+            <a:schemeClr val="lt1"/>
+          </a:fontRef>
+        </p:style>
+        <p:txBody>
+          <a:bodyPr rtlCol="0" anchor="ctr"/>
+          <a:lstStyle/>
+          <a:p>
+            <a:pPr algn="ctr"/>
+          </a:p>
+        </p:txBody>
+      </p:sp>
+      <p:sp>
+        <p:nvSpPr>
+          <p:cNvPr id="24" name="TextBox 23"/>
+          <p:cNvSpPr txBox="1"/>
+          <p:nvPr/>
+        </p:nvSpPr>
+        <p:spPr>
+          <a:xfrm>
+            <a:off x="804672" y="5550408"/>
+            <a:ext cx="5330952" cy="530352"/>
+          </a:xfrm>
+          <a:prstGeom prst="rect">
+            <a:avLst/>
+          </a:prstGeom>
+          <a:noFill/>
+        </p:spPr>
+        <p:txBody>
+          <a:bodyPr wrap="square" anchor="t" lIns="36576" tIns="27432" rIns="36576" bIns="27432">
+            <a:spAutoFit/>
+          </a:bodyPr>
+          <a:lstStyle/>
+          <a:p>
+            <a:pPr algn="l">
+              <a:lnSpc>
+                <a:spcPct val="110000"/>
+              </a:lnSpc>
+            </a:pPr>
+            <a:r>
+              <a:rPr sz="919" b="0">
+                <a:solidFill>
+                  <a:srgbClr val="ECF2EA"/>
+                </a:solidFill>
+                <a:latin typeface="Consolas"/>
+              </a:rPr>
+              <a:t>t2s_reader: CONNECT + USAGE(t2s) + SELECT 视图</a:t>
+            </a:r>
+          </a:p>
+          <a:p>
+            <a:pPr algn="l">
+              <a:lnSpc>
+                <a:spcPct val="110000"/>
+              </a:lnSpc>
+            </a:pPr>
+            <a:r>
+              <a:rPr sz="919" b="0">
+                <a:solidFill>
+                  <a:srgbClr val="ECF2EA"/>
+                </a:solidFill>
+                <a:latin typeface="Consolas"/>
+              </a:rPr>
+              <a:t>default_transaction_read_only = on</a:t>
+            </a:r>
+          </a:p>
+        </p:txBody>
+      </p:sp>
+      <p:sp>
+        <p:nvSpPr>
+          <p:cNvPr id="25" name="Rounded Rectangle 24"/>
+          <p:cNvSpPr/>
+          <p:nvPr/>
+        </p:nvSpPr>
+        <p:spPr>
+          <a:xfrm>
+            <a:off x="6492240" y="2286000"/>
+            <a:ext cx="5074920" cy="3931920"/>
+          </a:xfrm>
+          <a:prstGeom prst="roundRect">
+            <a:avLst>
+              <a:gd name="adj" fmla="val 6000"/>
+            </a:avLst>
+          </a:prstGeom>
+          <a:solidFill>
+            <a:srgbClr val="FFFFFF"/>
+          </a:solidFill>
+          <a:ln w="10160">
+            <a:solidFill>
+              <a:srgbClr val="D8D1C0"/>
+            </a:solidFill>
+          </a:ln>
+        </p:spPr>
+        <p:style>
+          <a:lnRef idx="1">
+            <a:schemeClr val="accent1"/>
+          </a:lnRef>
+          <a:fillRef idx="3">
+            <a:schemeClr val="accent1"/>
+          </a:fillRef>
+          <a:effectRef idx="2">
+            <a:schemeClr val="accent1"/>
+          </a:effectRef>
+          <a:fontRef idx="minor">
+            <a:schemeClr val="lt1"/>
+          </a:fontRef>
+        </p:style>
+        <p:txBody>
+          <a:bodyPr rtlCol="0" anchor="ctr"/>
+          <a:lstStyle/>
+          <a:p>
+            <a:pPr algn="ctr"/>
+          </a:p>
+        </p:txBody>
+      </p:sp>
+      <p:pic>
+        <p:nvPicPr>
+          <p:cNvPr id="26" name="Picture 25" descr="13-text2sql-result.png"/>
+          <p:cNvPicPr>
+            <a:picLocks noChangeAspect="1"/>
+          </p:cNvPicPr>
+          <p:nvPr/>
+        </p:nvPicPr>
+        <p:blipFill>
+          <a:blip r:embed="rId2"/>
+          <a:stretch>
+            <a:fillRect/>
+          </a:stretch>
+        </p:blipFill>
+        <p:spPr>
+          <a:xfrm>
+            <a:off x="6556403" y="2331720"/>
+            <a:ext cx="4946593" cy="3840480"/>
+          </a:xfrm>
+          <a:prstGeom prst="rect">
+            <a:avLst/>
+          </a:prstGeom>
+        </p:spPr>
+      </p:pic>
+    </p:spTree>
+  </p:cSld>
+  <p:clrMapOvr>
+    <a:masterClrMapping/>
+  </p:clrMapOvr>
+</p:sld>
+</file>
+
+<file path=ppt/slides/slide14.xml><?xml version="1.0" encoding="utf-8"?>
+<p:sld xmlns:a="http://schemas.openxmlformats.org/drawingml/2006/main" xmlns:p="http://schemas.openxmlformats.org/presentationml/2006/main" xmlns:r="http://schemas.openxmlformats.org/officeDocument/2006/relationships">
+  <p:cSld>
+    <p:spTree>
+      <p:nvGrpSpPr>
+        <p:cNvPr id="1" name=""/>
+        <p:cNvGrpSpPr/>
+        <p:nvPr/>
+      </p:nvGrpSpPr>
+      <p:grpSpPr/>
+      <p:sp>
+        <p:nvSpPr>
+          <p:cNvPr id="2" name="Rectangle 1"/>
+          <p:cNvSpPr/>
+          <p:nvPr/>
+        </p:nvSpPr>
+        <p:spPr>
+          <a:xfrm>
+            <a:off x="0" y="0"/>
+            <a:ext cx="12191695" cy="6858000"/>
+          </a:xfrm>
+          <a:prstGeom prst="rect">
+            <a:avLst/>
+          </a:prstGeom>
+          <a:solidFill>
+            <a:srgbClr val="F7F4EB"/>
+          </a:solidFill>
+          <a:ln>
+            <a:noFill/>
+          </a:ln>
+        </p:spPr>
+        <p:style>
+          <a:lnRef idx="1">
+            <a:schemeClr val="accent1"/>
+          </a:lnRef>
+          <a:fillRef idx="3">
+            <a:schemeClr val="accent1"/>
+          </a:fillRef>
+          <a:effectRef idx="2">
+            <a:schemeClr val="accent1"/>
+          </a:effectRef>
+          <a:fontRef idx="minor">
+            <a:schemeClr val="lt1"/>
+          </a:fontRef>
+        </p:style>
+        <p:txBody>
+          <a:bodyPr rtlCol="0" anchor="ctr"/>
+          <a:lstStyle/>
+          <a:p>
+            <a:pPr algn="ctr"/>
+          </a:p>
+        </p:txBody>
+      </p:sp>
+      <p:sp>
+        <p:nvSpPr>
+          <p:cNvPr id="3" name="TextBox 2"/>
+          <p:cNvSpPr txBox="1"/>
+          <p:nvPr/>
+        </p:nvSpPr>
+        <p:spPr>
+          <a:xfrm>
+            <a:off x="658368" y="384048"/>
+            <a:ext cx="8961120" cy="256032"/>
+          </a:xfrm>
+          <a:prstGeom prst="rect">
+            <a:avLst/>
+          </a:prstGeom>
+          <a:noFill/>
+        </p:spPr>
+        <p:txBody>
+          <a:bodyPr wrap="square" anchor="t" lIns="36576" tIns="27432" rIns="36576" bIns="27432">
+            <a:spAutoFit/>
+          </a:bodyPr>
+          <a:lstStyle/>
+          <a:p>
+            <a:pPr algn="l">
+              <a:lnSpc>
+                <a:spcPct val="115000"/>
+              </a:lnSpc>
+            </a:pPr>
+            <a:r>
+              <a:rPr sz="1100" b="1">
+                <a:solidFill>
+                  <a:srgbClr val="B4693F"/>
+                </a:solidFill>
+                <a:latin typeface="Microsoft YaHei"/>
+              </a:rPr>
+              <a:t>13 / 权限模型</a:t>
+            </a:r>
+          </a:p>
+        </p:txBody>
+      </p:sp>
+      <p:sp>
+        <p:nvSpPr>
+          <p:cNvPr id="4" name="TextBox 3"/>
+          <p:cNvSpPr txBox="1"/>
+          <p:nvPr/>
+        </p:nvSpPr>
+        <p:spPr>
+          <a:xfrm>
+            <a:off x="658368" y="640080"/>
+            <a:ext cx="10881360" cy="566928"/>
+          </a:xfrm>
+          <a:prstGeom prst="rect">
+            <a:avLst/>
+          </a:prstGeom>
+          <a:noFill/>
+        </p:spPr>
+        <p:txBody>
+          <a:bodyPr wrap="square" anchor="t" lIns="36576" tIns="27432" rIns="36576" bIns="27432">
+            <a:spAutoFit/>
+          </a:bodyPr>
+          <a:lstStyle/>
+          <a:p>
+            <a:pPr algn="l">
+              <a:lnSpc>
+                <a:spcPct val="115000"/>
+              </a:lnSpc>
+            </a:pPr>
+            <a:r>
+              <a:rPr sz="2700" b="1">
+                <a:solidFill>
+                  <a:srgbClr val="1F2A24"/>
+                </a:solidFill>
+                <a:latin typeface="Microsoft YaHei"/>
+              </a:rPr>
+              <a:t>应用层、SQL 作用域、数据库约束三层防护</a:t>
+            </a:r>
+          </a:p>
+        </p:txBody>
+      </p:sp>
+      <p:sp>
+        <p:nvSpPr>
+          <p:cNvPr id="5" name="Rectangle 4"/>
+          <p:cNvSpPr/>
+          <p:nvPr/>
+        </p:nvSpPr>
+        <p:spPr>
+          <a:xfrm>
+            <a:off x="658368" y="1243584"/>
+            <a:ext cx="10881360" cy="16459"/>
+          </a:xfrm>
+          <a:prstGeom prst="rect">
+            <a:avLst/>
+          </a:prstGeom>
+          <a:solidFill>
+            <a:srgbClr val="D8D1C0"/>
+          </a:solidFill>
+          <a:ln>
+            <a:noFill/>
+          </a:ln>
+        </p:spPr>
+        <p:style>
+          <a:lnRef idx="1">
+            <a:schemeClr val="accent1"/>
+          </a:lnRef>
+          <a:fillRef idx="3">
+            <a:schemeClr val="accent1"/>
+          </a:fillRef>
+          <a:effectRef idx="2">
+            <a:schemeClr val="accent1"/>
+          </a:effectRef>
+          <a:fontRef idx="minor">
+            <a:schemeClr val="lt1"/>
+          </a:fontRef>
+        </p:style>
+        <p:txBody>
+          <a:bodyPr rtlCol="0" anchor="ctr"/>
+          <a:lstStyle/>
+          <a:p>
+            <a:pPr algn="ctr"/>
+          </a:p>
+        </p:txBody>
+      </p:sp>
+      <p:sp>
+        <p:nvSpPr>
+          <p:cNvPr id="6" name="TextBox 5"/>
+          <p:cNvSpPr txBox="1"/>
+          <p:nvPr/>
+        </p:nvSpPr>
+        <p:spPr>
+          <a:xfrm>
+            <a:off x="10652760" y="6455664"/>
+            <a:ext cx="822960" cy="228600"/>
+          </a:xfrm>
+          <a:prstGeom prst="rect">
+            <a:avLst/>
+          </a:prstGeom>
+          <a:noFill/>
+        </p:spPr>
+        <p:txBody>
+          <a:bodyPr wrap="square" anchor="t" lIns="36576" tIns="27432" rIns="36576" bIns="27432">
+            <a:spAutoFit/>
+          </a:bodyPr>
+          <a:lstStyle/>
+          <a:p>
+            <a:pPr algn="r">
+              <a:lnSpc>
+                <a:spcPct val="115000"/>
+              </a:lnSpc>
+            </a:pPr>
+            <a:r>
+              <a:rPr sz="1000" b="0">
+                <a:solidFill>
+                  <a:srgbClr val="6C756F"/>
+                </a:solidFill>
+                <a:latin typeface="Microsoft YaHei"/>
+              </a:rPr>
+              <a:t>14</a:t>
             </a:r>
           </a:p>
         </p:txBody>
@@ -9576,1446 +11112,6 @@
 </p:sld>
 </file>
 
-<file path=ppt/slides/slide14.xml><?xml version="1.0" encoding="utf-8"?>
-<p:sld xmlns:a="http://schemas.openxmlformats.org/drawingml/2006/main" xmlns:p="http://schemas.openxmlformats.org/presentationml/2006/main" xmlns:r="http://schemas.openxmlformats.org/officeDocument/2006/relationships">
-  <p:cSld>
-    <p:spTree>
-      <p:nvGrpSpPr>
-        <p:cNvPr id="1" name=""/>
-        <p:cNvGrpSpPr/>
-        <p:nvPr/>
-      </p:nvGrpSpPr>
-      <p:grpSpPr/>
-      <p:sp>
-        <p:nvSpPr>
-          <p:cNvPr id="2" name="Rectangle 1"/>
-          <p:cNvSpPr/>
-          <p:nvPr/>
-        </p:nvSpPr>
-        <p:spPr>
-          <a:xfrm>
-            <a:off x="0" y="0"/>
-            <a:ext cx="12191695" cy="6858000"/>
-          </a:xfrm>
-          <a:prstGeom prst="rect">
-            <a:avLst/>
-          </a:prstGeom>
-          <a:solidFill>
-            <a:srgbClr val="F7F4EB"/>
-          </a:solidFill>
-          <a:ln>
-            <a:noFill/>
-          </a:ln>
-        </p:spPr>
-        <p:style>
-          <a:lnRef idx="1">
-            <a:schemeClr val="accent1"/>
-          </a:lnRef>
-          <a:fillRef idx="3">
-            <a:schemeClr val="accent1"/>
-          </a:fillRef>
-          <a:effectRef idx="2">
-            <a:schemeClr val="accent1"/>
-          </a:effectRef>
-          <a:fontRef idx="minor">
-            <a:schemeClr val="lt1"/>
-          </a:fontRef>
-        </p:style>
-        <p:txBody>
-          <a:bodyPr rtlCol="0" anchor="ctr"/>
-          <a:lstStyle/>
-          <a:p>
-            <a:pPr algn="ctr"/>
-          </a:p>
-        </p:txBody>
-      </p:sp>
-      <p:sp>
-        <p:nvSpPr>
-          <p:cNvPr id="3" name="TextBox 2"/>
-          <p:cNvSpPr txBox="1"/>
-          <p:nvPr/>
-        </p:nvSpPr>
-        <p:spPr>
-          <a:xfrm>
-            <a:off x="658368" y="384048"/>
-            <a:ext cx="8961120" cy="256032"/>
-          </a:xfrm>
-          <a:prstGeom prst="rect">
-            <a:avLst/>
-          </a:prstGeom>
-          <a:noFill/>
-        </p:spPr>
-        <p:txBody>
-          <a:bodyPr wrap="square" anchor="t" lIns="36576" tIns="27432" rIns="36576" bIns="27432">
-            <a:spAutoFit/>
-          </a:bodyPr>
-          <a:lstStyle/>
-          <a:p>
-            <a:pPr algn="l">
-              <a:lnSpc>
-                <a:spcPct val="115000"/>
-              </a:lnSpc>
-            </a:pPr>
-            <a:r>
-              <a:rPr sz="1100" b="1">
-                <a:solidFill>
-                  <a:srgbClr val="B4693F"/>
-                </a:solidFill>
-                <a:latin typeface="Microsoft YaHei"/>
-              </a:rPr>
-              <a:t>13 / 测试与验收</a:t>
-            </a:r>
-          </a:p>
-        </p:txBody>
-      </p:sp>
-      <p:sp>
-        <p:nvSpPr>
-          <p:cNvPr id="4" name="TextBox 3"/>
-          <p:cNvSpPr txBox="1"/>
-          <p:nvPr/>
-        </p:nvSpPr>
-        <p:spPr>
-          <a:xfrm>
-            <a:off x="658368" y="640080"/>
-            <a:ext cx="10881360" cy="566928"/>
-          </a:xfrm>
-          <a:prstGeom prst="rect">
-            <a:avLst/>
-          </a:prstGeom>
-          <a:noFill/>
-        </p:spPr>
-        <p:txBody>
-          <a:bodyPr wrap="square" anchor="t" lIns="36576" tIns="27432" rIns="36576" bIns="27432">
-            <a:spAutoFit/>
-          </a:bodyPr>
-          <a:lstStyle/>
-          <a:p>
-            <a:pPr algn="l">
-              <a:lnSpc>
-                <a:spcPct val="115000"/>
-              </a:lnSpc>
-            </a:pPr>
-            <a:r>
-              <a:rPr sz="2700" b="1">
-                <a:solidFill>
-                  <a:srgbClr val="1F2A24"/>
-                </a:solidFill>
-                <a:latin typeface="Microsoft YaHei"/>
-              </a:rPr>
-              <a:t>231 项测试与 38 项端到端验收全部通过</a:t>
-            </a:r>
-          </a:p>
-        </p:txBody>
-      </p:sp>
-      <p:sp>
-        <p:nvSpPr>
-          <p:cNvPr id="5" name="Rectangle 4"/>
-          <p:cNvSpPr/>
-          <p:nvPr/>
-        </p:nvSpPr>
-        <p:spPr>
-          <a:xfrm>
-            <a:off x="658368" y="1243584"/>
-            <a:ext cx="10881360" cy="16459"/>
-          </a:xfrm>
-          <a:prstGeom prst="rect">
-            <a:avLst/>
-          </a:prstGeom>
-          <a:solidFill>
-            <a:srgbClr val="D8D1C0"/>
-          </a:solidFill>
-          <a:ln>
-            <a:noFill/>
-          </a:ln>
-        </p:spPr>
-        <p:style>
-          <a:lnRef idx="1">
-            <a:schemeClr val="accent1"/>
-          </a:lnRef>
-          <a:fillRef idx="3">
-            <a:schemeClr val="accent1"/>
-          </a:fillRef>
-          <a:effectRef idx="2">
-            <a:schemeClr val="accent1"/>
-          </a:effectRef>
-          <a:fontRef idx="minor">
-            <a:schemeClr val="lt1"/>
-          </a:fontRef>
-        </p:style>
-        <p:txBody>
-          <a:bodyPr rtlCol="0" anchor="ctr"/>
-          <a:lstStyle/>
-          <a:p>
-            <a:pPr algn="ctr"/>
-          </a:p>
-        </p:txBody>
-      </p:sp>
-      <p:sp>
-        <p:nvSpPr>
-          <p:cNvPr id="6" name="TextBox 5"/>
-          <p:cNvSpPr txBox="1"/>
-          <p:nvPr/>
-        </p:nvSpPr>
-        <p:spPr>
-          <a:xfrm>
-            <a:off x="10652760" y="6455664"/>
-            <a:ext cx="822960" cy="228600"/>
-          </a:xfrm>
-          <a:prstGeom prst="rect">
-            <a:avLst/>
-          </a:prstGeom>
-          <a:noFill/>
-        </p:spPr>
-        <p:txBody>
-          <a:bodyPr wrap="square" anchor="t" lIns="36576" tIns="27432" rIns="36576" bIns="27432">
-            <a:spAutoFit/>
-          </a:bodyPr>
-          <a:lstStyle/>
-          <a:p>
-            <a:pPr algn="r">
-              <a:lnSpc>
-                <a:spcPct val="115000"/>
-              </a:lnSpc>
-            </a:pPr>
-            <a:r>
-              <a:rPr sz="1000" b="0">
-                <a:solidFill>
-                  <a:srgbClr val="6C756F"/>
-                </a:solidFill>
-                <a:latin typeface="Microsoft YaHei"/>
-              </a:rPr>
-              <a:t>14</a:t>
-            </a:r>
-          </a:p>
-        </p:txBody>
-      </p:sp>
-      <p:sp>
-        <p:nvSpPr>
-          <p:cNvPr id="7" name="TextBox 6"/>
-          <p:cNvSpPr txBox="1"/>
-          <p:nvPr/>
-        </p:nvSpPr>
-        <p:spPr>
-          <a:xfrm>
-            <a:off x="658368" y="6455664"/>
-            <a:ext cx="6217920" cy="228600"/>
-          </a:xfrm>
-          <a:prstGeom prst="rect">
-            <a:avLst/>
-          </a:prstGeom>
-          <a:noFill/>
-        </p:spPr>
-        <p:txBody>
-          <a:bodyPr wrap="square" anchor="t" lIns="36576" tIns="27432" rIns="36576" bIns="27432">
-            <a:spAutoFit/>
-          </a:bodyPr>
-          <a:lstStyle/>
-          <a:p>
-            <a:pPr algn="l">
-              <a:lnSpc>
-                <a:spcPct val="115000"/>
-              </a:lnSpc>
-            </a:pPr>
-            <a:r>
-              <a:rPr sz="900" b="0">
-                <a:solidFill>
-                  <a:srgbClr val="6C756F"/>
-                </a:solidFill>
-                <a:latin typeface="Microsoft YaHei"/>
-              </a:rPr>
-              <a:t>个人学习空间 · 《数据库系统概论》大作业</a:t>
-            </a:r>
-          </a:p>
-        </p:txBody>
-      </p:sp>
-      <p:sp>
-        <p:nvSpPr>
-          <p:cNvPr id="8" name="Rounded Rectangle 7"/>
-          <p:cNvSpPr/>
-          <p:nvPr/>
-        </p:nvSpPr>
-        <p:spPr>
-          <a:xfrm>
-            <a:off x="658368" y="1481328"/>
-            <a:ext cx="1783080" cy="1234440"/>
-          </a:xfrm>
-          <a:prstGeom prst="roundRect">
-            <a:avLst>
-              <a:gd name="adj" fmla="val 6000"/>
-            </a:avLst>
-          </a:prstGeom>
-          <a:solidFill>
-            <a:srgbClr val="FFFFFF"/>
-          </a:solidFill>
-          <a:ln w="8890">
-            <a:solidFill>
-              <a:srgbClr val="D8D1C0"/>
-            </a:solidFill>
-          </a:ln>
-        </p:spPr>
-        <p:style>
-          <a:lnRef idx="1">
-            <a:schemeClr val="accent1"/>
-          </a:lnRef>
-          <a:fillRef idx="3">
-            <a:schemeClr val="accent1"/>
-          </a:fillRef>
-          <a:effectRef idx="2">
-            <a:schemeClr val="accent1"/>
-          </a:effectRef>
-          <a:fontRef idx="minor">
-            <a:schemeClr val="lt1"/>
-          </a:fontRef>
-        </p:style>
-        <p:txBody>
-          <a:bodyPr rtlCol="0" anchor="ctr"/>
-          <a:lstStyle/>
-          <a:p>
-            <a:pPr algn="ctr"/>
-          </a:p>
-        </p:txBody>
-      </p:sp>
-      <p:sp>
-        <p:nvSpPr>
-          <p:cNvPr id="9" name="TextBox 8"/>
-          <p:cNvSpPr txBox="1"/>
-          <p:nvPr/>
-        </p:nvSpPr>
-        <p:spPr>
-          <a:xfrm>
-            <a:off x="795528" y="1572768"/>
-            <a:ext cx="1508760" cy="566928"/>
-          </a:xfrm>
-          <a:prstGeom prst="rect">
-            <a:avLst/>
-          </a:prstGeom>
-          <a:noFill/>
-        </p:spPr>
-        <p:txBody>
-          <a:bodyPr wrap="square" anchor="t" lIns="36576" tIns="27432" rIns="36576" bIns="27432">
-            <a:spAutoFit/>
-          </a:bodyPr>
-          <a:lstStyle/>
-          <a:p>
-            <a:pPr algn="l">
-              <a:lnSpc>
-                <a:spcPct val="115000"/>
-              </a:lnSpc>
-            </a:pPr>
-            <a:r>
-              <a:rPr sz="3000" b="1">
-                <a:solidFill>
-                  <a:srgbClr val="2F5D4E"/>
-                </a:solidFill>
-                <a:latin typeface="Microsoft YaHei"/>
-              </a:rPr>
-              <a:t>231</a:t>
-            </a:r>
-          </a:p>
-        </p:txBody>
-      </p:sp>
-      <p:sp>
-        <p:nvSpPr>
-          <p:cNvPr id="10" name="TextBox 9"/>
-          <p:cNvSpPr txBox="1"/>
-          <p:nvPr/>
-        </p:nvSpPr>
-        <p:spPr>
-          <a:xfrm>
-            <a:off x="795528" y="2167128"/>
-            <a:ext cx="1508760" cy="274320"/>
-          </a:xfrm>
-          <a:prstGeom prst="rect">
-            <a:avLst/>
-          </a:prstGeom>
-          <a:noFill/>
-        </p:spPr>
-        <p:txBody>
-          <a:bodyPr wrap="square" anchor="t" lIns="36576" tIns="27432" rIns="36576" bIns="27432">
-            <a:spAutoFit/>
-          </a:bodyPr>
-          <a:lstStyle/>
-          <a:p>
-            <a:pPr algn="l">
-              <a:lnSpc>
-                <a:spcPct val="115000"/>
-              </a:lnSpc>
-            </a:pPr>
-            <a:r>
-              <a:rPr sz="1050" b="0">
-                <a:solidFill>
-                  <a:srgbClr val="6C756F"/>
-                </a:solidFill>
-                <a:latin typeface="Microsoft YaHei"/>
-              </a:rPr>
-              <a:t>自动化测试</a:t>
-            </a:r>
-          </a:p>
-        </p:txBody>
-      </p:sp>
-      <p:sp>
-        <p:nvSpPr>
-          <p:cNvPr id="11" name="Rounded Rectangle 10"/>
-          <p:cNvSpPr/>
-          <p:nvPr/>
-        </p:nvSpPr>
-        <p:spPr>
-          <a:xfrm>
-            <a:off x="2624328" y="1481328"/>
-            <a:ext cx="1783080" cy="1234440"/>
-          </a:xfrm>
-          <a:prstGeom prst="roundRect">
-            <a:avLst>
-              <a:gd name="adj" fmla="val 6000"/>
-            </a:avLst>
-          </a:prstGeom>
-          <a:solidFill>
-            <a:srgbClr val="FFFFFF"/>
-          </a:solidFill>
-          <a:ln w="8890">
-            <a:solidFill>
-              <a:srgbClr val="D8D1C0"/>
-            </a:solidFill>
-          </a:ln>
-        </p:spPr>
-        <p:style>
-          <a:lnRef idx="1">
-            <a:schemeClr val="accent1"/>
-          </a:lnRef>
-          <a:fillRef idx="3">
-            <a:schemeClr val="accent1"/>
-          </a:fillRef>
-          <a:effectRef idx="2">
-            <a:schemeClr val="accent1"/>
-          </a:effectRef>
-          <a:fontRef idx="minor">
-            <a:schemeClr val="lt1"/>
-          </a:fontRef>
-        </p:style>
-        <p:txBody>
-          <a:bodyPr rtlCol="0" anchor="ctr"/>
-          <a:lstStyle/>
-          <a:p>
-            <a:pPr algn="ctr"/>
-          </a:p>
-        </p:txBody>
-      </p:sp>
-      <p:sp>
-        <p:nvSpPr>
-          <p:cNvPr id="12" name="TextBox 11"/>
-          <p:cNvSpPr txBox="1"/>
-          <p:nvPr/>
-        </p:nvSpPr>
-        <p:spPr>
-          <a:xfrm>
-            <a:off x="2761488" y="1572768"/>
-            <a:ext cx="1508760" cy="566928"/>
-          </a:xfrm>
-          <a:prstGeom prst="rect">
-            <a:avLst/>
-          </a:prstGeom>
-          <a:noFill/>
-        </p:spPr>
-        <p:txBody>
-          <a:bodyPr wrap="square" anchor="t" lIns="36576" tIns="27432" rIns="36576" bIns="27432">
-            <a:spAutoFit/>
-          </a:bodyPr>
-          <a:lstStyle/>
-          <a:p>
-            <a:pPr algn="l">
-              <a:lnSpc>
-                <a:spcPct val="115000"/>
-              </a:lnSpc>
-            </a:pPr>
-            <a:r>
-              <a:rPr sz="3000" b="1">
-                <a:solidFill>
-                  <a:srgbClr val="2F5D4E"/>
-                </a:solidFill>
-                <a:latin typeface="Microsoft YaHei"/>
-              </a:rPr>
-              <a:t>38</a:t>
-            </a:r>
-          </a:p>
-        </p:txBody>
-      </p:sp>
-      <p:sp>
-        <p:nvSpPr>
-          <p:cNvPr id="13" name="TextBox 12"/>
-          <p:cNvSpPr txBox="1"/>
-          <p:nvPr/>
-        </p:nvSpPr>
-        <p:spPr>
-          <a:xfrm>
-            <a:off x="2761488" y="2167128"/>
-            <a:ext cx="1508760" cy="274320"/>
-          </a:xfrm>
-          <a:prstGeom prst="rect">
-            <a:avLst/>
-          </a:prstGeom>
-          <a:noFill/>
-        </p:spPr>
-        <p:txBody>
-          <a:bodyPr wrap="square" anchor="t" lIns="36576" tIns="27432" rIns="36576" bIns="27432">
-            <a:spAutoFit/>
-          </a:bodyPr>
-          <a:lstStyle/>
-          <a:p>
-            <a:pPr algn="l">
-              <a:lnSpc>
-                <a:spcPct val="115000"/>
-              </a:lnSpc>
-            </a:pPr>
-            <a:r>
-              <a:rPr sz="1050" b="0">
-                <a:solidFill>
-                  <a:srgbClr val="6C756F"/>
-                </a:solidFill>
-                <a:latin typeface="Microsoft YaHei"/>
-              </a:rPr>
-              <a:t>端到端检查</a:t>
-            </a:r>
-          </a:p>
-        </p:txBody>
-      </p:sp>
-      <p:sp>
-        <p:nvSpPr>
-          <p:cNvPr id="14" name="Rounded Rectangle 13"/>
-          <p:cNvSpPr/>
-          <p:nvPr/>
-        </p:nvSpPr>
-        <p:spPr>
-          <a:xfrm>
-            <a:off x="4590288" y="1481328"/>
-            <a:ext cx="1783080" cy="1234440"/>
-          </a:xfrm>
-          <a:prstGeom prst="roundRect">
-            <a:avLst>
-              <a:gd name="adj" fmla="val 6000"/>
-            </a:avLst>
-          </a:prstGeom>
-          <a:solidFill>
-            <a:srgbClr val="FFFFFF"/>
-          </a:solidFill>
-          <a:ln w="8890">
-            <a:solidFill>
-              <a:srgbClr val="D8D1C0"/>
-            </a:solidFill>
-          </a:ln>
-        </p:spPr>
-        <p:style>
-          <a:lnRef idx="1">
-            <a:schemeClr val="accent1"/>
-          </a:lnRef>
-          <a:fillRef idx="3">
-            <a:schemeClr val="accent1"/>
-          </a:fillRef>
-          <a:effectRef idx="2">
-            <a:schemeClr val="accent1"/>
-          </a:effectRef>
-          <a:fontRef idx="minor">
-            <a:schemeClr val="lt1"/>
-          </a:fontRef>
-        </p:style>
-        <p:txBody>
-          <a:bodyPr rtlCol="0" anchor="ctr"/>
-          <a:lstStyle/>
-          <a:p>
-            <a:pPr algn="ctr"/>
-          </a:p>
-        </p:txBody>
-      </p:sp>
-      <p:sp>
-        <p:nvSpPr>
-          <p:cNvPr id="15" name="TextBox 14"/>
-          <p:cNvSpPr txBox="1"/>
-          <p:nvPr/>
-        </p:nvSpPr>
-        <p:spPr>
-          <a:xfrm>
-            <a:off x="4727448" y="1572768"/>
-            <a:ext cx="1508760" cy="566928"/>
-          </a:xfrm>
-          <a:prstGeom prst="rect">
-            <a:avLst/>
-          </a:prstGeom>
-          <a:noFill/>
-        </p:spPr>
-        <p:txBody>
-          <a:bodyPr wrap="square" anchor="t" lIns="36576" tIns="27432" rIns="36576" bIns="27432">
-            <a:spAutoFit/>
-          </a:bodyPr>
-          <a:lstStyle/>
-          <a:p>
-            <a:pPr algn="l">
-              <a:lnSpc>
-                <a:spcPct val="115000"/>
-              </a:lnSpc>
-            </a:pPr>
-            <a:r>
-              <a:rPr sz="3000" b="1">
-                <a:solidFill>
-                  <a:srgbClr val="2F5D4E"/>
-                </a:solidFill>
-                <a:latin typeface="Microsoft YaHei"/>
-              </a:rPr>
-              <a:t>0</a:t>
-            </a:r>
-          </a:p>
-        </p:txBody>
-      </p:sp>
-      <p:sp>
-        <p:nvSpPr>
-          <p:cNvPr id="16" name="TextBox 15"/>
-          <p:cNvSpPr txBox="1"/>
-          <p:nvPr/>
-        </p:nvSpPr>
-        <p:spPr>
-          <a:xfrm>
-            <a:off x="4727448" y="2167128"/>
-            <a:ext cx="1508760" cy="274320"/>
-          </a:xfrm>
-          <a:prstGeom prst="rect">
-            <a:avLst/>
-          </a:prstGeom>
-          <a:noFill/>
-        </p:spPr>
-        <p:txBody>
-          <a:bodyPr wrap="square" anchor="t" lIns="36576" tIns="27432" rIns="36576" bIns="27432">
-            <a:spAutoFit/>
-          </a:bodyPr>
-          <a:lstStyle/>
-          <a:p>
-            <a:pPr algn="l">
-              <a:lnSpc>
-                <a:spcPct val="115000"/>
-              </a:lnSpc>
-            </a:pPr>
-            <a:r>
-              <a:rPr sz="1050" b="0">
-                <a:solidFill>
-                  <a:srgbClr val="6C756F"/>
-                </a:solidFill>
-                <a:latin typeface="Microsoft YaHei"/>
-              </a:rPr>
-              <a:t>失败项</a:t>
-            </a:r>
-          </a:p>
-        </p:txBody>
-      </p:sp>
-      <p:sp>
-        <p:nvSpPr>
-          <p:cNvPr id="17" name="Rounded Rectangle 16"/>
-          <p:cNvSpPr/>
-          <p:nvPr/>
-        </p:nvSpPr>
-        <p:spPr>
-          <a:xfrm>
-            <a:off x="658368" y="3017520"/>
-            <a:ext cx="5486400" cy="2194560"/>
-          </a:xfrm>
-          <a:prstGeom prst="roundRect">
-            <a:avLst>
-              <a:gd name="adj" fmla="val 6000"/>
-            </a:avLst>
-          </a:prstGeom>
-          <a:solidFill>
-            <a:srgbClr val="224339"/>
-          </a:solidFill>
-          <a:ln>
-            <a:noFill/>
-          </a:ln>
-        </p:spPr>
-        <p:style>
-          <a:lnRef idx="1">
-            <a:schemeClr val="accent1"/>
-          </a:lnRef>
-          <a:fillRef idx="3">
-            <a:schemeClr val="accent1"/>
-          </a:fillRef>
-          <a:effectRef idx="2">
-            <a:schemeClr val="accent1"/>
-          </a:effectRef>
-          <a:fontRef idx="minor">
-            <a:schemeClr val="lt1"/>
-          </a:fontRef>
-        </p:style>
-        <p:txBody>
-          <a:bodyPr rtlCol="0" anchor="ctr"/>
-          <a:lstStyle/>
-          <a:p>
-            <a:pPr algn="ctr"/>
-          </a:p>
-        </p:txBody>
-      </p:sp>
-      <p:sp>
-        <p:nvSpPr>
-          <p:cNvPr id="18" name="TextBox 17"/>
-          <p:cNvSpPr txBox="1"/>
-          <p:nvPr/>
-        </p:nvSpPr>
-        <p:spPr>
-          <a:xfrm>
-            <a:off x="804672" y="3127248"/>
-            <a:ext cx="5193792" cy="1975104"/>
-          </a:xfrm>
-          <a:prstGeom prst="rect">
-            <a:avLst/>
-          </a:prstGeom>
-          <a:noFill/>
-        </p:spPr>
-        <p:txBody>
-          <a:bodyPr wrap="square" anchor="t" lIns="36576" tIns="27432" rIns="36576" bIns="27432">
-            <a:spAutoFit/>
-          </a:bodyPr>
-          <a:lstStyle/>
-          <a:p>
-            <a:pPr algn="l">
-              <a:lnSpc>
-                <a:spcPct val="110000"/>
-              </a:lnSpc>
-            </a:pPr>
-            <a:r>
-              <a:rPr sz="1050" b="0">
-                <a:solidFill>
-                  <a:srgbClr val="ECF2EA"/>
-                </a:solidFill>
-                <a:latin typeface="Consolas"/>
-              </a:rPr>
-              <a:t>.venv/Scripts/python.exe -m pytest -q</a:t>
-            </a:r>
-          </a:p>
-          <a:p>
-            <a:pPr algn="l">
-              <a:lnSpc>
-                <a:spcPct val="110000"/>
-              </a:lnSpc>
-            </a:pPr>
-            <a:r>
-              <a:rPr sz="1050" b="0">
-                <a:solidFill>
-                  <a:srgbClr val="ECF2EA"/>
-                </a:solidFill>
-                <a:latin typeface="Consolas"/>
-              </a:rPr>
-              <a:t># 135 unit + 96 integration</a:t>
-            </a:r>
-          </a:p>
-          <a:p>
-            <a:pPr algn="l">
-              <a:lnSpc>
-                <a:spcPct val="110000"/>
-              </a:lnSpc>
-            </a:pPr>
-            <a:r>
-              <a:rPr sz="1050" b="0">
-                <a:solidFill>
-                  <a:srgbClr val="ECF2EA"/>
-                </a:solidFill>
-                <a:latin typeface="Consolas"/>
-              </a:rPr>
-              <a:t/>
-            </a:r>
-          </a:p>
-          <a:p>
-            <a:pPr algn="l">
-              <a:lnSpc>
-                <a:spcPct val="110000"/>
-              </a:lnSpc>
-            </a:pPr>
-            <a:r>
-              <a:rPr sz="1050" b="0">
-                <a:solidFill>
-                  <a:srgbClr val="ECF2EA"/>
-                </a:solidFill>
-                <a:latin typeface="Consolas"/>
-              </a:rPr>
-              <a:t>.venv/Scripts/python.exe scripts/verify.py \</a:t>
-            </a:r>
-          </a:p>
-          <a:p>
-            <a:pPr algn="l">
-              <a:lnSpc>
-                <a:spcPct val="110000"/>
-              </a:lnSpc>
-            </a:pPr>
-            <a:r>
-              <a:rPr sz="1050" b="0">
-                <a:solidFill>
-                  <a:srgbClr val="ECF2EA"/>
-                </a:solidFill>
-                <a:latin typeface="Consolas"/>
-              </a:rPr>
-              <a:t>  --json data/verification/report.json</a:t>
-            </a:r>
-          </a:p>
-        </p:txBody>
-      </p:sp>
-      <p:sp>
-        <p:nvSpPr>
-          <p:cNvPr id="19" name="TextBox 18"/>
-          <p:cNvSpPr txBox="1"/>
-          <p:nvPr/>
-        </p:nvSpPr>
-        <p:spPr>
-          <a:xfrm>
-            <a:off x="822960" y="5285232"/>
-            <a:ext cx="5120640" cy="685800"/>
-          </a:xfrm>
-          <a:prstGeom prst="rect">
-            <a:avLst/>
-          </a:prstGeom>
-          <a:noFill/>
-        </p:spPr>
-        <p:txBody>
-          <a:bodyPr wrap="square" anchor="t" lIns="36576" tIns="27432" rIns="36576" bIns="27432">
-            <a:spAutoFit/>
-          </a:bodyPr>
-          <a:lstStyle/>
-          <a:p>
-            <a:pPr algn="l">
-              <a:lnSpc>
-                <a:spcPct val="115000"/>
-              </a:lnSpc>
-            </a:pPr>
-            <a:r>
-              <a:rPr sz="1150" b="0">
-                <a:solidFill>
-                  <a:srgbClr val="2F5D4E"/>
-                </a:solidFill>
-                <a:latin typeface="Microsoft YaHei"/>
-              </a:rPr>
-              <a:t>输出：38/38 PASS，0 FAIL，约 1–4 秒</a:t>
-            </a:r>
-          </a:p>
-          <a:p>
-            <a:pPr algn="l">
-              <a:lnSpc>
-                <a:spcPct val="115000"/>
-              </a:lnSpc>
-            </a:pPr>
-            <a:r>
-              <a:rPr sz="1150" b="0">
-                <a:solidFill>
-                  <a:srgbClr val="2F5D4E"/>
-                </a:solidFill>
-                <a:latin typeface="Microsoft YaHei"/>
-              </a:rPr>
-              <a:t>所有写入检查在结束时整体回滚。</a:t>
-            </a:r>
-          </a:p>
-        </p:txBody>
-      </p:sp>
-      <p:sp>
-        <p:nvSpPr>
-          <p:cNvPr id="20" name="Rounded Rectangle 19"/>
-          <p:cNvSpPr/>
-          <p:nvPr/>
-        </p:nvSpPr>
-        <p:spPr>
-          <a:xfrm>
-            <a:off x="6492240" y="1481328"/>
-            <a:ext cx="5029200" cy="493776"/>
-          </a:xfrm>
-          <a:prstGeom prst="roundRect">
-            <a:avLst>
-              <a:gd name="adj" fmla="val 6000"/>
-            </a:avLst>
-          </a:prstGeom>
-          <a:solidFill>
-            <a:srgbClr val="ECE7DA"/>
-          </a:solidFill>
-          <a:ln w="7620">
-            <a:solidFill>
-              <a:srgbClr val="D8D1C0"/>
-            </a:solidFill>
-          </a:ln>
-        </p:spPr>
-        <p:style>
-          <a:lnRef idx="1">
-            <a:schemeClr val="accent1"/>
-          </a:lnRef>
-          <a:fillRef idx="3">
-            <a:schemeClr val="accent1"/>
-          </a:fillRef>
-          <a:effectRef idx="2">
-            <a:schemeClr val="accent1"/>
-          </a:effectRef>
-          <a:fontRef idx="minor">
-            <a:schemeClr val="lt1"/>
-          </a:fontRef>
-        </p:style>
-        <p:txBody>
-          <a:bodyPr rtlCol="0" anchor="ctr"/>
-          <a:lstStyle/>
-          <a:p>
-            <a:pPr algn="ctr"/>
-          </a:p>
-        </p:txBody>
-      </p:sp>
-      <p:sp>
-        <p:nvSpPr>
-          <p:cNvPr id="21" name="TextBox 20"/>
-          <p:cNvSpPr txBox="1"/>
-          <p:nvPr/>
-        </p:nvSpPr>
-        <p:spPr>
-          <a:xfrm>
-            <a:off x="6656832" y="1581912"/>
-            <a:ext cx="4709160" cy="274320"/>
-          </a:xfrm>
-          <a:prstGeom prst="rect">
-            <a:avLst/>
-          </a:prstGeom>
-          <a:noFill/>
-        </p:spPr>
-        <p:txBody>
-          <a:bodyPr wrap="square" anchor="t" lIns="36576" tIns="27432" rIns="36576" bIns="27432">
-            <a:spAutoFit/>
-          </a:bodyPr>
-          <a:lstStyle/>
-          <a:p>
-            <a:pPr algn="l">
-              <a:lnSpc>
-                <a:spcPct val="115000"/>
-              </a:lnSpc>
-            </a:pPr>
-            <a:r>
-              <a:rPr sz="1050" b="0">
-                <a:solidFill>
-                  <a:srgbClr val="1F2A24"/>
-                </a:solidFill>
-                <a:latin typeface="Microsoft YaHei"/>
-              </a:rPr>
-              <a:t>✓  Schema：表、FK、UNIQUE、CHECK、索引、触发器</a:t>
-            </a:r>
-          </a:p>
-        </p:txBody>
-      </p:sp>
-      <p:sp>
-        <p:nvSpPr>
-          <p:cNvPr id="22" name="Rounded Rectangle 21"/>
-          <p:cNvSpPr/>
-          <p:nvPr/>
-        </p:nvSpPr>
-        <p:spPr>
-          <a:xfrm>
-            <a:off x="6492240" y="2103120"/>
-            <a:ext cx="5029200" cy="493776"/>
-          </a:xfrm>
-          <a:prstGeom prst="roundRect">
-            <a:avLst>
-              <a:gd name="adj" fmla="val 6000"/>
-            </a:avLst>
-          </a:prstGeom>
-          <a:solidFill>
-            <a:srgbClr val="FFFFFF"/>
-          </a:solidFill>
-          <a:ln w="7620">
-            <a:solidFill>
-              <a:srgbClr val="D8D1C0"/>
-            </a:solidFill>
-          </a:ln>
-        </p:spPr>
-        <p:style>
-          <a:lnRef idx="1">
-            <a:schemeClr val="accent1"/>
-          </a:lnRef>
-          <a:fillRef idx="3">
-            <a:schemeClr val="accent1"/>
-          </a:fillRef>
-          <a:effectRef idx="2">
-            <a:schemeClr val="accent1"/>
-          </a:effectRef>
-          <a:fontRef idx="minor">
-            <a:schemeClr val="lt1"/>
-          </a:fontRef>
-        </p:style>
-        <p:txBody>
-          <a:bodyPr rtlCol="0" anchor="ctr"/>
-          <a:lstStyle/>
-          <a:p>
-            <a:pPr algn="ctr"/>
-          </a:p>
-        </p:txBody>
-      </p:sp>
-      <p:sp>
-        <p:nvSpPr>
-          <p:cNvPr id="23" name="TextBox 22"/>
-          <p:cNvSpPr txBox="1"/>
-          <p:nvPr/>
-        </p:nvSpPr>
-        <p:spPr>
-          <a:xfrm>
-            <a:off x="6656832" y="2203704"/>
-            <a:ext cx="4709160" cy="274320"/>
-          </a:xfrm>
-          <a:prstGeom prst="rect">
-            <a:avLst/>
-          </a:prstGeom>
-          <a:noFill/>
-        </p:spPr>
-        <p:txBody>
-          <a:bodyPr wrap="square" anchor="t" lIns="36576" tIns="27432" rIns="36576" bIns="27432">
-            <a:spAutoFit/>
-          </a:bodyPr>
-          <a:lstStyle/>
-          <a:p>
-            <a:pPr algn="l">
-              <a:lnSpc>
-                <a:spcPct val="115000"/>
-              </a:lnSpc>
-            </a:pPr>
-            <a:r>
-              <a:rPr sz="1050" b="0">
-                <a:solidFill>
-                  <a:srgbClr val="1F2A24"/>
-                </a:solidFill>
-                <a:latin typeface="Microsoft YaHei"/>
-              </a:rPr>
-              <a:t>✓  权限：alice / bob / viewer / admin 边界</a:t>
-            </a:r>
-          </a:p>
-        </p:txBody>
-      </p:sp>
-      <p:sp>
-        <p:nvSpPr>
-          <p:cNvPr id="24" name="Rounded Rectangle 23"/>
-          <p:cNvSpPr/>
-          <p:nvPr/>
-        </p:nvSpPr>
-        <p:spPr>
-          <a:xfrm>
-            <a:off x="6492240" y="2724912"/>
-            <a:ext cx="5029200" cy="493776"/>
-          </a:xfrm>
-          <a:prstGeom prst="roundRect">
-            <a:avLst>
-              <a:gd name="adj" fmla="val 6000"/>
-            </a:avLst>
-          </a:prstGeom>
-          <a:solidFill>
-            <a:srgbClr val="ECE7DA"/>
-          </a:solidFill>
-          <a:ln w="7620">
-            <a:solidFill>
-              <a:srgbClr val="D8D1C0"/>
-            </a:solidFill>
-          </a:ln>
-        </p:spPr>
-        <p:style>
-          <a:lnRef idx="1">
-            <a:schemeClr val="accent1"/>
-          </a:lnRef>
-          <a:fillRef idx="3">
-            <a:schemeClr val="accent1"/>
-          </a:fillRef>
-          <a:effectRef idx="2">
-            <a:schemeClr val="accent1"/>
-          </a:effectRef>
-          <a:fontRef idx="minor">
-            <a:schemeClr val="lt1"/>
-          </a:fontRef>
-        </p:style>
-        <p:txBody>
-          <a:bodyPr rtlCol="0" anchor="ctr"/>
-          <a:lstStyle/>
-          <a:p>
-            <a:pPr algn="ctr"/>
-          </a:p>
-        </p:txBody>
-      </p:sp>
-      <p:sp>
-        <p:nvSpPr>
-          <p:cNvPr id="25" name="TextBox 24"/>
-          <p:cNvSpPr txBox="1"/>
-          <p:nvPr/>
-        </p:nvSpPr>
-        <p:spPr>
-          <a:xfrm>
-            <a:off x="6656832" y="2825496"/>
-            <a:ext cx="4709160" cy="274320"/>
-          </a:xfrm>
-          <a:prstGeom prst="rect">
-            <a:avLst/>
-          </a:prstGeom>
-          <a:noFill/>
-        </p:spPr>
-        <p:txBody>
-          <a:bodyPr wrap="square" anchor="t" lIns="36576" tIns="27432" rIns="36576" bIns="27432">
-            <a:spAutoFit/>
-          </a:bodyPr>
-          <a:lstStyle/>
-          <a:p>
-            <a:pPr algn="l">
-              <a:lnSpc>
-                <a:spcPct val="115000"/>
-              </a:lnSpc>
-            </a:pPr>
-            <a:r>
-              <a:rPr sz="1050" b="0">
-                <a:solidFill>
-                  <a:srgbClr val="1F2A24"/>
-                </a:solidFill>
-                <a:latin typeface="Microsoft YaHei"/>
-              </a:rPr>
-              <a:t>✓  导入：幂等、重复、损坏文件、平台适配</a:t>
-            </a:r>
-          </a:p>
-        </p:txBody>
-      </p:sp>
-      <p:sp>
-        <p:nvSpPr>
-          <p:cNvPr id="26" name="Rounded Rectangle 25"/>
-          <p:cNvSpPr/>
-          <p:nvPr/>
-        </p:nvSpPr>
-        <p:spPr>
-          <a:xfrm>
-            <a:off x="6492240" y="3346704"/>
-            <a:ext cx="5029200" cy="493776"/>
-          </a:xfrm>
-          <a:prstGeom prst="roundRect">
-            <a:avLst>
-              <a:gd name="adj" fmla="val 6000"/>
-            </a:avLst>
-          </a:prstGeom>
-          <a:solidFill>
-            <a:srgbClr val="FFFFFF"/>
-          </a:solidFill>
-          <a:ln w="7620">
-            <a:solidFill>
-              <a:srgbClr val="D8D1C0"/>
-            </a:solidFill>
-          </a:ln>
-        </p:spPr>
-        <p:style>
-          <a:lnRef idx="1">
-            <a:schemeClr val="accent1"/>
-          </a:lnRef>
-          <a:fillRef idx="3">
-            <a:schemeClr val="accent1"/>
-          </a:fillRef>
-          <a:effectRef idx="2">
-            <a:schemeClr val="accent1"/>
-          </a:effectRef>
-          <a:fontRef idx="minor">
-            <a:schemeClr val="lt1"/>
-          </a:fontRef>
-        </p:style>
-        <p:txBody>
-          <a:bodyPr rtlCol="0" anchor="ctr"/>
-          <a:lstStyle/>
-          <a:p>
-            <a:pPr algn="ctr"/>
-          </a:p>
-        </p:txBody>
-      </p:sp>
-      <p:sp>
-        <p:nvSpPr>
-          <p:cNvPr id="27" name="TextBox 26"/>
-          <p:cNvSpPr txBox="1"/>
-          <p:nvPr/>
-        </p:nvSpPr>
-        <p:spPr>
-          <a:xfrm>
-            <a:off x="6656832" y="3447288"/>
-            <a:ext cx="4709160" cy="274320"/>
-          </a:xfrm>
-          <a:prstGeom prst="rect">
-            <a:avLst/>
-          </a:prstGeom>
-          <a:noFill/>
-        </p:spPr>
-        <p:txBody>
-          <a:bodyPr wrap="square" anchor="t" lIns="36576" tIns="27432" rIns="36576" bIns="27432">
-            <a:spAutoFit/>
-          </a:bodyPr>
-          <a:lstStyle/>
-          <a:p>
-            <a:pPr algn="l">
-              <a:lnSpc>
-                <a:spcPct val="115000"/>
-              </a:lnSpc>
-            </a:pPr>
-            <a:r>
-              <a:rPr sz="1050" b="0">
-                <a:solidFill>
-                  <a:srgbClr val="1F2A24"/>
-                </a:solidFill>
-                <a:latin typeface="Microsoft YaHei"/>
-              </a:rPr>
-              <a:t>✓  检索：关键词、课程、标签、全局搜索、混合检索、AI 建议</a:t>
-            </a:r>
-          </a:p>
-        </p:txBody>
-      </p:sp>
-      <p:sp>
-        <p:nvSpPr>
-          <p:cNvPr id="28" name="Rounded Rectangle 27"/>
-          <p:cNvSpPr/>
-          <p:nvPr/>
-        </p:nvSpPr>
-        <p:spPr>
-          <a:xfrm>
-            <a:off x="6492240" y="3968496"/>
-            <a:ext cx="5029200" cy="493776"/>
-          </a:xfrm>
-          <a:prstGeom prst="roundRect">
-            <a:avLst>
-              <a:gd name="adj" fmla="val 6000"/>
-            </a:avLst>
-          </a:prstGeom>
-          <a:solidFill>
-            <a:srgbClr val="ECE7DA"/>
-          </a:solidFill>
-          <a:ln w="7620">
-            <a:solidFill>
-              <a:srgbClr val="D8D1C0"/>
-            </a:solidFill>
-          </a:ln>
-        </p:spPr>
-        <p:style>
-          <a:lnRef idx="1">
-            <a:schemeClr val="accent1"/>
-          </a:lnRef>
-          <a:fillRef idx="3">
-            <a:schemeClr val="accent1"/>
-          </a:fillRef>
-          <a:effectRef idx="2">
-            <a:schemeClr val="accent1"/>
-          </a:effectRef>
-          <a:fontRef idx="minor">
-            <a:schemeClr val="lt1"/>
-          </a:fontRef>
-        </p:style>
-        <p:txBody>
-          <a:bodyPr rtlCol="0" anchor="ctr"/>
-          <a:lstStyle/>
-          <a:p>
-            <a:pPr algn="ctr"/>
-          </a:p>
-        </p:txBody>
-      </p:sp>
-      <p:sp>
-        <p:nvSpPr>
-          <p:cNvPr id="29" name="TextBox 28"/>
-          <p:cNvSpPr txBox="1"/>
-          <p:nvPr/>
-        </p:nvSpPr>
-        <p:spPr>
-          <a:xfrm>
-            <a:off x="6656832" y="4069080"/>
-            <a:ext cx="4709160" cy="274320"/>
-          </a:xfrm>
-          <a:prstGeom prst="rect">
-            <a:avLst/>
-          </a:prstGeom>
-          <a:noFill/>
-        </p:spPr>
-        <p:txBody>
-          <a:bodyPr wrap="square" anchor="t" lIns="36576" tIns="27432" rIns="36576" bIns="27432">
-            <a:spAutoFit/>
-          </a:bodyPr>
-          <a:lstStyle/>
-          <a:p>
-            <a:pPr algn="l">
-              <a:lnSpc>
-                <a:spcPct val="115000"/>
-              </a:lnSpc>
-            </a:pPr>
-            <a:r>
-              <a:rPr sz="1050" b="0">
-                <a:solidFill>
-                  <a:srgbClr val="1F2A24"/>
-                </a:solidFill>
-                <a:latin typeface="Microsoft YaHei"/>
-              </a:rPr>
-              <a:t>✓  统计：种子数据下的计数与排名</a:t>
-            </a:r>
-          </a:p>
-        </p:txBody>
-      </p:sp>
-      <p:sp>
-        <p:nvSpPr>
-          <p:cNvPr id="30" name="Rounded Rectangle 29"/>
-          <p:cNvSpPr/>
-          <p:nvPr/>
-        </p:nvSpPr>
-        <p:spPr>
-          <a:xfrm>
-            <a:off x="6492240" y="4590288"/>
-            <a:ext cx="5029200" cy="493776"/>
-          </a:xfrm>
-          <a:prstGeom prst="roundRect">
-            <a:avLst>
-              <a:gd name="adj" fmla="val 6000"/>
-            </a:avLst>
-          </a:prstGeom>
-          <a:solidFill>
-            <a:srgbClr val="FFFFFF"/>
-          </a:solidFill>
-          <a:ln w="7620">
-            <a:solidFill>
-              <a:srgbClr val="D8D1C0"/>
-            </a:solidFill>
-          </a:ln>
-        </p:spPr>
-        <p:style>
-          <a:lnRef idx="1">
-            <a:schemeClr val="accent1"/>
-          </a:lnRef>
-          <a:fillRef idx="3">
-            <a:schemeClr val="accent1"/>
-          </a:fillRef>
-          <a:effectRef idx="2">
-            <a:schemeClr val="accent1"/>
-          </a:effectRef>
-          <a:fontRef idx="minor">
-            <a:schemeClr val="lt1"/>
-          </a:fontRef>
-        </p:style>
-        <p:txBody>
-          <a:bodyPr rtlCol="0" anchor="ctr"/>
-          <a:lstStyle/>
-          <a:p>
-            <a:pPr algn="ctr"/>
-          </a:p>
-        </p:txBody>
-      </p:sp>
-      <p:sp>
-        <p:nvSpPr>
-          <p:cNvPr id="31" name="TextBox 30"/>
-          <p:cNvSpPr txBox="1"/>
-          <p:nvPr/>
-        </p:nvSpPr>
-        <p:spPr>
-          <a:xfrm>
-            <a:off x="6656832" y="4690872"/>
-            <a:ext cx="4709160" cy="274320"/>
-          </a:xfrm>
-          <a:prstGeom prst="rect">
-            <a:avLst/>
-          </a:prstGeom>
-          <a:noFill/>
-        </p:spPr>
-        <p:txBody>
-          <a:bodyPr wrap="square" anchor="t" lIns="36576" tIns="27432" rIns="36576" bIns="27432">
-            <a:spAutoFit/>
-          </a:bodyPr>
-          <a:lstStyle/>
-          <a:p>
-            <a:pPr algn="l">
-              <a:lnSpc>
-                <a:spcPct val="115000"/>
-              </a:lnSpc>
-            </a:pPr>
-            <a:r>
-              <a:rPr sz="1050" b="0">
-                <a:solidFill>
-                  <a:srgbClr val="1F2A24"/>
-                </a:solidFill>
-                <a:latin typeface="Microsoft YaHei"/>
-              </a:rPr>
-              <a:t>✓  采集：令牌哈希、限流、Bearer 幂等入库</a:t>
-            </a:r>
-          </a:p>
-        </p:txBody>
-      </p:sp>
-      <p:sp>
-        <p:nvSpPr>
-          <p:cNvPr id="32" name="Rounded Rectangle 31"/>
-          <p:cNvSpPr/>
-          <p:nvPr/>
-        </p:nvSpPr>
-        <p:spPr>
-          <a:xfrm>
-            <a:off x="6492240" y="5212080"/>
-            <a:ext cx="5029200" cy="493776"/>
-          </a:xfrm>
-          <a:prstGeom prst="roundRect">
-            <a:avLst>
-              <a:gd name="adj" fmla="val 6000"/>
-            </a:avLst>
-          </a:prstGeom>
-          <a:solidFill>
-            <a:srgbClr val="ECE7DA"/>
-          </a:solidFill>
-          <a:ln w="7620">
-            <a:solidFill>
-              <a:srgbClr val="D8D1C0"/>
-            </a:solidFill>
-          </a:ln>
-        </p:spPr>
-        <p:style>
-          <a:lnRef idx="1">
-            <a:schemeClr val="accent1"/>
-          </a:lnRef>
-          <a:fillRef idx="3">
-            <a:schemeClr val="accent1"/>
-          </a:fillRef>
-          <a:effectRef idx="2">
-            <a:schemeClr val="accent1"/>
-          </a:effectRef>
-          <a:fontRef idx="minor">
-            <a:schemeClr val="lt1"/>
-          </a:fontRef>
-        </p:style>
-        <p:txBody>
-          <a:bodyPr rtlCol="0" anchor="ctr"/>
-          <a:lstStyle/>
-          <a:p>
-            <a:pPr algn="ctr"/>
-          </a:p>
-        </p:txBody>
-      </p:sp>
-      <p:sp>
-        <p:nvSpPr>
-          <p:cNvPr id="33" name="TextBox 32"/>
-          <p:cNvSpPr txBox="1"/>
-          <p:nvPr/>
-        </p:nvSpPr>
-        <p:spPr>
-          <a:xfrm>
-            <a:off x="6656832" y="5312664"/>
-            <a:ext cx="4709160" cy="274320"/>
-          </a:xfrm>
-          <a:prstGeom prst="rect">
-            <a:avLst/>
-          </a:prstGeom>
-          <a:noFill/>
-        </p:spPr>
-        <p:txBody>
-          <a:bodyPr wrap="square" anchor="t" lIns="36576" tIns="27432" rIns="36576" bIns="27432">
-            <a:spAutoFit/>
-          </a:bodyPr>
-          <a:lstStyle/>
-          <a:p>
-            <a:pPr algn="l">
-              <a:lnSpc>
-                <a:spcPct val="115000"/>
-              </a:lnSpc>
-            </a:pPr>
-            <a:r>
-              <a:rPr sz="1050" b="0">
-                <a:solidFill>
-                  <a:srgbClr val="1F2A24"/>
-                </a:solidFill>
-                <a:latin typeface="Microsoft YaHei"/>
-              </a:rPr>
-              <a:t>✓  Text2SQL：AST / 预检 / 金标准评测</a:t>
-            </a:r>
-          </a:p>
-        </p:txBody>
-      </p:sp>
-    </p:spTree>
-  </p:cSld>
-  <p:clrMapOvr>
-    <a:masterClrMapping/>
-  </p:clrMapOvr>
-</p:sld>
-</file>
-
 <file path=ppt/slides/slide15.xml><?xml version="1.0" encoding="utf-8"?>
 <p:sld xmlns:a="http://schemas.openxmlformats.org/drawingml/2006/main" xmlns:p="http://schemas.openxmlformats.org/presentationml/2006/main" xmlns:r="http://schemas.openxmlformats.org/officeDocument/2006/relationships">
   <p:cSld>
@@ -11103,7 +11199,7 @@
                 </a:solidFill>
                 <a:latin typeface="Microsoft YaHei"/>
               </a:rPr>
-              <a:t>14 / AI 协作</a:t>
+              <a:t>14 / 测试与验收</a:t>
             </a:r>
           </a:p>
         </p:txBody>
@@ -11142,7 +11238,7 @@
                 </a:solidFill>
                 <a:latin typeface="Microsoft YaHei"/>
               </a:rPr>
-              <a:t>哪些交给 AI，哪些必须自己判断</a:t>
+              <a:t>238 项测试与 39 项端到端验收全部通过</a:t>
             </a:r>
           </a:p>
         </p:txBody>
@@ -11225,6 +11321,1532 @@
                 <a:latin typeface="Microsoft YaHei"/>
               </a:rPr>
               <a:t>15</a:t>
+            </a:r>
+          </a:p>
+        </p:txBody>
+      </p:sp>
+      <p:sp>
+        <p:nvSpPr>
+          <p:cNvPr id="7" name="TextBox 6"/>
+          <p:cNvSpPr txBox="1"/>
+          <p:nvPr/>
+        </p:nvSpPr>
+        <p:spPr>
+          <a:xfrm>
+            <a:off x="658368" y="6455664"/>
+            <a:ext cx="6217920" cy="228600"/>
+          </a:xfrm>
+          <a:prstGeom prst="rect">
+            <a:avLst/>
+          </a:prstGeom>
+          <a:noFill/>
+        </p:spPr>
+        <p:txBody>
+          <a:bodyPr wrap="square" anchor="t" lIns="36576" tIns="27432" rIns="36576" bIns="27432">
+            <a:spAutoFit/>
+          </a:bodyPr>
+          <a:lstStyle/>
+          <a:p>
+            <a:pPr algn="l">
+              <a:lnSpc>
+                <a:spcPct val="115000"/>
+              </a:lnSpc>
+            </a:pPr>
+            <a:r>
+              <a:rPr sz="900" b="0">
+                <a:solidFill>
+                  <a:srgbClr val="6C756F"/>
+                </a:solidFill>
+                <a:latin typeface="Microsoft YaHei"/>
+              </a:rPr>
+              <a:t>个人学习空间 · 《数据库系统概论》大作业</a:t>
+            </a:r>
+          </a:p>
+        </p:txBody>
+      </p:sp>
+      <p:sp>
+        <p:nvSpPr>
+          <p:cNvPr id="8" name="Rounded Rectangle 7"/>
+          <p:cNvSpPr/>
+          <p:nvPr/>
+        </p:nvSpPr>
+        <p:spPr>
+          <a:xfrm>
+            <a:off x="658368" y="1481328"/>
+            <a:ext cx="1783080" cy="1234440"/>
+          </a:xfrm>
+          <a:prstGeom prst="roundRect">
+            <a:avLst>
+              <a:gd name="adj" fmla="val 6000"/>
+            </a:avLst>
+          </a:prstGeom>
+          <a:solidFill>
+            <a:srgbClr val="FFFFFF"/>
+          </a:solidFill>
+          <a:ln w="8890">
+            <a:solidFill>
+              <a:srgbClr val="D8D1C0"/>
+            </a:solidFill>
+          </a:ln>
+        </p:spPr>
+        <p:style>
+          <a:lnRef idx="1">
+            <a:schemeClr val="accent1"/>
+          </a:lnRef>
+          <a:fillRef idx="3">
+            <a:schemeClr val="accent1"/>
+          </a:fillRef>
+          <a:effectRef idx="2">
+            <a:schemeClr val="accent1"/>
+          </a:effectRef>
+          <a:fontRef idx="minor">
+            <a:schemeClr val="lt1"/>
+          </a:fontRef>
+        </p:style>
+        <p:txBody>
+          <a:bodyPr rtlCol="0" anchor="ctr"/>
+          <a:lstStyle/>
+          <a:p>
+            <a:pPr algn="ctr"/>
+          </a:p>
+        </p:txBody>
+      </p:sp>
+      <p:sp>
+        <p:nvSpPr>
+          <p:cNvPr id="9" name="TextBox 8"/>
+          <p:cNvSpPr txBox="1"/>
+          <p:nvPr/>
+        </p:nvSpPr>
+        <p:spPr>
+          <a:xfrm>
+            <a:off x="795528" y="1572768"/>
+            <a:ext cx="1508760" cy="566928"/>
+          </a:xfrm>
+          <a:prstGeom prst="rect">
+            <a:avLst/>
+          </a:prstGeom>
+          <a:noFill/>
+        </p:spPr>
+        <p:txBody>
+          <a:bodyPr wrap="square" anchor="t" lIns="36576" tIns="27432" rIns="36576" bIns="27432">
+            <a:spAutoFit/>
+          </a:bodyPr>
+          <a:lstStyle/>
+          <a:p>
+            <a:pPr algn="l">
+              <a:lnSpc>
+                <a:spcPct val="115000"/>
+              </a:lnSpc>
+            </a:pPr>
+            <a:r>
+              <a:rPr sz="3000" b="1">
+                <a:solidFill>
+                  <a:srgbClr val="2F5D4E"/>
+                </a:solidFill>
+                <a:latin typeface="Microsoft YaHei"/>
+              </a:rPr>
+              <a:t>238</a:t>
+            </a:r>
+          </a:p>
+        </p:txBody>
+      </p:sp>
+      <p:sp>
+        <p:nvSpPr>
+          <p:cNvPr id="10" name="TextBox 9"/>
+          <p:cNvSpPr txBox="1"/>
+          <p:nvPr/>
+        </p:nvSpPr>
+        <p:spPr>
+          <a:xfrm>
+            <a:off x="795528" y="2167128"/>
+            <a:ext cx="1508760" cy="274320"/>
+          </a:xfrm>
+          <a:prstGeom prst="rect">
+            <a:avLst/>
+          </a:prstGeom>
+          <a:noFill/>
+        </p:spPr>
+        <p:txBody>
+          <a:bodyPr wrap="square" anchor="t" lIns="36576" tIns="27432" rIns="36576" bIns="27432">
+            <a:spAutoFit/>
+          </a:bodyPr>
+          <a:lstStyle/>
+          <a:p>
+            <a:pPr algn="l">
+              <a:lnSpc>
+                <a:spcPct val="115000"/>
+              </a:lnSpc>
+            </a:pPr>
+            <a:r>
+              <a:rPr sz="1050" b="0">
+                <a:solidFill>
+                  <a:srgbClr val="6C756F"/>
+                </a:solidFill>
+                <a:latin typeface="Microsoft YaHei"/>
+              </a:rPr>
+              <a:t>自动化测试</a:t>
+            </a:r>
+          </a:p>
+        </p:txBody>
+      </p:sp>
+      <p:sp>
+        <p:nvSpPr>
+          <p:cNvPr id="11" name="Rounded Rectangle 10"/>
+          <p:cNvSpPr/>
+          <p:nvPr/>
+        </p:nvSpPr>
+        <p:spPr>
+          <a:xfrm>
+            <a:off x="2624328" y="1481328"/>
+            <a:ext cx="1783080" cy="1234440"/>
+          </a:xfrm>
+          <a:prstGeom prst="roundRect">
+            <a:avLst>
+              <a:gd name="adj" fmla="val 6000"/>
+            </a:avLst>
+          </a:prstGeom>
+          <a:solidFill>
+            <a:srgbClr val="FFFFFF"/>
+          </a:solidFill>
+          <a:ln w="8890">
+            <a:solidFill>
+              <a:srgbClr val="D8D1C0"/>
+            </a:solidFill>
+          </a:ln>
+        </p:spPr>
+        <p:style>
+          <a:lnRef idx="1">
+            <a:schemeClr val="accent1"/>
+          </a:lnRef>
+          <a:fillRef idx="3">
+            <a:schemeClr val="accent1"/>
+          </a:fillRef>
+          <a:effectRef idx="2">
+            <a:schemeClr val="accent1"/>
+          </a:effectRef>
+          <a:fontRef idx="minor">
+            <a:schemeClr val="lt1"/>
+          </a:fontRef>
+        </p:style>
+        <p:txBody>
+          <a:bodyPr rtlCol="0" anchor="ctr"/>
+          <a:lstStyle/>
+          <a:p>
+            <a:pPr algn="ctr"/>
+          </a:p>
+        </p:txBody>
+      </p:sp>
+      <p:sp>
+        <p:nvSpPr>
+          <p:cNvPr id="12" name="TextBox 11"/>
+          <p:cNvSpPr txBox="1"/>
+          <p:nvPr/>
+        </p:nvSpPr>
+        <p:spPr>
+          <a:xfrm>
+            <a:off x="2761488" y="1572768"/>
+            <a:ext cx="1508760" cy="566928"/>
+          </a:xfrm>
+          <a:prstGeom prst="rect">
+            <a:avLst/>
+          </a:prstGeom>
+          <a:noFill/>
+        </p:spPr>
+        <p:txBody>
+          <a:bodyPr wrap="square" anchor="t" lIns="36576" tIns="27432" rIns="36576" bIns="27432">
+            <a:spAutoFit/>
+          </a:bodyPr>
+          <a:lstStyle/>
+          <a:p>
+            <a:pPr algn="l">
+              <a:lnSpc>
+                <a:spcPct val="115000"/>
+              </a:lnSpc>
+            </a:pPr>
+            <a:r>
+              <a:rPr sz="3000" b="1">
+                <a:solidFill>
+                  <a:srgbClr val="2F5D4E"/>
+                </a:solidFill>
+                <a:latin typeface="Microsoft YaHei"/>
+              </a:rPr>
+              <a:t>39</a:t>
+            </a:r>
+          </a:p>
+        </p:txBody>
+      </p:sp>
+      <p:sp>
+        <p:nvSpPr>
+          <p:cNvPr id="13" name="TextBox 12"/>
+          <p:cNvSpPr txBox="1"/>
+          <p:nvPr/>
+        </p:nvSpPr>
+        <p:spPr>
+          <a:xfrm>
+            <a:off x="2761488" y="2167128"/>
+            <a:ext cx="1508760" cy="274320"/>
+          </a:xfrm>
+          <a:prstGeom prst="rect">
+            <a:avLst/>
+          </a:prstGeom>
+          <a:noFill/>
+        </p:spPr>
+        <p:txBody>
+          <a:bodyPr wrap="square" anchor="t" lIns="36576" tIns="27432" rIns="36576" bIns="27432">
+            <a:spAutoFit/>
+          </a:bodyPr>
+          <a:lstStyle/>
+          <a:p>
+            <a:pPr algn="l">
+              <a:lnSpc>
+                <a:spcPct val="115000"/>
+              </a:lnSpc>
+            </a:pPr>
+            <a:r>
+              <a:rPr sz="1050" b="0">
+                <a:solidFill>
+                  <a:srgbClr val="6C756F"/>
+                </a:solidFill>
+                <a:latin typeface="Microsoft YaHei"/>
+              </a:rPr>
+              <a:t>端到端检查</a:t>
+            </a:r>
+          </a:p>
+        </p:txBody>
+      </p:sp>
+      <p:sp>
+        <p:nvSpPr>
+          <p:cNvPr id="14" name="Rounded Rectangle 13"/>
+          <p:cNvSpPr/>
+          <p:nvPr/>
+        </p:nvSpPr>
+        <p:spPr>
+          <a:xfrm>
+            <a:off x="4590288" y="1481328"/>
+            <a:ext cx="1783080" cy="1234440"/>
+          </a:xfrm>
+          <a:prstGeom prst="roundRect">
+            <a:avLst>
+              <a:gd name="adj" fmla="val 6000"/>
+            </a:avLst>
+          </a:prstGeom>
+          <a:solidFill>
+            <a:srgbClr val="FFFFFF"/>
+          </a:solidFill>
+          <a:ln w="8890">
+            <a:solidFill>
+              <a:srgbClr val="D8D1C0"/>
+            </a:solidFill>
+          </a:ln>
+        </p:spPr>
+        <p:style>
+          <a:lnRef idx="1">
+            <a:schemeClr val="accent1"/>
+          </a:lnRef>
+          <a:fillRef idx="3">
+            <a:schemeClr val="accent1"/>
+          </a:fillRef>
+          <a:effectRef idx="2">
+            <a:schemeClr val="accent1"/>
+          </a:effectRef>
+          <a:fontRef idx="minor">
+            <a:schemeClr val="lt1"/>
+          </a:fontRef>
+        </p:style>
+        <p:txBody>
+          <a:bodyPr rtlCol="0" anchor="ctr"/>
+          <a:lstStyle/>
+          <a:p>
+            <a:pPr algn="ctr"/>
+          </a:p>
+        </p:txBody>
+      </p:sp>
+      <p:sp>
+        <p:nvSpPr>
+          <p:cNvPr id="15" name="TextBox 14"/>
+          <p:cNvSpPr txBox="1"/>
+          <p:nvPr/>
+        </p:nvSpPr>
+        <p:spPr>
+          <a:xfrm>
+            <a:off x="4727448" y="1572768"/>
+            <a:ext cx="1508760" cy="566928"/>
+          </a:xfrm>
+          <a:prstGeom prst="rect">
+            <a:avLst/>
+          </a:prstGeom>
+          <a:noFill/>
+        </p:spPr>
+        <p:txBody>
+          <a:bodyPr wrap="square" anchor="t" lIns="36576" tIns="27432" rIns="36576" bIns="27432">
+            <a:spAutoFit/>
+          </a:bodyPr>
+          <a:lstStyle/>
+          <a:p>
+            <a:pPr algn="l">
+              <a:lnSpc>
+                <a:spcPct val="115000"/>
+              </a:lnSpc>
+            </a:pPr>
+            <a:r>
+              <a:rPr sz="3000" b="1">
+                <a:solidFill>
+                  <a:srgbClr val="2F5D4E"/>
+                </a:solidFill>
+                <a:latin typeface="Microsoft YaHei"/>
+              </a:rPr>
+              <a:t>0</a:t>
+            </a:r>
+          </a:p>
+        </p:txBody>
+      </p:sp>
+      <p:sp>
+        <p:nvSpPr>
+          <p:cNvPr id="16" name="TextBox 15"/>
+          <p:cNvSpPr txBox="1"/>
+          <p:nvPr/>
+        </p:nvSpPr>
+        <p:spPr>
+          <a:xfrm>
+            <a:off x="4727448" y="2167128"/>
+            <a:ext cx="1508760" cy="274320"/>
+          </a:xfrm>
+          <a:prstGeom prst="rect">
+            <a:avLst/>
+          </a:prstGeom>
+          <a:noFill/>
+        </p:spPr>
+        <p:txBody>
+          <a:bodyPr wrap="square" anchor="t" lIns="36576" tIns="27432" rIns="36576" bIns="27432">
+            <a:spAutoFit/>
+          </a:bodyPr>
+          <a:lstStyle/>
+          <a:p>
+            <a:pPr algn="l">
+              <a:lnSpc>
+                <a:spcPct val="115000"/>
+              </a:lnSpc>
+            </a:pPr>
+            <a:r>
+              <a:rPr sz="1050" b="0">
+                <a:solidFill>
+                  <a:srgbClr val="6C756F"/>
+                </a:solidFill>
+                <a:latin typeface="Microsoft YaHei"/>
+              </a:rPr>
+              <a:t>失败项</a:t>
+            </a:r>
+          </a:p>
+        </p:txBody>
+      </p:sp>
+      <p:sp>
+        <p:nvSpPr>
+          <p:cNvPr id="17" name="Rounded Rectangle 16"/>
+          <p:cNvSpPr/>
+          <p:nvPr/>
+        </p:nvSpPr>
+        <p:spPr>
+          <a:xfrm>
+            <a:off x="658368" y="3017520"/>
+            <a:ext cx="5486400" cy="2194560"/>
+          </a:xfrm>
+          <a:prstGeom prst="roundRect">
+            <a:avLst>
+              <a:gd name="adj" fmla="val 6000"/>
+            </a:avLst>
+          </a:prstGeom>
+          <a:solidFill>
+            <a:srgbClr val="224339"/>
+          </a:solidFill>
+          <a:ln>
+            <a:noFill/>
+          </a:ln>
+        </p:spPr>
+        <p:style>
+          <a:lnRef idx="1">
+            <a:schemeClr val="accent1"/>
+          </a:lnRef>
+          <a:fillRef idx="3">
+            <a:schemeClr val="accent1"/>
+          </a:fillRef>
+          <a:effectRef idx="2">
+            <a:schemeClr val="accent1"/>
+          </a:effectRef>
+          <a:fontRef idx="minor">
+            <a:schemeClr val="lt1"/>
+          </a:fontRef>
+        </p:style>
+        <p:txBody>
+          <a:bodyPr rtlCol="0" anchor="ctr"/>
+          <a:lstStyle/>
+          <a:p>
+            <a:pPr algn="ctr"/>
+          </a:p>
+        </p:txBody>
+      </p:sp>
+      <p:sp>
+        <p:nvSpPr>
+          <p:cNvPr id="18" name="TextBox 17"/>
+          <p:cNvSpPr txBox="1"/>
+          <p:nvPr/>
+        </p:nvSpPr>
+        <p:spPr>
+          <a:xfrm>
+            <a:off x="804672" y="3127248"/>
+            <a:ext cx="5193792" cy="1975104"/>
+          </a:xfrm>
+          <a:prstGeom prst="rect">
+            <a:avLst/>
+          </a:prstGeom>
+          <a:noFill/>
+        </p:spPr>
+        <p:txBody>
+          <a:bodyPr wrap="square" anchor="t" lIns="36576" tIns="27432" rIns="36576" bIns="27432">
+            <a:spAutoFit/>
+          </a:bodyPr>
+          <a:lstStyle/>
+          <a:p>
+            <a:pPr algn="l">
+              <a:lnSpc>
+                <a:spcPct val="110000"/>
+              </a:lnSpc>
+            </a:pPr>
+            <a:r>
+              <a:rPr sz="1050" b="0">
+                <a:solidFill>
+                  <a:srgbClr val="ECF2EA"/>
+                </a:solidFill>
+                <a:latin typeface="Consolas"/>
+              </a:rPr>
+              <a:t>.venv/Scripts/python.exe -m pytest -q</a:t>
+            </a:r>
+          </a:p>
+          <a:p>
+            <a:pPr algn="l">
+              <a:lnSpc>
+                <a:spcPct val="110000"/>
+              </a:lnSpc>
+            </a:pPr>
+            <a:r>
+              <a:rPr sz="1050" b="0">
+                <a:solidFill>
+                  <a:srgbClr val="ECF2EA"/>
+                </a:solidFill>
+                <a:latin typeface="Consolas"/>
+              </a:rPr>
+              <a:t># 137 unit + 101 integration</a:t>
+            </a:r>
+          </a:p>
+          <a:p>
+            <a:pPr algn="l">
+              <a:lnSpc>
+                <a:spcPct val="110000"/>
+              </a:lnSpc>
+            </a:pPr>
+            <a:r>
+              <a:rPr sz="1050" b="0">
+                <a:solidFill>
+                  <a:srgbClr val="ECF2EA"/>
+                </a:solidFill>
+                <a:latin typeface="Consolas"/>
+              </a:rPr>
+              <a:t/>
+            </a:r>
+          </a:p>
+          <a:p>
+            <a:pPr algn="l">
+              <a:lnSpc>
+                <a:spcPct val="110000"/>
+              </a:lnSpc>
+            </a:pPr>
+            <a:r>
+              <a:rPr sz="1050" b="0">
+                <a:solidFill>
+                  <a:srgbClr val="ECF2EA"/>
+                </a:solidFill>
+                <a:latin typeface="Consolas"/>
+              </a:rPr>
+              <a:t>.venv/Scripts/python.exe scripts/verify.py \</a:t>
+            </a:r>
+          </a:p>
+          <a:p>
+            <a:pPr algn="l">
+              <a:lnSpc>
+                <a:spcPct val="110000"/>
+              </a:lnSpc>
+            </a:pPr>
+            <a:r>
+              <a:rPr sz="1050" b="0">
+                <a:solidFill>
+                  <a:srgbClr val="ECF2EA"/>
+                </a:solidFill>
+                <a:latin typeface="Consolas"/>
+              </a:rPr>
+              <a:t>  --json data/verification/report.json</a:t>
+            </a:r>
+          </a:p>
+        </p:txBody>
+      </p:sp>
+      <p:sp>
+        <p:nvSpPr>
+          <p:cNvPr id="19" name="TextBox 18"/>
+          <p:cNvSpPr txBox="1"/>
+          <p:nvPr/>
+        </p:nvSpPr>
+        <p:spPr>
+          <a:xfrm>
+            <a:off x="822960" y="5285232"/>
+            <a:ext cx="5120640" cy="685800"/>
+          </a:xfrm>
+          <a:prstGeom prst="rect">
+            <a:avLst/>
+          </a:prstGeom>
+          <a:noFill/>
+        </p:spPr>
+        <p:txBody>
+          <a:bodyPr wrap="square" anchor="t" lIns="36576" tIns="27432" rIns="36576" bIns="27432">
+            <a:spAutoFit/>
+          </a:bodyPr>
+          <a:lstStyle/>
+          <a:p>
+            <a:pPr algn="l">
+              <a:lnSpc>
+                <a:spcPct val="115000"/>
+              </a:lnSpc>
+            </a:pPr>
+            <a:r>
+              <a:rPr sz="1150" b="0">
+                <a:solidFill>
+                  <a:srgbClr val="2F5D4E"/>
+                </a:solidFill>
+                <a:latin typeface="Microsoft YaHei"/>
+              </a:rPr>
+              <a:t>输出：39/39 PASS，0 FAIL，约 2–4 秒</a:t>
+            </a:r>
+          </a:p>
+          <a:p>
+            <a:pPr algn="l">
+              <a:lnSpc>
+                <a:spcPct val="115000"/>
+              </a:lnSpc>
+            </a:pPr>
+            <a:r>
+              <a:rPr sz="1150" b="0">
+                <a:solidFill>
+                  <a:srgbClr val="2F5D4E"/>
+                </a:solidFill>
+                <a:latin typeface="Microsoft YaHei"/>
+              </a:rPr>
+              <a:t>所有写入检查在结束时整体回滚。</a:t>
+            </a:r>
+          </a:p>
+        </p:txBody>
+      </p:sp>
+      <p:sp>
+        <p:nvSpPr>
+          <p:cNvPr id="20" name="Rounded Rectangle 19"/>
+          <p:cNvSpPr/>
+          <p:nvPr/>
+        </p:nvSpPr>
+        <p:spPr>
+          <a:xfrm>
+            <a:off x="6492240" y="1481328"/>
+            <a:ext cx="5029200" cy="493776"/>
+          </a:xfrm>
+          <a:prstGeom prst="roundRect">
+            <a:avLst>
+              <a:gd name="adj" fmla="val 6000"/>
+            </a:avLst>
+          </a:prstGeom>
+          <a:solidFill>
+            <a:srgbClr val="ECE7DA"/>
+          </a:solidFill>
+          <a:ln w="7620">
+            <a:solidFill>
+              <a:srgbClr val="D8D1C0"/>
+            </a:solidFill>
+          </a:ln>
+        </p:spPr>
+        <p:style>
+          <a:lnRef idx="1">
+            <a:schemeClr val="accent1"/>
+          </a:lnRef>
+          <a:fillRef idx="3">
+            <a:schemeClr val="accent1"/>
+          </a:fillRef>
+          <a:effectRef idx="2">
+            <a:schemeClr val="accent1"/>
+          </a:effectRef>
+          <a:fontRef idx="minor">
+            <a:schemeClr val="lt1"/>
+          </a:fontRef>
+        </p:style>
+        <p:txBody>
+          <a:bodyPr rtlCol="0" anchor="ctr"/>
+          <a:lstStyle/>
+          <a:p>
+            <a:pPr algn="ctr"/>
+          </a:p>
+        </p:txBody>
+      </p:sp>
+      <p:sp>
+        <p:nvSpPr>
+          <p:cNvPr id="21" name="TextBox 20"/>
+          <p:cNvSpPr txBox="1"/>
+          <p:nvPr/>
+        </p:nvSpPr>
+        <p:spPr>
+          <a:xfrm>
+            <a:off x="6656832" y="1581912"/>
+            <a:ext cx="4709160" cy="274320"/>
+          </a:xfrm>
+          <a:prstGeom prst="rect">
+            <a:avLst/>
+          </a:prstGeom>
+          <a:noFill/>
+        </p:spPr>
+        <p:txBody>
+          <a:bodyPr wrap="square" anchor="t" lIns="36576" tIns="27432" rIns="36576" bIns="27432">
+            <a:spAutoFit/>
+          </a:bodyPr>
+          <a:lstStyle/>
+          <a:p>
+            <a:pPr algn="l">
+              <a:lnSpc>
+                <a:spcPct val="115000"/>
+              </a:lnSpc>
+            </a:pPr>
+            <a:r>
+              <a:rPr sz="1050" b="0">
+                <a:solidFill>
+                  <a:srgbClr val="1F2A24"/>
+                </a:solidFill>
+                <a:latin typeface="Microsoft YaHei"/>
+              </a:rPr>
+              <a:t>✓  Schema：表、FK、UNIQUE、CHECK、索引、触发器</a:t>
+            </a:r>
+          </a:p>
+        </p:txBody>
+      </p:sp>
+      <p:sp>
+        <p:nvSpPr>
+          <p:cNvPr id="22" name="Rounded Rectangle 21"/>
+          <p:cNvSpPr/>
+          <p:nvPr/>
+        </p:nvSpPr>
+        <p:spPr>
+          <a:xfrm>
+            <a:off x="6492240" y="2103120"/>
+            <a:ext cx="5029200" cy="493776"/>
+          </a:xfrm>
+          <a:prstGeom prst="roundRect">
+            <a:avLst>
+              <a:gd name="adj" fmla="val 6000"/>
+            </a:avLst>
+          </a:prstGeom>
+          <a:solidFill>
+            <a:srgbClr val="FFFFFF"/>
+          </a:solidFill>
+          <a:ln w="7620">
+            <a:solidFill>
+              <a:srgbClr val="D8D1C0"/>
+            </a:solidFill>
+          </a:ln>
+        </p:spPr>
+        <p:style>
+          <a:lnRef idx="1">
+            <a:schemeClr val="accent1"/>
+          </a:lnRef>
+          <a:fillRef idx="3">
+            <a:schemeClr val="accent1"/>
+          </a:fillRef>
+          <a:effectRef idx="2">
+            <a:schemeClr val="accent1"/>
+          </a:effectRef>
+          <a:fontRef idx="minor">
+            <a:schemeClr val="lt1"/>
+          </a:fontRef>
+        </p:style>
+        <p:txBody>
+          <a:bodyPr rtlCol="0" anchor="ctr"/>
+          <a:lstStyle/>
+          <a:p>
+            <a:pPr algn="ctr"/>
+          </a:p>
+        </p:txBody>
+      </p:sp>
+      <p:sp>
+        <p:nvSpPr>
+          <p:cNvPr id="23" name="TextBox 22"/>
+          <p:cNvSpPr txBox="1"/>
+          <p:nvPr/>
+        </p:nvSpPr>
+        <p:spPr>
+          <a:xfrm>
+            <a:off x="6656832" y="2203704"/>
+            <a:ext cx="4709160" cy="274320"/>
+          </a:xfrm>
+          <a:prstGeom prst="rect">
+            <a:avLst/>
+          </a:prstGeom>
+          <a:noFill/>
+        </p:spPr>
+        <p:txBody>
+          <a:bodyPr wrap="square" anchor="t" lIns="36576" tIns="27432" rIns="36576" bIns="27432">
+            <a:spAutoFit/>
+          </a:bodyPr>
+          <a:lstStyle/>
+          <a:p>
+            <a:pPr algn="l">
+              <a:lnSpc>
+                <a:spcPct val="115000"/>
+              </a:lnSpc>
+            </a:pPr>
+            <a:r>
+              <a:rPr sz="1050" b="0">
+                <a:solidFill>
+                  <a:srgbClr val="1F2A24"/>
+                </a:solidFill>
+                <a:latin typeface="Microsoft YaHei"/>
+              </a:rPr>
+              <a:t>✓  权限：alice / bob / viewer / admin 边界</a:t>
+            </a:r>
+          </a:p>
+        </p:txBody>
+      </p:sp>
+      <p:sp>
+        <p:nvSpPr>
+          <p:cNvPr id="24" name="Rounded Rectangle 23"/>
+          <p:cNvSpPr/>
+          <p:nvPr/>
+        </p:nvSpPr>
+        <p:spPr>
+          <a:xfrm>
+            <a:off x="6492240" y="2724912"/>
+            <a:ext cx="5029200" cy="493776"/>
+          </a:xfrm>
+          <a:prstGeom prst="roundRect">
+            <a:avLst>
+              <a:gd name="adj" fmla="val 6000"/>
+            </a:avLst>
+          </a:prstGeom>
+          <a:solidFill>
+            <a:srgbClr val="ECE7DA"/>
+          </a:solidFill>
+          <a:ln w="7620">
+            <a:solidFill>
+              <a:srgbClr val="D8D1C0"/>
+            </a:solidFill>
+          </a:ln>
+        </p:spPr>
+        <p:style>
+          <a:lnRef idx="1">
+            <a:schemeClr val="accent1"/>
+          </a:lnRef>
+          <a:fillRef idx="3">
+            <a:schemeClr val="accent1"/>
+          </a:fillRef>
+          <a:effectRef idx="2">
+            <a:schemeClr val="accent1"/>
+          </a:effectRef>
+          <a:fontRef idx="minor">
+            <a:schemeClr val="lt1"/>
+          </a:fontRef>
+        </p:style>
+        <p:txBody>
+          <a:bodyPr rtlCol="0" anchor="ctr"/>
+          <a:lstStyle/>
+          <a:p>
+            <a:pPr algn="ctr"/>
+          </a:p>
+        </p:txBody>
+      </p:sp>
+      <p:sp>
+        <p:nvSpPr>
+          <p:cNvPr id="25" name="TextBox 24"/>
+          <p:cNvSpPr txBox="1"/>
+          <p:nvPr/>
+        </p:nvSpPr>
+        <p:spPr>
+          <a:xfrm>
+            <a:off x="6656832" y="2825496"/>
+            <a:ext cx="4709160" cy="274320"/>
+          </a:xfrm>
+          <a:prstGeom prst="rect">
+            <a:avLst/>
+          </a:prstGeom>
+          <a:noFill/>
+        </p:spPr>
+        <p:txBody>
+          <a:bodyPr wrap="square" anchor="t" lIns="36576" tIns="27432" rIns="36576" bIns="27432">
+            <a:spAutoFit/>
+          </a:bodyPr>
+          <a:lstStyle/>
+          <a:p>
+            <a:pPr algn="l">
+              <a:lnSpc>
+                <a:spcPct val="115000"/>
+              </a:lnSpc>
+            </a:pPr>
+            <a:r>
+              <a:rPr sz="1050" b="0">
+                <a:solidFill>
+                  <a:srgbClr val="1F2A24"/>
+                </a:solidFill>
+                <a:latin typeface="Microsoft YaHei"/>
+              </a:rPr>
+              <a:t>✓  导入：幂等、重复、损坏文件、平台适配</a:t>
+            </a:r>
+          </a:p>
+        </p:txBody>
+      </p:sp>
+      <p:sp>
+        <p:nvSpPr>
+          <p:cNvPr id="26" name="Rounded Rectangle 25"/>
+          <p:cNvSpPr/>
+          <p:nvPr/>
+        </p:nvSpPr>
+        <p:spPr>
+          <a:xfrm>
+            <a:off x="6492240" y="3346704"/>
+            <a:ext cx="5029200" cy="493776"/>
+          </a:xfrm>
+          <a:prstGeom prst="roundRect">
+            <a:avLst>
+              <a:gd name="adj" fmla="val 6000"/>
+            </a:avLst>
+          </a:prstGeom>
+          <a:solidFill>
+            <a:srgbClr val="FFFFFF"/>
+          </a:solidFill>
+          <a:ln w="7620">
+            <a:solidFill>
+              <a:srgbClr val="D8D1C0"/>
+            </a:solidFill>
+          </a:ln>
+        </p:spPr>
+        <p:style>
+          <a:lnRef idx="1">
+            <a:schemeClr val="accent1"/>
+          </a:lnRef>
+          <a:fillRef idx="3">
+            <a:schemeClr val="accent1"/>
+          </a:fillRef>
+          <a:effectRef idx="2">
+            <a:schemeClr val="accent1"/>
+          </a:effectRef>
+          <a:fontRef idx="minor">
+            <a:schemeClr val="lt1"/>
+          </a:fontRef>
+        </p:style>
+        <p:txBody>
+          <a:bodyPr rtlCol="0" anchor="ctr"/>
+          <a:lstStyle/>
+          <a:p>
+            <a:pPr algn="ctr"/>
+          </a:p>
+        </p:txBody>
+      </p:sp>
+      <p:sp>
+        <p:nvSpPr>
+          <p:cNvPr id="27" name="TextBox 26"/>
+          <p:cNvSpPr txBox="1"/>
+          <p:nvPr/>
+        </p:nvSpPr>
+        <p:spPr>
+          <a:xfrm>
+            <a:off x="6656832" y="3447288"/>
+            <a:ext cx="4709160" cy="274320"/>
+          </a:xfrm>
+          <a:prstGeom prst="rect">
+            <a:avLst/>
+          </a:prstGeom>
+          <a:noFill/>
+        </p:spPr>
+        <p:txBody>
+          <a:bodyPr wrap="square" anchor="t" lIns="36576" tIns="27432" rIns="36576" bIns="27432">
+            <a:spAutoFit/>
+          </a:bodyPr>
+          <a:lstStyle/>
+          <a:p>
+            <a:pPr algn="l">
+              <a:lnSpc>
+                <a:spcPct val="115000"/>
+              </a:lnSpc>
+            </a:pPr>
+            <a:r>
+              <a:rPr sz="1050" b="0">
+                <a:solidFill>
+                  <a:srgbClr val="1F2A24"/>
+                </a:solidFill>
+                <a:latin typeface="Microsoft YaHei"/>
+              </a:rPr>
+              <a:t>✓  检索：关键词、课程、标签、全局搜索、混合检索、AI 建议</a:t>
+            </a:r>
+          </a:p>
+        </p:txBody>
+      </p:sp>
+      <p:sp>
+        <p:nvSpPr>
+          <p:cNvPr id="28" name="Rounded Rectangle 27"/>
+          <p:cNvSpPr/>
+          <p:nvPr/>
+        </p:nvSpPr>
+        <p:spPr>
+          <a:xfrm>
+            <a:off x="6492240" y="3968496"/>
+            <a:ext cx="5029200" cy="493776"/>
+          </a:xfrm>
+          <a:prstGeom prst="roundRect">
+            <a:avLst>
+              <a:gd name="adj" fmla="val 6000"/>
+            </a:avLst>
+          </a:prstGeom>
+          <a:solidFill>
+            <a:srgbClr val="ECE7DA"/>
+          </a:solidFill>
+          <a:ln w="7620">
+            <a:solidFill>
+              <a:srgbClr val="D8D1C0"/>
+            </a:solidFill>
+          </a:ln>
+        </p:spPr>
+        <p:style>
+          <a:lnRef idx="1">
+            <a:schemeClr val="accent1"/>
+          </a:lnRef>
+          <a:fillRef idx="3">
+            <a:schemeClr val="accent1"/>
+          </a:fillRef>
+          <a:effectRef idx="2">
+            <a:schemeClr val="accent1"/>
+          </a:effectRef>
+          <a:fontRef idx="minor">
+            <a:schemeClr val="lt1"/>
+          </a:fontRef>
+        </p:style>
+        <p:txBody>
+          <a:bodyPr rtlCol="0" anchor="ctr"/>
+          <a:lstStyle/>
+          <a:p>
+            <a:pPr algn="ctr"/>
+          </a:p>
+        </p:txBody>
+      </p:sp>
+      <p:sp>
+        <p:nvSpPr>
+          <p:cNvPr id="29" name="TextBox 28"/>
+          <p:cNvSpPr txBox="1"/>
+          <p:nvPr/>
+        </p:nvSpPr>
+        <p:spPr>
+          <a:xfrm>
+            <a:off x="6656832" y="4069080"/>
+            <a:ext cx="4709160" cy="274320"/>
+          </a:xfrm>
+          <a:prstGeom prst="rect">
+            <a:avLst/>
+          </a:prstGeom>
+          <a:noFill/>
+        </p:spPr>
+        <p:txBody>
+          <a:bodyPr wrap="square" anchor="t" lIns="36576" tIns="27432" rIns="36576" bIns="27432">
+            <a:spAutoFit/>
+          </a:bodyPr>
+          <a:lstStyle/>
+          <a:p>
+            <a:pPr algn="l">
+              <a:lnSpc>
+                <a:spcPct val="115000"/>
+              </a:lnSpc>
+            </a:pPr>
+            <a:r>
+              <a:rPr sz="1050" b="0">
+                <a:solidFill>
+                  <a:srgbClr val="1F2A24"/>
+                </a:solidFill>
+                <a:latin typeface="Microsoft YaHei"/>
+              </a:rPr>
+              <a:t>✓  知识结构：先修边防环、递归闭包、Text2SQL 可查</a:t>
+            </a:r>
+          </a:p>
+        </p:txBody>
+      </p:sp>
+      <p:sp>
+        <p:nvSpPr>
+          <p:cNvPr id="30" name="Rounded Rectangle 29"/>
+          <p:cNvSpPr/>
+          <p:nvPr/>
+        </p:nvSpPr>
+        <p:spPr>
+          <a:xfrm>
+            <a:off x="6492240" y="4590288"/>
+            <a:ext cx="5029200" cy="493776"/>
+          </a:xfrm>
+          <a:prstGeom prst="roundRect">
+            <a:avLst>
+              <a:gd name="adj" fmla="val 6000"/>
+            </a:avLst>
+          </a:prstGeom>
+          <a:solidFill>
+            <a:srgbClr val="FFFFFF"/>
+          </a:solidFill>
+          <a:ln w="7620">
+            <a:solidFill>
+              <a:srgbClr val="D8D1C0"/>
+            </a:solidFill>
+          </a:ln>
+        </p:spPr>
+        <p:style>
+          <a:lnRef idx="1">
+            <a:schemeClr val="accent1"/>
+          </a:lnRef>
+          <a:fillRef idx="3">
+            <a:schemeClr val="accent1"/>
+          </a:fillRef>
+          <a:effectRef idx="2">
+            <a:schemeClr val="accent1"/>
+          </a:effectRef>
+          <a:fontRef idx="minor">
+            <a:schemeClr val="lt1"/>
+          </a:fontRef>
+        </p:style>
+        <p:txBody>
+          <a:bodyPr rtlCol="0" anchor="ctr"/>
+          <a:lstStyle/>
+          <a:p>
+            <a:pPr algn="ctr"/>
+          </a:p>
+        </p:txBody>
+      </p:sp>
+      <p:sp>
+        <p:nvSpPr>
+          <p:cNvPr id="31" name="TextBox 30"/>
+          <p:cNvSpPr txBox="1"/>
+          <p:nvPr/>
+        </p:nvSpPr>
+        <p:spPr>
+          <a:xfrm>
+            <a:off x="6656832" y="4690872"/>
+            <a:ext cx="4709160" cy="274320"/>
+          </a:xfrm>
+          <a:prstGeom prst="rect">
+            <a:avLst/>
+          </a:prstGeom>
+          <a:noFill/>
+        </p:spPr>
+        <p:txBody>
+          <a:bodyPr wrap="square" anchor="t" lIns="36576" tIns="27432" rIns="36576" bIns="27432">
+            <a:spAutoFit/>
+          </a:bodyPr>
+          <a:lstStyle/>
+          <a:p>
+            <a:pPr algn="l">
+              <a:lnSpc>
+                <a:spcPct val="115000"/>
+              </a:lnSpc>
+            </a:pPr>
+            <a:r>
+              <a:rPr sz="1050" b="0">
+                <a:solidFill>
+                  <a:srgbClr val="1F2A24"/>
+                </a:solidFill>
+                <a:latin typeface="Microsoft YaHei"/>
+              </a:rPr>
+              <a:t>✓  统计：种子数据下的计数与排名</a:t>
+            </a:r>
+          </a:p>
+        </p:txBody>
+      </p:sp>
+      <p:sp>
+        <p:nvSpPr>
+          <p:cNvPr id="32" name="Rounded Rectangle 31"/>
+          <p:cNvSpPr/>
+          <p:nvPr/>
+        </p:nvSpPr>
+        <p:spPr>
+          <a:xfrm>
+            <a:off x="6492240" y="5212080"/>
+            <a:ext cx="5029200" cy="493776"/>
+          </a:xfrm>
+          <a:prstGeom prst="roundRect">
+            <a:avLst>
+              <a:gd name="adj" fmla="val 6000"/>
+            </a:avLst>
+          </a:prstGeom>
+          <a:solidFill>
+            <a:srgbClr val="ECE7DA"/>
+          </a:solidFill>
+          <a:ln w="7620">
+            <a:solidFill>
+              <a:srgbClr val="D8D1C0"/>
+            </a:solidFill>
+          </a:ln>
+        </p:spPr>
+        <p:style>
+          <a:lnRef idx="1">
+            <a:schemeClr val="accent1"/>
+          </a:lnRef>
+          <a:fillRef idx="3">
+            <a:schemeClr val="accent1"/>
+          </a:fillRef>
+          <a:effectRef idx="2">
+            <a:schemeClr val="accent1"/>
+          </a:effectRef>
+          <a:fontRef idx="minor">
+            <a:schemeClr val="lt1"/>
+          </a:fontRef>
+        </p:style>
+        <p:txBody>
+          <a:bodyPr rtlCol="0" anchor="ctr"/>
+          <a:lstStyle/>
+          <a:p>
+            <a:pPr algn="ctr"/>
+          </a:p>
+        </p:txBody>
+      </p:sp>
+      <p:sp>
+        <p:nvSpPr>
+          <p:cNvPr id="33" name="TextBox 32"/>
+          <p:cNvSpPr txBox="1"/>
+          <p:nvPr/>
+        </p:nvSpPr>
+        <p:spPr>
+          <a:xfrm>
+            <a:off x="6656832" y="5312664"/>
+            <a:ext cx="4709160" cy="274320"/>
+          </a:xfrm>
+          <a:prstGeom prst="rect">
+            <a:avLst/>
+          </a:prstGeom>
+          <a:noFill/>
+        </p:spPr>
+        <p:txBody>
+          <a:bodyPr wrap="square" anchor="t" lIns="36576" tIns="27432" rIns="36576" bIns="27432">
+            <a:spAutoFit/>
+          </a:bodyPr>
+          <a:lstStyle/>
+          <a:p>
+            <a:pPr algn="l">
+              <a:lnSpc>
+                <a:spcPct val="115000"/>
+              </a:lnSpc>
+            </a:pPr>
+            <a:r>
+              <a:rPr sz="1050" b="0">
+                <a:solidFill>
+                  <a:srgbClr val="1F2A24"/>
+                </a:solidFill>
+                <a:latin typeface="Microsoft YaHei"/>
+              </a:rPr>
+              <a:t>✓  采集：令牌哈希、限流、Bearer 幂等入库</a:t>
+            </a:r>
+          </a:p>
+        </p:txBody>
+      </p:sp>
+      <p:sp>
+        <p:nvSpPr>
+          <p:cNvPr id="34" name="Rounded Rectangle 33"/>
+          <p:cNvSpPr/>
+          <p:nvPr/>
+        </p:nvSpPr>
+        <p:spPr>
+          <a:xfrm>
+            <a:off x="6492240" y="5833872"/>
+            <a:ext cx="5029200" cy="493776"/>
+          </a:xfrm>
+          <a:prstGeom prst="roundRect">
+            <a:avLst>
+              <a:gd name="adj" fmla="val 6000"/>
+            </a:avLst>
+          </a:prstGeom>
+          <a:solidFill>
+            <a:srgbClr val="FFFFFF"/>
+          </a:solidFill>
+          <a:ln w="7620">
+            <a:solidFill>
+              <a:srgbClr val="D8D1C0"/>
+            </a:solidFill>
+          </a:ln>
+        </p:spPr>
+        <p:style>
+          <a:lnRef idx="1">
+            <a:schemeClr val="accent1"/>
+          </a:lnRef>
+          <a:fillRef idx="3">
+            <a:schemeClr val="accent1"/>
+          </a:fillRef>
+          <a:effectRef idx="2">
+            <a:schemeClr val="accent1"/>
+          </a:effectRef>
+          <a:fontRef idx="minor">
+            <a:schemeClr val="lt1"/>
+          </a:fontRef>
+        </p:style>
+        <p:txBody>
+          <a:bodyPr rtlCol="0" anchor="ctr"/>
+          <a:lstStyle/>
+          <a:p>
+            <a:pPr algn="ctr"/>
+          </a:p>
+        </p:txBody>
+      </p:sp>
+      <p:sp>
+        <p:nvSpPr>
+          <p:cNvPr id="35" name="TextBox 34"/>
+          <p:cNvSpPr txBox="1"/>
+          <p:nvPr/>
+        </p:nvSpPr>
+        <p:spPr>
+          <a:xfrm>
+            <a:off x="6656832" y="5934456"/>
+            <a:ext cx="4709160" cy="274320"/>
+          </a:xfrm>
+          <a:prstGeom prst="rect">
+            <a:avLst/>
+          </a:prstGeom>
+          <a:noFill/>
+        </p:spPr>
+        <p:txBody>
+          <a:bodyPr wrap="square" anchor="t" lIns="36576" tIns="27432" rIns="36576" bIns="27432">
+            <a:spAutoFit/>
+          </a:bodyPr>
+          <a:lstStyle/>
+          <a:p>
+            <a:pPr algn="l">
+              <a:lnSpc>
+                <a:spcPct val="115000"/>
+              </a:lnSpc>
+            </a:pPr>
+            <a:r>
+              <a:rPr sz="1050" b="0">
+                <a:solidFill>
+                  <a:srgbClr val="1F2A24"/>
+                </a:solidFill>
+                <a:latin typeface="Microsoft YaHei"/>
+              </a:rPr>
+              <a:t>✓  Text2SQL：AST / 预检 / 金标准评测</a:t>
+            </a:r>
+          </a:p>
+        </p:txBody>
+      </p:sp>
+    </p:spTree>
+  </p:cSld>
+  <p:clrMapOvr>
+    <a:masterClrMapping/>
+  </p:clrMapOvr>
+</p:sld>
+</file>
+
+<file path=ppt/slides/slide16.xml><?xml version="1.0" encoding="utf-8"?>
+<p:sld xmlns:a="http://schemas.openxmlformats.org/drawingml/2006/main" xmlns:p="http://schemas.openxmlformats.org/presentationml/2006/main" xmlns:r="http://schemas.openxmlformats.org/officeDocument/2006/relationships">
+  <p:cSld>
+    <p:spTree>
+      <p:nvGrpSpPr>
+        <p:cNvPr id="1" name=""/>
+        <p:cNvGrpSpPr/>
+        <p:nvPr/>
+      </p:nvGrpSpPr>
+      <p:grpSpPr/>
+      <p:sp>
+        <p:nvSpPr>
+          <p:cNvPr id="2" name="Rectangle 1"/>
+          <p:cNvSpPr/>
+          <p:nvPr/>
+        </p:nvSpPr>
+        <p:spPr>
+          <a:xfrm>
+            <a:off x="0" y="0"/>
+            <a:ext cx="12191695" cy="6858000"/>
+          </a:xfrm>
+          <a:prstGeom prst="rect">
+            <a:avLst/>
+          </a:prstGeom>
+          <a:solidFill>
+            <a:srgbClr val="F7F4EB"/>
+          </a:solidFill>
+          <a:ln>
+            <a:noFill/>
+          </a:ln>
+        </p:spPr>
+        <p:style>
+          <a:lnRef idx="1">
+            <a:schemeClr val="accent1"/>
+          </a:lnRef>
+          <a:fillRef idx="3">
+            <a:schemeClr val="accent1"/>
+          </a:fillRef>
+          <a:effectRef idx="2">
+            <a:schemeClr val="accent1"/>
+          </a:effectRef>
+          <a:fontRef idx="minor">
+            <a:schemeClr val="lt1"/>
+          </a:fontRef>
+        </p:style>
+        <p:txBody>
+          <a:bodyPr rtlCol="0" anchor="ctr"/>
+          <a:lstStyle/>
+          <a:p>
+            <a:pPr algn="ctr"/>
+          </a:p>
+        </p:txBody>
+      </p:sp>
+      <p:sp>
+        <p:nvSpPr>
+          <p:cNvPr id="3" name="TextBox 2"/>
+          <p:cNvSpPr txBox="1"/>
+          <p:nvPr/>
+        </p:nvSpPr>
+        <p:spPr>
+          <a:xfrm>
+            <a:off x="658368" y="384048"/>
+            <a:ext cx="8961120" cy="256032"/>
+          </a:xfrm>
+          <a:prstGeom prst="rect">
+            <a:avLst/>
+          </a:prstGeom>
+          <a:noFill/>
+        </p:spPr>
+        <p:txBody>
+          <a:bodyPr wrap="square" anchor="t" lIns="36576" tIns="27432" rIns="36576" bIns="27432">
+            <a:spAutoFit/>
+          </a:bodyPr>
+          <a:lstStyle/>
+          <a:p>
+            <a:pPr algn="l">
+              <a:lnSpc>
+                <a:spcPct val="115000"/>
+              </a:lnSpc>
+            </a:pPr>
+            <a:r>
+              <a:rPr sz="1100" b="1">
+                <a:solidFill>
+                  <a:srgbClr val="B4693F"/>
+                </a:solidFill>
+                <a:latin typeface="Microsoft YaHei"/>
+              </a:rPr>
+              <a:t>15 / AI 协作</a:t>
+            </a:r>
+          </a:p>
+        </p:txBody>
+      </p:sp>
+      <p:sp>
+        <p:nvSpPr>
+          <p:cNvPr id="4" name="TextBox 3"/>
+          <p:cNvSpPr txBox="1"/>
+          <p:nvPr/>
+        </p:nvSpPr>
+        <p:spPr>
+          <a:xfrm>
+            <a:off x="658368" y="640080"/>
+            <a:ext cx="10881360" cy="566928"/>
+          </a:xfrm>
+          <a:prstGeom prst="rect">
+            <a:avLst/>
+          </a:prstGeom>
+          <a:noFill/>
+        </p:spPr>
+        <p:txBody>
+          <a:bodyPr wrap="square" anchor="t" lIns="36576" tIns="27432" rIns="36576" bIns="27432">
+            <a:spAutoFit/>
+          </a:bodyPr>
+          <a:lstStyle/>
+          <a:p>
+            <a:pPr algn="l">
+              <a:lnSpc>
+                <a:spcPct val="115000"/>
+              </a:lnSpc>
+            </a:pPr>
+            <a:r>
+              <a:rPr sz="2700" b="1">
+                <a:solidFill>
+                  <a:srgbClr val="1F2A24"/>
+                </a:solidFill>
+                <a:latin typeface="Microsoft YaHei"/>
+              </a:rPr>
+              <a:t>哪些交给 AI，哪些必须自己判断</a:t>
+            </a:r>
+          </a:p>
+        </p:txBody>
+      </p:sp>
+      <p:sp>
+        <p:nvSpPr>
+          <p:cNvPr id="5" name="Rectangle 4"/>
+          <p:cNvSpPr/>
+          <p:nvPr/>
+        </p:nvSpPr>
+        <p:spPr>
+          <a:xfrm>
+            <a:off x="658368" y="1243584"/>
+            <a:ext cx="10881360" cy="16459"/>
+          </a:xfrm>
+          <a:prstGeom prst="rect">
+            <a:avLst/>
+          </a:prstGeom>
+          <a:solidFill>
+            <a:srgbClr val="D8D1C0"/>
+          </a:solidFill>
+          <a:ln>
+            <a:noFill/>
+          </a:ln>
+        </p:spPr>
+        <p:style>
+          <a:lnRef idx="1">
+            <a:schemeClr val="accent1"/>
+          </a:lnRef>
+          <a:fillRef idx="3">
+            <a:schemeClr val="accent1"/>
+          </a:fillRef>
+          <a:effectRef idx="2">
+            <a:schemeClr val="accent1"/>
+          </a:effectRef>
+          <a:fontRef idx="minor">
+            <a:schemeClr val="lt1"/>
+          </a:fontRef>
+        </p:style>
+        <p:txBody>
+          <a:bodyPr rtlCol="0" anchor="ctr"/>
+          <a:lstStyle/>
+          <a:p>
+            <a:pPr algn="ctr"/>
+          </a:p>
+        </p:txBody>
+      </p:sp>
+      <p:sp>
+        <p:nvSpPr>
+          <p:cNvPr id="6" name="TextBox 5"/>
+          <p:cNvSpPr txBox="1"/>
+          <p:nvPr/>
+        </p:nvSpPr>
+        <p:spPr>
+          <a:xfrm>
+            <a:off x="10652760" y="6455664"/>
+            <a:ext cx="822960" cy="228600"/>
+          </a:xfrm>
+          <a:prstGeom prst="rect">
+            <a:avLst/>
+          </a:prstGeom>
+          <a:noFill/>
+        </p:spPr>
+        <p:txBody>
+          <a:bodyPr wrap="square" anchor="t" lIns="36576" tIns="27432" rIns="36576" bIns="27432">
+            <a:spAutoFit/>
+          </a:bodyPr>
+          <a:lstStyle/>
+          <a:p>
+            <a:pPr algn="r">
+              <a:lnSpc>
+                <a:spcPct val="115000"/>
+              </a:lnSpc>
+            </a:pPr>
+            <a:r>
+              <a:rPr sz="1000" b="0">
+                <a:solidFill>
+                  <a:srgbClr val="6C756F"/>
+                </a:solidFill>
+                <a:latin typeface="Microsoft YaHei"/>
+              </a:rPr>
+              <a:t>16</a:t>
             </a:r>
           </a:p>
         </p:txBody>
@@ -11291,7 +12913,7 @@
                 <a:gridCol w="2423160"/>
                 <a:gridCol w="2011680"/>
               </a:tblGrid>
-              <a:tr h="422910">
+              <a:tr h="375920">
                 <a:tc>
                   <a:txBody>
                     <a:bodyPr wrap="square"/>
@@ -11362,7 +12984,7 @@
                   </a:tcPr>
                 </a:tc>
               </a:tr>
-              <a:tr h="422910">
+              <a:tr h="375920">
                 <a:tc>
                   <a:txBody>
                     <a:bodyPr wrap="square"/>
@@ -11433,7 +13055,7 @@
                   </a:tcPr>
                 </a:tc>
               </a:tr>
-              <a:tr h="422910">
+              <a:tr h="375920">
                 <a:tc>
                   <a:txBody>
                     <a:bodyPr wrap="square"/>
@@ -11504,7 +13126,7 @@
                   </a:tcPr>
                 </a:tc>
               </a:tr>
-              <a:tr h="422910">
+              <a:tr h="375920">
                 <a:tc>
                   <a:txBody>
                     <a:bodyPr wrap="square"/>
@@ -11575,7 +13197,7 @@
                   </a:tcPr>
                 </a:tc>
               </a:tr>
-              <a:tr h="422910">
+              <a:tr h="375920">
                 <a:tc>
                   <a:txBody>
                     <a:bodyPr wrap="square"/>
@@ -11646,7 +13268,7 @@
                   </a:tcPr>
                 </a:tc>
               </a:tr>
-              <a:tr h="422910">
+              <a:tr h="375920">
                 <a:tc>
                   <a:txBody>
                     <a:bodyPr wrap="square"/>
@@ -11717,7 +13339,7 @@
                   </a:tcPr>
                 </a:tc>
               </a:tr>
-              <a:tr h="422910">
+              <a:tr h="375920">
                 <a:tc>
                   <a:txBody>
                     <a:bodyPr wrap="square"/>
@@ -11788,7 +13410,7 @@
                   </a:tcPr>
                 </a:tc>
               </a:tr>
-              <a:tr h="422910">
+              <a:tr h="375920">
                 <a:tc>
                   <a:txBody>
                     <a:bodyPr wrap="square"/>
@@ -11859,6 +13481,77 @@
                   </a:tcPr>
                 </a:tc>
               </a:tr>
+              <a:tr h="375920">
+                <a:tc>
+                  <a:txBody>
+                    <a:bodyPr wrap="square"/>
+                    <a:lstStyle/>
+                    <a:p>
+                      <a:pPr algn="l"/>
+                      <a:r>
+                        <a:rPr sz="1000" b="0">
+                          <a:solidFill>
+                            <a:srgbClr val="1F2A24"/>
+                          </a:solidFill>
+                          <a:latin typeface="Microsoft YaHei"/>
+                        </a:rPr>
+                        <a:t>先修图只在应用层防环</a:t>
+                      </a:r>
+                    </a:p>
+                  </a:txBody>
+                  <a:tcPr marL="73152" marR="54864" marT="27432" marB="27432" anchor="ctr">
+                    <a:solidFill>
+                      <a:srgbClr val="ECE7DA"/>
+                    </a:solidFill>
+                  </a:tcPr>
+                </a:tc>
+                <a:tc>
+                  <a:txBody>
+                    <a:bodyPr wrap="square"/>
+                    <a:lstStyle/>
+                    <a:p>
+                      <a:pPr algn="l"/>
+                      <a:r>
+                        <a:rPr sz="1000" b="0">
+                          <a:solidFill>
+                            <a:srgbClr val="1F2A24"/>
+                          </a:solidFill>
+                          <a:latin typeface="Microsoft YaHei"/>
+                        </a:rPr>
+                        <a:t>触发器递归 CTE</a:t>
+                      </a:r>
+                    </a:p>
+                  </a:txBody>
+                  <a:tcPr marL="73152" marR="54864" marT="27432" marB="27432" anchor="ctr">
+                    <a:solidFill>
+                      <a:srgbClr val="ECE7DA"/>
+                    </a:solidFill>
+                  </a:tcPr>
+                </a:tc>
+                <a:tc>
+                  <a:txBody>
+                    <a:bodyPr wrap="square"/>
+                    <a:lstStyle/>
+                    <a:p>
+                      <a:pPr algn="l"/>
+                      <a:r>
+                        <a:rPr sz="1000" b="0">
+                          <a:solidFill>
+                            <a:srgbClr val="1F2A24"/>
+                          </a:solidFill>
+                          <a:latin typeface="Microsoft YaHei"/>
+                        </a:rPr>
+                        <a:t>所有写入入口共享约束</a:t>
+                      </a:r>
+                    </a:p>
+                  </a:txBody>
+                  <a:tcPr marL="73152" marR="54864" marT="27432" marB="27432" anchor="ctr">
+                    <a:solidFill>
+                      <a:srgbClr val="ECE7DA"/>
+                    </a:solidFill>
+                  </a:tcPr>
+                </a:tc>
+              </a:tr>
             </a:tbl>
           </a:graphicData>
         </a:graphic>
@@ -12339,7 +14032,7 @@
 </p:sld>
 </file>
 
-<file path=ppt/slides/slide16.xml><?xml version="1.0" encoding="utf-8"?>
+<file path=ppt/slides/slide17.xml><?xml version="1.0" encoding="utf-8"?>
 <p:sld xmlns:a="http://schemas.openxmlformats.org/drawingml/2006/main" xmlns:p="http://schemas.openxmlformats.org/presentationml/2006/main" xmlns:r="http://schemas.openxmlformats.org/officeDocument/2006/relationships">
   <p:cSld>
     <p:spTree>
@@ -12426,7 +14119,7 @@
                 </a:solidFill>
                 <a:latin typeface="Microsoft YaHei"/>
               </a:rPr>
-              <a:t>15 / 结论</a:t>
+              <a:t>16 / 结论</a:t>
             </a:r>
           </a:p>
         </p:txBody>
@@ -12523,7 +14216,7 @@
                 </a:solidFill>
                 <a:latin typeface="Microsoft YaHei"/>
               </a:rPr>
-              <a:t>• 8 个核心实体，14 张表，完整 E-R 与范式分析</a:t>
+              <a:t>• 8 个核心实体，15 张表，完整 E-R 与范式分析</a:t>
             </a:r>
           </a:p>
           <a:p>
@@ -12580,7 +14273,7 @@
                 </a:solidFill>
                 <a:latin typeface="Microsoft YaHei"/>
               </a:rPr>
-              <a:t>• Text2SQL 由只读视图与角色做最终兜底</a:t>
+              <a:t>• 标签先修图：触发器防环 + 递归闭包</a:t>
             </a:r>
           </a:p>
           <a:p>
@@ -12599,7 +14292,26 @@
                 </a:solidFill>
                 <a:latin typeface="Microsoft YaHei"/>
               </a:rPr>
-              <a:t>• 231 项测试 + 38 项验收，全部通过</a:t>
+              <a:t>• Text2SQL 由只读视图与角色做最终兜底</a:t>
+            </a:r>
+          </a:p>
+          <a:p>
+            <a:pPr>
+              <a:lnSpc>
+                <a:spcPct val="118000"/>
+              </a:lnSpc>
+              <a:spcAft>
+                <a:spcPts val="800"/>
+              </a:spcAft>
+            </a:pPr>
+            <a:r>
+              <a:rPr sz="1400">
+                <a:solidFill>
+                  <a:srgbClr val="D9C8A8"/>
+                </a:solidFill>
+                <a:latin typeface="Microsoft YaHei"/>
+              </a:rPr>
+              <a:t>• 238 项测试 + 39 项验收，全部通过</a:t>
             </a:r>
           </a:p>
           <a:p>
@@ -18785,7 +20497,7 @@
                 </a:solidFill>
                 <a:latin typeface="Microsoft YaHei"/>
               </a:rPr>
-              <a:t>14 张表：核心业务与操作型数据分离</a:t>
+              <a:t>15 张表：核心业务与操作型数据分离</a:t>
             </a:r>
           </a:p>
         </p:txBody>
@@ -18921,7 +20633,7 @@
         </p:nvGraphicFramePr>
         <p:xfrm>
           <a:off x="658368" y="1481328"/>
-          <a:ext cx="10881360" cy="3017514"/>
+          <a:ext cx="10881360" cy="3246117"/>
         </p:xfrm>
         <a:graphic>
           <a:graphicData uri="http://schemas.openxmlformats.org/drawingml/2006/table">
@@ -18934,7 +20646,7 @@
                 <a:gridCol w="3840480"/>
                 <a:gridCol w="5486400"/>
               </a:tblGrid>
-              <a:tr h="502919">
+              <a:tr h="463731">
                 <a:tc>
                   <a:txBody>
                     <a:bodyPr wrap="square"/>
@@ -18942,7 +20654,7 @@
                     <a:p>
                       <a:pPr algn="l"/>
                       <a:r>
-                        <a:rPr sz="1150" b="1">
+                        <a:rPr sz="1100" b="1">
                           <a:solidFill>
                             <a:srgbClr val="FFFFFF"/>
                           </a:solidFill>
@@ -18965,7 +20677,7 @@
                     <a:p>
                       <a:pPr algn="l"/>
                       <a:r>
-                        <a:rPr sz="1150" b="1">
+                        <a:rPr sz="1100" b="1">
                           <a:solidFill>
                             <a:srgbClr val="FFFFFF"/>
                           </a:solidFill>
@@ -18988,7 +20700,7 @@
                     <a:p>
                       <a:pPr algn="l"/>
                       <a:r>
-                        <a:rPr sz="1150" b="1">
+                        <a:rPr sz="1100" b="1">
                           <a:solidFill>
                             <a:srgbClr val="FFFFFF"/>
                           </a:solidFill>
@@ -19005,7 +20717,7 @@
                   </a:tcPr>
                 </a:tc>
               </a:tr>
-              <a:tr h="502919">
+              <a:tr h="463731">
                 <a:tc>
                   <a:txBody>
                     <a:bodyPr wrap="square"/>
@@ -19013,7 +20725,7 @@
                     <a:p>
                       <a:pPr algn="l"/>
                       <a:r>
-                        <a:rPr sz="1150" b="0">
+                        <a:rPr sz="1100" b="0">
                           <a:solidFill>
                             <a:srgbClr val="1F2A24"/>
                           </a:solidFill>
@@ -19036,7 +20748,7 @@
                     <a:p>
                       <a:pPr algn="l"/>
                       <a:r>
-                        <a:rPr sz="1150" b="0">
+                        <a:rPr sz="1100" b="0">
                           <a:solidFill>
                             <a:srgbClr val="1F2A24"/>
                           </a:solidFill>
@@ -19059,7 +20771,7 @@
                     <a:p>
                       <a:pPr algn="l"/>
                       <a:r>
-                        <a:rPr sz="1150" b="0">
+                        <a:rPr sz="1100" b="0">
                           <a:solidFill>
                             <a:srgbClr val="1F2A24"/>
                           </a:solidFill>
@@ -19076,7 +20788,7 @@
                   </a:tcPr>
                 </a:tc>
               </a:tr>
-              <a:tr h="502919">
+              <a:tr h="463731">
                 <a:tc>
                   <a:txBody>
                     <a:bodyPr wrap="square"/>
@@ -19084,7 +20796,7 @@
                     <a:p>
                       <a:pPr algn="l"/>
                       <a:r>
-                        <a:rPr sz="1150" b="0">
+                        <a:rPr sz="1100" b="0">
                           <a:solidFill>
                             <a:srgbClr val="1F2A24"/>
                           </a:solidFill>
@@ -19107,7 +20819,7 @@
                     <a:p>
                       <a:pPr algn="l"/>
                       <a:r>
-                        <a:rPr sz="1150" b="0">
+                        <a:rPr sz="1100" b="0">
                           <a:solidFill>
                             <a:srgbClr val="1F2A24"/>
                           </a:solidFill>
@@ -19130,7 +20842,7 @@
                     <a:p>
                       <a:pPr algn="l"/>
                       <a:r>
-                        <a:rPr sz="1150" b="0">
+                        <a:rPr sz="1100" b="0">
                           <a:solidFill>
                             <a:srgbClr val="1F2A24"/>
                           </a:solidFill>
@@ -19147,7 +20859,7 @@
                   </a:tcPr>
                 </a:tc>
               </a:tr>
-              <a:tr h="502919">
+              <a:tr h="463731">
                 <a:tc>
                   <a:txBody>
                     <a:bodyPr wrap="square"/>
@@ -19155,7 +20867,7 @@
                     <a:p>
                       <a:pPr algn="l"/>
                       <a:r>
-                        <a:rPr sz="1150" b="0">
+                        <a:rPr sz="1100" b="0">
                           <a:solidFill>
                             <a:srgbClr val="1F2A24"/>
                           </a:solidFill>
@@ -19178,7 +20890,7 @@
                     <a:p>
                       <a:pPr algn="l"/>
                       <a:r>
-                        <a:rPr sz="1150" b="0">
+                        <a:rPr sz="1100" b="0">
                           <a:solidFill>
                             <a:srgbClr val="1F2A24"/>
                           </a:solidFill>
@@ -19201,7 +20913,7 @@
                     <a:p>
                       <a:pPr algn="l"/>
                       <a:r>
-                        <a:rPr sz="1150" b="0">
+                        <a:rPr sz="1100" b="0">
                           <a:solidFill>
                             <a:srgbClr val="1F2A24"/>
                           </a:solidFill>
@@ -19218,7 +20930,7 @@
                   </a:tcPr>
                 </a:tc>
               </a:tr>
-              <a:tr h="502919">
+              <a:tr h="463731">
                 <a:tc>
                   <a:txBody>
                     <a:bodyPr wrap="square"/>
@@ -19226,7 +20938,7 @@
                     <a:p>
                       <a:pPr algn="l"/>
                       <a:r>
-                        <a:rPr sz="1150" b="0">
+                        <a:rPr sz="1100" b="0">
                           <a:solidFill>
                             <a:srgbClr val="1F2A24"/>
                           </a:solidFill>
@@ -19249,7 +20961,7 @@
                     <a:p>
                       <a:pPr algn="l"/>
                       <a:r>
-                        <a:rPr sz="1150" b="0">
+                        <a:rPr sz="1100" b="0">
                           <a:solidFill>
                             <a:srgbClr val="1F2A24"/>
                           </a:solidFill>
@@ -19272,7 +20984,7 @@
                     <a:p>
                       <a:pPr algn="l"/>
                       <a:r>
-                        <a:rPr sz="1150" b="0">
+                        <a:rPr sz="1100" b="0">
                           <a:solidFill>
                             <a:srgbClr val="1F2A24"/>
                           </a:solidFill>
@@ -19289,7 +21001,7 @@
                   </a:tcPr>
                 </a:tc>
               </a:tr>
-              <a:tr h="502919">
+              <a:tr h="463731">
                 <a:tc>
                   <a:txBody>
                     <a:bodyPr wrap="square"/>
@@ -19297,13 +21009,13 @@
                     <a:p>
                       <a:pPr algn="l"/>
                       <a:r>
-                        <a:rPr sz="1150" b="0">
+                        <a:rPr sz="1100" b="0">
                           <a:solidFill>
                             <a:srgbClr val="1F2A24"/>
                           </a:solidFill>
                           <a:latin typeface="Microsoft YaHei"/>
                         </a:rPr>
-                        <a:t>采集与运维</a:t>
+                        <a:t>知识结构</a:t>
                       </a:r>
                     </a:p>
                   </a:txBody>
@@ -19320,13 +21032,13 @@
                     <a:p>
                       <a:pPr algn="l"/>
                       <a:r>
-                        <a:rPr sz="1150" b="0">
+                        <a:rPr sz="1100" b="0">
                           <a:solidFill>
                             <a:srgbClr val="1F2A24"/>
                           </a:solidFill>
                           <a:latin typeface="Microsoft YaHei"/>
                         </a:rPr>
-                        <a:t>import_batches · api_tokens · text2sql_log</a:t>
+                        <a:t>tag_edges</a:t>
                       </a:r>
                     </a:p>
                   </a:txBody>
@@ -19343,7 +21055,78 @@
                     <a:p>
                       <a:pPr algn="l"/>
                       <a:r>
-                        <a:rPr sz="1150" b="0">
+                        <a:rPr sz="1100" b="0">
+                          <a:solidFill>
+                            <a:srgbClr val="1F2A24"/>
+                          </a:solidFill>
+                          <a:latin typeface="Microsoft YaHei"/>
+                        </a:rPr>
+                        <a:t>先修边唯一；触发器递归防环</a:t>
+                      </a:r>
+                    </a:p>
+                  </a:txBody>
+                  <a:tcPr marL="73152" marR="54864" marT="27432" marB="27432" anchor="ctr">
+                    <a:solidFill>
+                      <a:srgbClr val="FFFFFF"/>
+                    </a:solidFill>
+                  </a:tcPr>
+                </a:tc>
+              </a:tr>
+              <a:tr h="463731">
+                <a:tc>
+                  <a:txBody>
+                    <a:bodyPr wrap="square"/>
+                    <a:lstStyle/>
+                    <a:p>
+                      <a:pPr algn="l"/>
+                      <a:r>
+                        <a:rPr sz="1100" b="0">
+                          <a:solidFill>
+                            <a:srgbClr val="1F2A24"/>
+                          </a:solidFill>
+                          <a:latin typeface="Microsoft YaHei"/>
+                        </a:rPr>
+                        <a:t>采集与运维</a:t>
+                      </a:r>
+                    </a:p>
+                  </a:txBody>
+                  <a:tcPr marL="73152" marR="54864" marT="27432" marB="27432" anchor="ctr">
+                    <a:solidFill>
+                      <a:srgbClr val="ECE7DA"/>
+                    </a:solidFill>
+                  </a:tcPr>
+                </a:tc>
+                <a:tc>
+                  <a:txBody>
+                    <a:bodyPr wrap="square"/>
+                    <a:lstStyle/>
+                    <a:p>
+                      <a:pPr algn="l"/>
+                      <a:r>
+                        <a:rPr sz="1100" b="0">
+                          <a:solidFill>
+                            <a:srgbClr val="1F2A24"/>
+                          </a:solidFill>
+                          <a:latin typeface="Microsoft YaHei"/>
+                        </a:rPr>
+                        <a:t>import_batches · api_tokens · text2sql_log</a:t>
+                      </a:r>
+                    </a:p>
+                  </a:txBody>
+                  <a:tcPr marL="73152" marR="54864" marT="27432" marB="27432" anchor="ctr">
+                    <a:solidFill>
+                      <a:srgbClr val="ECE7DA"/>
+                    </a:solidFill>
+                  </a:tcPr>
+                </a:tc>
+                <a:tc>
+                  <a:txBody>
+                    <a:bodyPr wrap="square"/>
+                    <a:lstStyle/>
+                    <a:p>
+                      <a:pPr algn="l"/>
+                      <a:r>
+                        <a:rPr sz="1100" b="0">
                           <a:solidFill>
                             <a:srgbClr val="1F2A24"/>
                           </a:solidFill>
@@ -19355,7 +21138,7 @@
                   </a:txBody>
                   <a:tcPr marL="73152" marR="54864" marT="27432" marB="27432" anchor="ctr">
                     <a:solidFill>
-                      <a:srgbClr val="FFFFFF"/>
+                      <a:srgbClr val="ECE7DA"/>
                     </a:solidFill>
                   </a:tcPr>
                 </a:tc>
@@ -20430,7 +22213,7 @@
                           </a:solidFill>
                           <a:latin typeface="Microsoft YaHei"/>
                         </a:rPr>
-                        <a:t>14 张表全部有 PK；关键关系均有 FK</a:t>
+                        <a:t>15 张表全部有 PK；关键关系均有 FK</a:t>
                       </a:r>
                     </a:p>
                   </a:txBody>
@@ -20478,7 +22261,7 @@
                           </a:solidFill>
                           <a:latin typeface="Microsoft YaHei"/>
                         </a:rPr>
-                        <a:t>会话外部 ID、消息序号、标签名</a:t>
+                        <a:t>会话外部 ID、消息序号、标签名、先修边</a:t>
                       </a:r>
                     </a:p>
                   </a:txBody>
@@ -20526,7 +22309,7 @@
                           </a:solidFill>
                           <a:latin typeface="Microsoft YaHei"/>
                         </a:rPr>
-                        <a:t>角色枚举、消息非空、结束时间 ≥ 开始</a:t>
+                        <a:t>角色枚举、消息非空、结束时间 ≥ 开始、先修边两端不同</a:t>
                       </a:r>
                     </a:p>
                   </a:txBody>
@@ -20622,7 +22405,7 @@
                           </a:solidFill>
                           <a:latin typeface="Microsoft YaHei"/>
                         </a:rPr>
-                        <a:t>标签与会话同 owner；仅剩一个 owner 时拒绝移除</a:t>
+                        <a:t>标签与会话同 owner；先修边同属主且不形成环</a:t>
                       </a:r>
                     </a:p>
                   </a:txBody>

--- a/docs/汇报.pptx
+++ b/docs/汇报.pptx
@@ -11238,7 +11238,7 @@
                 </a:solidFill>
                 <a:latin typeface="Microsoft YaHei"/>
               </a:rPr>
-              <a:t>238 项测试与 39 项端到端验收全部通过</a:t>
+              <a:t>247 项测试与 39 项端到端验收全部通过</a:t>
             </a:r>
           </a:p>
         </p:txBody>
@@ -11445,7 +11445,7 @@
                 </a:solidFill>
                 <a:latin typeface="Microsoft YaHei"/>
               </a:rPr>
-              <a:t>238</a:t>
+              <a:t>247</a:t>
             </a:r>
           </a:p>
         </p:txBody>
@@ -11834,7 +11834,7 @@
                 </a:solidFill>
                 <a:latin typeface="Consolas"/>
               </a:rPr>
-              <a:t># 137 unit + 101 integration</a:t>
+              <a:t># 143 unit + 104 integration</a:t>
             </a:r>
           </a:p>
           <a:p>
@@ -14311,7 +14311,7 @@
                 </a:solidFill>
                 <a:latin typeface="Microsoft YaHei"/>
               </a:rPr>
-              <a:t>• 238 项测试 + 39 项验收，全部通过</a:t>
+              <a:t>• 247 项测试 + 39 项验收，全部通过</a:t>
             </a:r>
           </a:p>
           <a:p>

--- a/docs/汇报.pptx
+++ b/docs/汇报.pptx
@@ -11238,7 +11238,7 @@
                 </a:solidFill>
                 <a:latin typeface="Microsoft YaHei"/>
               </a:rPr>
-              <a:t>247 项测试与 39 项端到端验收全部通过</a:t>
+              <a:t>264 项测试与 39 项端到端验收全部通过</a:t>
             </a:r>
           </a:p>
         </p:txBody>
@@ -11445,7 +11445,7 @@
                 </a:solidFill>
                 <a:latin typeface="Microsoft YaHei"/>
               </a:rPr>
-              <a:t>247</a:t>
+              <a:t>264</a:t>
             </a:r>
           </a:p>
         </p:txBody>
@@ -11834,7 +11834,7 @@
                 </a:solidFill>
                 <a:latin typeface="Consolas"/>
               </a:rPr>
-              <a:t># 143 unit + 104 integration</a:t>
+              <a:t># 153 unit + 111 integration</a:t>
             </a:r>
           </a:p>
           <a:p>
@@ -12539,7 +12539,7 @@
                 </a:solidFill>
                 <a:latin typeface="Microsoft YaHei"/>
               </a:rPr>
-              <a:t>✓  采集：令牌哈希、限流、Bearer 幂等入库</a:t>
+              <a:t>✓  采集：令牌作用域、限流、Bearer 与 MCP 工具</a:t>
             </a:r>
           </a:p>
         </p:txBody>
@@ -14311,7 +14311,7 @@
                 </a:solidFill>
                 <a:latin typeface="Microsoft YaHei"/>
               </a:rPr>
-              <a:t>• 247 项测试 + 39 项验收，全部通过</a:t>
+              <a:t>• 264 项测试 + 39 项验收，全部通过</a:t>
             </a:r>
           </a:p>
           <a:p>

--- a/docs/汇报.pptx
+++ b/docs/汇报.pptx
@@ -11238,7 +11238,7 @@
                 </a:solidFill>
                 <a:latin typeface="Microsoft YaHei"/>
               </a:rPr>
-              <a:t>264 项测试与 39 项端到端验收全部通过</a:t>
+              <a:t>268 项测试与 40 项端到端验收全部通过</a:t>
             </a:r>
           </a:p>
         </p:txBody>
@@ -11445,7 +11445,7 @@
                 </a:solidFill>
                 <a:latin typeface="Microsoft YaHei"/>
               </a:rPr>
-              <a:t>264</a:t>
+              <a:t>268</a:t>
             </a:r>
           </a:p>
         </p:txBody>
@@ -11570,7 +11570,7 @@
                 </a:solidFill>
                 <a:latin typeface="Microsoft YaHei"/>
               </a:rPr>
-              <a:t>39</a:t>
+              <a:t>40</a:t>
             </a:r>
           </a:p>
         </p:txBody>
@@ -11834,7 +11834,7 @@
                 </a:solidFill>
                 <a:latin typeface="Consolas"/>
               </a:rPr>
-              <a:t># 153 unit + 111 integration</a:t>
+              <a:t># 155 unit + 113 integration</a:t>
             </a:r>
           </a:p>
           <a:p>
@@ -11921,7 +11921,7 @@
                 </a:solidFill>
                 <a:latin typeface="Microsoft YaHei"/>
               </a:rPr>
-              <a:t>输出：39/39 PASS，0 FAIL，约 2–4 秒</a:t>
+              <a:t>输出：40/40 PASS，0 FAIL，约 2–4 秒</a:t>
             </a:r>
           </a:p>
           <a:p>
@@ -12600,6 +12600,92 @@
         <p:spPr>
           <a:xfrm>
             <a:off x="6656832" y="5934456"/>
+            <a:ext cx="4709160" cy="274320"/>
+          </a:xfrm>
+          <a:prstGeom prst="rect">
+            <a:avLst/>
+          </a:prstGeom>
+          <a:noFill/>
+        </p:spPr>
+        <p:txBody>
+          <a:bodyPr wrap="square" anchor="t" lIns="36576" tIns="27432" rIns="36576" bIns="27432">
+            <a:spAutoFit/>
+          </a:bodyPr>
+          <a:lstStyle/>
+          <a:p>
+            <a:pPr algn="l">
+              <a:lnSpc>
+                <a:spcPct val="115000"/>
+              </a:lnSpc>
+            </a:pPr>
+            <a:r>
+              <a:rPr sz="1050" b="0">
+                <a:solidFill>
+                  <a:srgbClr val="1F2A24"/>
+                </a:solidFill>
+                <a:latin typeface="Microsoft YaHei"/>
+              </a:rPr>
+              <a:t>✓  数据库：RLS 与 security_barrier 视图对比</a:t>
+            </a:r>
+          </a:p>
+        </p:txBody>
+      </p:sp>
+      <p:sp>
+        <p:nvSpPr>
+          <p:cNvPr id="36" name="Rounded Rectangle 35"/>
+          <p:cNvSpPr/>
+          <p:nvPr/>
+        </p:nvSpPr>
+        <p:spPr>
+          <a:xfrm>
+            <a:off x="6492240" y="6455664"/>
+            <a:ext cx="5029200" cy="493776"/>
+          </a:xfrm>
+          <a:prstGeom prst="roundRect">
+            <a:avLst>
+              <a:gd name="adj" fmla="val 6000"/>
+            </a:avLst>
+          </a:prstGeom>
+          <a:solidFill>
+            <a:srgbClr val="ECE7DA"/>
+          </a:solidFill>
+          <a:ln w="7620">
+            <a:solidFill>
+              <a:srgbClr val="D8D1C0"/>
+            </a:solidFill>
+          </a:ln>
+        </p:spPr>
+        <p:style>
+          <a:lnRef idx="1">
+            <a:schemeClr val="accent1"/>
+          </a:lnRef>
+          <a:fillRef idx="3">
+            <a:schemeClr val="accent1"/>
+          </a:fillRef>
+          <a:effectRef idx="2">
+            <a:schemeClr val="accent1"/>
+          </a:effectRef>
+          <a:fontRef idx="minor">
+            <a:schemeClr val="lt1"/>
+          </a:fontRef>
+        </p:style>
+        <p:txBody>
+          <a:bodyPr rtlCol="0" anchor="ctr"/>
+          <a:lstStyle/>
+          <a:p>
+            <a:pPr algn="ctr"/>
+          </a:p>
+        </p:txBody>
+      </p:sp>
+      <p:sp>
+        <p:nvSpPr>
+          <p:cNvPr id="37" name="TextBox 36"/>
+          <p:cNvSpPr txBox="1"/>
+          <p:nvPr/>
+        </p:nvSpPr>
+        <p:spPr>
+          <a:xfrm>
+            <a:off x="6656832" y="6556248"/>
             <a:ext cx="4709160" cy="274320"/>
           </a:xfrm>
           <a:prstGeom prst="rect">
@@ -12913,7 +12999,7 @@
                 <a:gridCol w="2423160"/>
                 <a:gridCol w="2011680"/>
               </a:tblGrid>
-              <a:tr h="375920">
+              <a:tr h="338328">
                 <a:tc>
                   <a:txBody>
                     <a:bodyPr wrap="square"/>
@@ -12984,7 +13070,7 @@
                   </a:tcPr>
                 </a:tc>
               </a:tr>
-              <a:tr h="375920">
+              <a:tr h="338328">
                 <a:tc>
                   <a:txBody>
                     <a:bodyPr wrap="square"/>
@@ -13055,7 +13141,7 @@
                   </a:tcPr>
                 </a:tc>
               </a:tr>
-              <a:tr h="375920">
+              <a:tr h="338328">
                 <a:tc>
                   <a:txBody>
                     <a:bodyPr wrap="square"/>
@@ -13126,7 +13212,7 @@
                   </a:tcPr>
                 </a:tc>
               </a:tr>
-              <a:tr h="375920">
+              <a:tr h="338328">
                 <a:tc>
                   <a:txBody>
                     <a:bodyPr wrap="square"/>
@@ -13197,7 +13283,7 @@
                   </a:tcPr>
                 </a:tc>
               </a:tr>
-              <a:tr h="375920">
+              <a:tr h="338328">
                 <a:tc>
                   <a:txBody>
                     <a:bodyPr wrap="square"/>
@@ -13268,7 +13354,7 @@
                   </a:tcPr>
                 </a:tc>
               </a:tr>
-              <a:tr h="375920">
+              <a:tr h="338328">
                 <a:tc>
                   <a:txBody>
                     <a:bodyPr wrap="square"/>
@@ -13339,7 +13425,7 @@
                   </a:tcPr>
                 </a:tc>
               </a:tr>
-              <a:tr h="375920">
+              <a:tr h="338328">
                 <a:tc>
                   <a:txBody>
                     <a:bodyPr wrap="square"/>
@@ -13410,7 +13496,7 @@
                   </a:tcPr>
                 </a:tc>
               </a:tr>
-              <a:tr h="375920">
+              <a:tr h="338328">
                 <a:tc>
                   <a:txBody>
                     <a:bodyPr wrap="square"/>
@@ -13481,7 +13567,7 @@
                   </a:tcPr>
                 </a:tc>
               </a:tr>
-              <a:tr h="375920">
+              <a:tr h="338328">
                 <a:tc>
                   <a:txBody>
                     <a:bodyPr wrap="square"/>
@@ -13552,6 +13638,77 @@
                   </a:tcPr>
                 </a:tc>
               </a:tr>
+              <a:tr h="338328">
+                <a:tc>
+                  <a:txBody>
+                    <a:bodyPr wrap="square"/>
+                    <a:lstStyle/>
+                    <a:p>
+                      <a:pPr algn="l"/>
+                      <a:r>
+                        <a:rPr sz="1000" b="0">
+                          <a:solidFill>
+                            <a:srgbClr val="1F2A24"/>
+                          </a:solidFill>
+                          <a:latin typeface="Microsoft YaHei"/>
+                        </a:rPr>
+                        <a:t>直接用 RLS 替换权限视图</a:t>
+                      </a:r>
+                    </a:p>
+                  </a:txBody>
+                  <a:tcPr marL="73152" marR="54864" marT="27432" marB="27432" anchor="ctr">
+                    <a:solidFill>
+                      <a:srgbClr val="FFFFFF"/>
+                    </a:solidFill>
+                  </a:tcPr>
+                </a:tc>
+                <a:tc>
+                  <a:txBody>
+                    <a:bodyPr wrap="square"/>
+                    <a:lstStyle/>
+                    <a:p>
+                      <a:pPr algn="l"/>
+                      <a:r>
+                        <a:rPr sz="1000" b="0">
+                          <a:solidFill>
+                            <a:srgbClr val="1F2A24"/>
+                          </a:solidFill>
+                          <a:latin typeface="Microsoft YaHei"/>
+                        </a:rPr>
+                        <a:t>视图为主 + RLS 对比实验</a:t>
+                      </a:r>
+                    </a:p>
+                  </a:txBody>
+                  <a:tcPr marL="73152" marR="54864" marT="27432" marB="27432" anchor="ctr">
+                    <a:solidFill>
+                      <a:srgbClr val="FFFFFF"/>
+                    </a:solidFill>
+                  </a:tcPr>
+                </a:tc>
+                <a:tc>
+                  <a:txBody>
+                    <a:bodyPr wrap="square"/>
+                    <a:lstStyle/>
+                    <a:p>
+                      <a:pPr algn="l"/>
+                      <a:r>
+                        <a:rPr sz="1000" b="0">
+                          <a:solidFill>
+                            <a:srgbClr val="1F2A24"/>
+                          </a:solidFill>
+                          <a:latin typeface="Microsoft YaHei"/>
+                        </a:rPr>
+                        <a:t>策略维护与属主绕过成本</a:t>
+                      </a:r>
+                    </a:p>
+                  </a:txBody>
+                  <a:tcPr marL="73152" marR="54864" marT="27432" marB="27432" anchor="ctr">
+                    <a:solidFill>
+                      <a:srgbClr val="FFFFFF"/>
+                    </a:solidFill>
+                  </a:tcPr>
+                </a:tc>
+              </a:tr>
             </a:tbl>
           </a:graphicData>
         </a:graphic>
@@ -14311,7 +14468,7 @@
                 </a:solidFill>
                 <a:latin typeface="Microsoft YaHei"/>
               </a:rPr>
-              <a:t>• 264 项测试 + 39 项验收，全部通过</a:t>
+              <a:t>• 268 项测试 + 40 项验收，全部通过</a:t>
             </a:r>
           </a:p>
           <a:p>

--- a/docs/汇报.pptx
+++ b/docs/汇报.pptx
@@ -9798,8 +9798,8 @@
         </p:blipFill>
         <p:spPr>
           <a:xfrm>
-            <a:off x="6556403" y="2331720"/>
-            <a:ext cx="4946593" cy="3840480"/>
+            <a:off x="6654145" y="2331720"/>
+            <a:ext cx="4751109" cy="3840480"/>
           </a:xfrm>
           <a:prstGeom prst="rect">
             <a:avLst/>
@@ -11238,7 +11238,7 @@
                 </a:solidFill>
                 <a:latin typeface="Microsoft YaHei"/>
               </a:rPr>
-              <a:t>268 项测试与 40 项端到端验收全部通过</a:t>
+              <a:t>274 项测试与 41 项端到端验收全部通过</a:t>
             </a:r>
           </a:p>
         </p:txBody>
@@ -11445,7 +11445,7 @@
                 </a:solidFill>
                 <a:latin typeface="Microsoft YaHei"/>
               </a:rPr>
-              <a:t>268</a:t>
+              <a:t>274</a:t>
             </a:r>
           </a:p>
         </p:txBody>
@@ -11570,7 +11570,7 @@
                 </a:solidFill>
                 <a:latin typeface="Microsoft YaHei"/>
               </a:rPr>
-              <a:t>40</a:t>
+              <a:t>41</a:t>
             </a:r>
           </a:p>
         </p:txBody>
@@ -11834,7 +11834,7 @@
                 </a:solidFill>
                 <a:latin typeface="Consolas"/>
               </a:rPr>
-              <a:t># 155 unit + 113 integration</a:t>
+              <a:t># 155 unit + 119 integration</a:t>
             </a:r>
           </a:p>
           <a:p>
@@ -11921,7 +11921,7 @@
                 </a:solidFill>
                 <a:latin typeface="Microsoft YaHei"/>
               </a:rPr>
-              <a:t>输出：40/40 PASS，0 FAIL，约 2–4 秒</a:t>
+              <a:t>输出：41/41 PASS，0 FAIL，约 2–4 秒</a:t>
             </a:r>
           </a:p>
           <a:p>
@@ -11951,7 +11951,7 @@
         <p:spPr>
           <a:xfrm>
             <a:off x="6492240" y="1481328"/>
-            <a:ext cx="5029200" cy="493776"/>
+            <a:ext cx="5029200" cy="475488"/>
           </a:xfrm>
           <a:prstGeom prst="roundRect">
             <a:avLst>
@@ -12036,8 +12036,8 @@
         </p:nvSpPr>
         <p:spPr>
           <a:xfrm>
-            <a:off x="6492240" y="2103120"/>
-            <a:ext cx="5029200" cy="493776"/>
+            <a:off x="6492240" y="2066544"/>
+            <a:ext cx="5029200" cy="475488"/>
           </a:xfrm>
           <a:prstGeom prst="roundRect">
             <a:avLst>
@@ -12083,7 +12083,7 @@
         </p:nvSpPr>
         <p:spPr>
           <a:xfrm>
-            <a:off x="6656832" y="2203704"/>
+            <a:off x="6656832" y="2167128"/>
             <a:ext cx="4709160" cy="274320"/>
           </a:xfrm>
           <a:prstGeom prst="rect">
@@ -12122,8 +12122,8 @@
         </p:nvSpPr>
         <p:spPr>
           <a:xfrm>
-            <a:off x="6492240" y="2724912"/>
-            <a:ext cx="5029200" cy="493776"/>
+            <a:off x="6492240" y="2651760"/>
+            <a:ext cx="5029200" cy="475488"/>
           </a:xfrm>
           <a:prstGeom prst="roundRect">
             <a:avLst>
@@ -12169,7 +12169,7 @@
         </p:nvSpPr>
         <p:spPr>
           <a:xfrm>
-            <a:off x="6656832" y="2825496"/>
+            <a:off x="6656832" y="2752344"/>
             <a:ext cx="4709160" cy="274320"/>
           </a:xfrm>
           <a:prstGeom prst="rect">
@@ -12208,8 +12208,8 @@
         </p:nvSpPr>
         <p:spPr>
           <a:xfrm>
-            <a:off x="6492240" y="3346704"/>
-            <a:ext cx="5029200" cy="493776"/>
+            <a:off x="6492240" y="3236976"/>
+            <a:ext cx="5029200" cy="475488"/>
           </a:xfrm>
           <a:prstGeom prst="roundRect">
             <a:avLst>
@@ -12255,7 +12255,7 @@
         </p:nvSpPr>
         <p:spPr>
           <a:xfrm>
-            <a:off x="6656832" y="3447288"/>
+            <a:off x="6656832" y="3337560"/>
             <a:ext cx="4709160" cy="274320"/>
           </a:xfrm>
           <a:prstGeom prst="rect">
@@ -12294,8 +12294,8 @@
         </p:nvSpPr>
         <p:spPr>
           <a:xfrm>
-            <a:off x="6492240" y="3968496"/>
-            <a:ext cx="5029200" cy="493776"/>
+            <a:off x="6492240" y="3822191"/>
+            <a:ext cx="5029200" cy="475488"/>
           </a:xfrm>
           <a:prstGeom prst="roundRect">
             <a:avLst>
@@ -12341,7 +12341,7 @@
         </p:nvSpPr>
         <p:spPr>
           <a:xfrm>
-            <a:off x="6656832" y="4069080"/>
+            <a:off x="6656832" y="3922776"/>
             <a:ext cx="4709160" cy="274320"/>
           </a:xfrm>
           <a:prstGeom prst="rect">
@@ -12380,8 +12380,8 @@
         </p:nvSpPr>
         <p:spPr>
           <a:xfrm>
-            <a:off x="6492240" y="4590288"/>
-            <a:ext cx="5029200" cy="493776"/>
+            <a:off x="6492240" y="4407408"/>
+            <a:ext cx="5029200" cy="475488"/>
           </a:xfrm>
           <a:prstGeom prst="roundRect">
             <a:avLst>
@@ -12427,7 +12427,7 @@
         </p:nvSpPr>
         <p:spPr>
           <a:xfrm>
-            <a:off x="6656832" y="4690872"/>
+            <a:off x="6656832" y="4507992"/>
             <a:ext cx="4709160" cy="274320"/>
           </a:xfrm>
           <a:prstGeom prst="rect">
@@ -12466,8 +12466,8 @@
         </p:nvSpPr>
         <p:spPr>
           <a:xfrm>
-            <a:off x="6492240" y="5212080"/>
-            <a:ext cx="5029200" cy="493776"/>
+            <a:off x="6492240" y="4992624"/>
+            <a:ext cx="5029200" cy="475488"/>
           </a:xfrm>
           <a:prstGeom prst="roundRect">
             <a:avLst>
@@ -12513,7 +12513,7 @@
         </p:nvSpPr>
         <p:spPr>
           <a:xfrm>
-            <a:off x="6656832" y="5312664"/>
+            <a:off x="6656832" y="5093208"/>
             <a:ext cx="4709160" cy="274320"/>
           </a:xfrm>
           <a:prstGeom prst="rect">
@@ -12552,8 +12552,8 @@
         </p:nvSpPr>
         <p:spPr>
           <a:xfrm>
-            <a:off x="6492240" y="5833872"/>
-            <a:ext cx="5029200" cy="493776"/>
+            <a:off x="6492240" y="5577840"/>
+            <a:ext cx="5029200" cy="475488"/>
           </a:xfrm>
           <a:prstGeom prst="roundRect">
             <a:avLst>
@@ -12599,7 +12599,7 @@
         </p:nvSpPr>
         <p:spPr>
           <a:xfrm>
-            <a:off x="6656832" y="5934456"/>
+            <a:off x="6656832" y="5678424"/>
             <a:ext cx="4709160" cy="274320"/>
           </a:xfrm>
           <a:prstGeom prst="rect">
@@ -12625,7 +12625,7 @@
                 </a:solidFill>
                 <a:latin typeface="Microsoft YaHei"/>
               </a:rPr>
-              <a:t>✓  数据库：RLS 与 security_barrier 视图对比</a:t>
+              <a:t>✓  数据库：RLS 对比、审计元数据与角色只读</a:t>
             </a:r>
           </a:p>
         </p:txBody>
@@ -12638,8 +12638,8 @@
         </p:nvSpPr>
         <p:spPr>
           <a:xfrm>
-            <a:off x="6492240" y="6455664"/>
-            <a:ext cx="5029200" cy="493776"/>
+            <a:off x="6492240" y="6163056"/>
+            <a:ext cx="5029200" cy="475488"/>
           </a:xfrm>
           <a:prstGeom prst="roundRect">
             <a:avLst>
@@ -12685,7 +12685,7 @@
         </p:nvSpPr>
         <p:spPr>
           <a:xfrm>
-            <a:off x="6656832" y="6556248"/>
+            <a:off x="6656832" y="6263640"/>
             <a:ext cx="4709160" cy="274320"/>
           </a:xfrm>
           <a:prstGeom prst="rect">
@@ -12986,7 +12986,7 @@
         </p:nvGraphicFramePr>
         <p:xfrm>
           <a:off x="658368" y="1481328"/>
-          <a:ext cx="7406640" cy="3383280"/>
+          <a:ext cx="7406640" cy="3566156"/>
         </p:xfrm>
         <a:graphic>
           <a:graphicData uri="http://schemas.openxmlformats.org/drawingml/2006/table">
@@ -12999,7 +12999,7 @@
                 <a:gridCol w="2423160"/>
                 <a:gridCol w="2011680"/>
               </a:tblGrid>
-              <a:tr h="338328">
+              <a:tr h="324196">
                 <a:tc>
                   <a:txBody>
                     <a:bodyPr wrap="square"/>
@@ -13007,7 +13007,7 @@
                     <a:p>
                       <a:pPr algn="l"/>
                       <a:r>
-                        <a:rPr sz="1000" b="1">
+                        <a:rPr sz="950" b="1">
                           <a:solidFill>
                             <a:srgbClr val="FFFFFF"/>
                           </a:solidFill>
@@ -13030,7 +13030,7 @@
                     <a:p>
                       <a:pPr algn="l"/>
                       <a:r>
-                        <a:rPr sz="1000" b="1">
+                        <a:rPr sz="950" b="1">
                           <a:solidFill>
                             <a:srgbClr val="FFFFFF"/>
                           </a:solidFill>
@@ -13053,7 +13053,7 @@
                     <a:p>
                       <a:pPr algn="l"/>
                       <a:r>
-                        <a:rPr sz="1000" b="1">
+                        <a:rPr sz="950" b="1">
                           <a:solidFill>
                             <a:srgbClr val="FFFFFF"/>
                           </a:solidFill>
@@ -13070,7 +13070,7 @@
                   </a:tcPr>
                 </a:tc>
               </a:tr>
-              <a:tr h="338328">
+              <a:tr h="324196">
                 <a:tc>
                   <a:txBody>
                     <a:bodyPr wrap="square"/>
@@ -13078,7 +13078,7 @@
                     <a:p>
                       <a:pPr algn="l"/>
                       <a:r>
-                        <a:rPr sz="1000" b="0">
+                        <a:rPr sz="950" b="0">
                           <a:solidFill>
                             <a:srgbClr val="1F2A24"/>
                           </a:solidFill>
@@ -13101,7 +13101,7 @@
                     <a:p>
                       <a:pPr algn="l"/>
                       <a:r>
-                        <a:rPr sz="1000" b="0">
+                        <a:rPr sz="950" b="0">
                           <a:solidFill>
                             <a:srgbClr val="1F2A24"/>
                           </a:solidFill>
@@ -13124,7 +13124,7 @@
                     <a:p>
                       <a:pPr algn="l"/>
                       <a:r>
-                        <a:rPr sz="1000" b="0">
+                        <a:rPr sz="950" b="0">
                           <a:solidFill>
                             <a:srgbClr val="1F2A24"/>
                           </a:solidFill>
@@ -13141,7 +13141,7 @@
                   </a:tcPr>
                 </a:tc>
               </a:tr>
-              <a:tr h="338328">
+              <a:tr h="324196">
                 <a:tc>
                   <a:txBody>
                     <a:bodyPr wrap="square"/>
@@ -13149,7 +13149,7 @@
                     <a:p>
                       <a:pPr algn="l"/>
                       <a:r>
-                        <a:rPr sz="1000" b="0">
+                        <a:rPr sz="950" b="0">
                           <a:solidFill>
                             <a:srgbClr val="1F2A24"/>
                           </a:solidFill>
@@ -13172,7 +13172,7 @@
                     <a:p>
                       <a:pPr algn="l"/>
                       <a:r>
-                        <a:rPr sz="1000" b="0">
+                        <a:rPr sz="950" b="0">
                           <a:solidFill>
                             <a:srgbClr val="1F2A24"/>
                           </a:solidFill>
@@ -13195,7 +13195,7 @@
                     <a:p>
                       <a:pPr algn="l"/>
                       <a:r>
-                        <a:rPr sz="1000" b="0">
+                        <a:rPr sz="950" b="0">
                           <a:solidFill>
                             <a:srgbClr val="1F2A24"/>
                           </a:solidFill>
@@ -13212,7 +13212,7 @@
                   </a:tcPr>
                 </a:tc>
               </a:tr>
-              <a:tr h="338328">
+              <a:tr h="324196">
                 <a:tc>
                   <a:txBody>
                     <a:bodyPr wrap="square"/>
@@ -13220,7 +13220,7 @@
                     <a:p>
                       <a:pPr algn="l"/>
                       <a:r>
-                        <a:rPr sz="1000" b="0">
+                        <a:rPr sz="950" b="0">
                           <a:solidFill>
                             <a:srgbClr val="1F2A24"/>
                           </a:solidFill>
@@ -13243,7 +13243,7 @@
                     <a:p>
                       <a:pPr algn="l"/>
                       <a:r>
-                        <a:rPr sz="1000" b="0">
+                        <a:rPr sz="950" b="0">
                           <a:solidFill>
                             <a:srgbClr val="1F2A24"/>
                           </a:solidFill>
@@ -13266,7 +13266,7 @@
                     <a:p>
                       <a:pPr algn="l"/>
                       <a:r>
-                        <a:rPr sz="1000" b="0">
+                        <a:rPr sz="950" b="0">
                           <a:solidFill>
                             <a:srgbClr val="1F2A24"/>
                           </a:solidFill>
@@ -13283,7 +13283,7 @@
                   </a:tcPr>
                 </a:tc>
               </a:tr>
-              <a:tr h="338328">
+              <a:tr h="324196">
                 <a:tc>
                   <a:txBody>
                     <a:bodyPr wrap="square"/>
@@ -13291,7 +13291,7 @@
                     <a:p>
                       <a:pPr algn="l"/>
                       <a:r>
-                        <a:rPr sz="1000" b="0">
+                        <a:rPr sz="950" b="0">
                           <a:solidFill>
                             <a:srgbClr val="1F2A24"/>
                           </a:solidFill>
@@ -13314,7 +13314,7 @@
                     <a:p>
                       <a:pPr algn="l"/>
                       <a:r>
-                        <a:rPr sz="1000" b="0">
+                        <a:rPr sz="950" b="0">
                           <a:solidFill>
                             <a:srgbClr val="1F2A24"/>
                           </a:solidFill>
@@ -13337,7 +13337,7 @@
                     <a:p>
                       <a:pPr algn="l"/>
                       <a:r>
-                        <a:rPr sz="1000" b="0">
+                        <a:rPr sz="950" b="0">
                           <a:solidFill>
                             <a:srgbClr val="1F2A24"/>
                           </a:solidFill>
@@ -13354,7 +13354,7 @@
                   </a:tcPr>
                 </a:tc>
               </a:tr>
-              <a:tr h="338328">
+              <a:tr h="324196">
                 <a:tc>
                   <a:txBody>
                     <a:bodyPr wrap="square"/>
@@ -13362,7 +13362,7 @@
                     <a:p>
                       <a:pPr algn="l"/>
                       <a:r>
-                        <a:rPr sz="1000" b="0">
+                        <a:rPr sz="950" b="0">
                           <a:solidFill>
                             <a:srgbClr val="1F2A24"/>
                           </a:solidFill>
@@ -13385,7 +13385,7 @@
                     <a:p>
                       <a:pPr algn="l"/>
                       <a:r>
-                        <a:rPr sz="1000" b="0">
+                        <a:rPr sz="950" b="0">
                           <a:solidFill>
                             <a:srgbClr val="1F2A24"/>
                           </a:solidFill>
@@ -13408,7 +13408,7 @@
                     <a:p>
                       <a:pPr algn="l"/>
                       <a:r>
-                        <a:rPr sz="1000" b="0">
+                        <a:rPr sz="950" b="0">
                           <a:solidFill>
                             <a:srgbClr val="1F2A24"/>
                           </a:solidFill>
@@ -13425,7 +13425,7 @@
                   </a:tcPr>
                 </a:tc>
               </a:tr>
-              <a:tr h="338328">
+              <a:tr h="324196">
                 <a:tc>
                   <a:txBody>
                     <a:bodyPr wrap="square"/>
@@ -13433,7 +13433,7 @@
                     <a:p>
                       <a:pPr algn="l"/>
                       <a:r>
-                        <a:rPr sz="1000" b="0">
+                        <a:rPr sz="950" b="0">
                           <a:solidFill>
                             <a:srgbClr val="1F2A24"/>
                           </a:solidFill>
@@ -13456,7 +13456,7 @@
                     <a:p>
                       <a:pPr algn="l"/>
                       <a:r>
-                        <a:rPr sz="1000" b="0">
+                        <a:rPr sz="950" b="0">
                           <a:solidFill>
                             <a:srgbClr val="1F2A24"/>
                           </a:solidFill>
@@ -13479,7 +13479,7 @@
                     <a:p>
                       <a:pPr algn="l"/>
                       <a:r>
-                        <a:rPr sz="1000" b="0">
+                        <a:rPr sz="950" b="0">
                           <a:solidFill>
                             <a:srgbClr val="1F2A24"/>
                           </a:solidFill>
@@ -13496,7 +13496,7 @@
                   </a:tcPr>
                 </a:tc>
               </a:tr>
-              <a:tr h="338328">
+              <a:tr h="324196">
                 <a:tc>
                   <a:txBody>
                     <a:bodyPr wrap="square"/>
@@ -13504,7 +13504,7 @@
                     <a:p>
                       <a:pPr algn="l"/>
                       <a:r>
-                        <a:rPr sz="1000" b="0">
+                        <a:rPr sz="950" b="0">
                           <a:solidFill>
                             <a:srgbClr val="1F2A24"/>
                           </a:solidFill>
@@ -13527,7 +13527,7 @@
                     <a:p>
                       <a:pPr algn="l"/>
                       <a:r>
-                        <a:rPr sz="1000" b="0">
+                        <a:rPr sz="950" b="0">
                           <a:solidFill>
                             <a:srgbClr val="1F2A24"/>
                           </a:solidFill>
@@ -13550,7 +13550,7 @@
                     <a:p>
                       <a:pPr algn="l"/>
                       <a:r>
-                        <a:rPr sz="1000" b="0">
+                        <a:rPr sz="950" b="0">
                           <a:solidFill>
                             <a:srgbClr val="1F2A24"/>
                           </a:solidFill>
@@ -13567,7 +13567,7 @@
                   </a:tcPr>
                 </a:tc>
               </a:tr>
-              <a:tr h="338328">
+              <a:tr h="324196">
                 <a:tc>
                   <a:txBody>
                     <a:bodyPr wrap="square"/>
@@ -13575,7 +13575,7 @@
                     <a:p>
                       <a:pPr algn="l"/>
                       <a:r>
-                        <a:rPr sz="1000" b="0">
+                        <a:rPr sz="950" b="0">
                           <a:solidFill>
                             <a:srgbClr val="1F2A24"/>
                           </a:solidFill>
@@ -13598,7 +13598,7 @@
                     <a:p>
                       <a:pPr algn="l"/>
                       <a:r>
-                        <a:rPr sz="1000" b="0">
+                        <a:rPr sz="950" b="0">
                           <a:solidFill>
                             <a:srgbClr val="1F2A24"/>
                           </a:solidFill>
@@ -13621,7 +13621,7 @@
                     <a:p>
                       <a:pPr algn="l"/>
                       <a:r>
-                        <a:rPr sz="1000" b="0">
+                        <a:rPr sz="950" b="0">
                           <a:solidFill>
                             <a:srgbClr val="1F2A24"/>
                           </a:solidFill>
@@ -13638,7 +13638,7 @@
                   </a:tcPr>
                 </a:tc>
               </a:tr>
-              <a:tr h="338328">
+              <a:tr h="324196">
                 <a:tc>
                   <a:txBody>
                     <a:bodyPr wrap="square"/>
@@ -13646,7 +13646,7 @@
                     <a:p>
                       <a:pPr algn="l"/>
                       <a:r>
-                        <a:rPr sz="1000" b="0">
+                        <a:rPr sz="950" b="0">
                           <a:solidFill>
                             <a:srgbClr val="1F2A24"/>
                           </a:solidFill>
@@ -13669,7 +13669,7 @@
                     <a:p>
                       <a:pPr algn="l"/>
                       <a:r>
-                        <a:rPr sz="1000" b="0">
+                        <a:rPr sz="950" b="0">
                           <a:solidFill>
                             <a:srgbClr val="1F2A24"/>
                           </a:solidFill>
@@ -13692,7 +13692,7 @@
                     <a:p>
                       <a:pPr algn="l"/>
                       <a:r>
-                        <a:rPr sz="1000" b="0">
+                        <a:rPr sz="950" b="0">
                           <a:solidFill>
                             <a:srgbClr val="1F2A24"/>
                           </a:solidFill>
@@ -13705,6 +13705,77 @@
                   <a:tcPr marL="73152" marR="54864" marT="27432" marB="27432" anchor="ctr">
                     <a:solidFill>
                       <a:srgbClr val="FFFFFF"/>
+                    </a:solidFill>
+                  </a:tcPr>
+                </a:tc>
+              </a:tr>
+              <a:tr h="324196">
+                <a:tc>
+                  <a:txBody>
+                    <a:bodyPr wrap="square"/>
+                    <a:lstStyle/>
+                    <a:p>
+                      <a:pPr algn="l"/>
+                      <a:r>
+                        <a:rPr sz="950" b="0">
+                          <a:solidFill>
+                            <a:srgbClr val="1F2A24"/>
+                          </a:solidFill>
+                          <a:latin typeface="Microsoft YaHei"/>
+                        </a:rPr>
+                        <a:t>全表审计复制旧值/新值</a:t>
+                      </a:r>
+                    </a:p>
+                  </a:txBody>
+                  <a:tcPr marL="73152" marR="54864" marT="27432" marB="27432" anchor="ctr">
+                    <a:solidFill>
+                      <a:srgbClr val="ECE7DA"/>
+                    </a:solidFill>
+                  </a:tcPr>
+                </a:tc>
+                <a:tc>
+                  <a:txBody>
+                    <a:bodyPr wrap="square"/>
+                    <a:lstStyle/>
+                    <a:p>
+                      <a:pPr algn="l"/>
+                      <a:r>
+                        <a:rPr sz="950" b="0">
+                          <a:solidFill>
+                            <a:srgbClr val="1F2A24"/>
+                          </a:solidFill>
+                          <a:latin typeface="Microsoft YaHei"/>
+                        </a:rPr>
+                        <a:t>只审计结构表的元数据</a:t>
+                      </a:r>
+                    </a:p>
+                  </a:txBody>
+                  <a:tcPr marL="73152" marR="54864" marT="27432" marB="27432" anchor="ctr">
+                    <a:solidFill>
+                      <a:srgbClr val="ECE7DA"/>
+                    </a:solidFill>
+                  </a:tcPr>
+                </a:tc>
+                <a:tc>
+                  <a:txBody>
+                    <a:bodyPr wrap="square"/>
+                    <a:lstStyle/>
+                    <a:p>
+                      <a:pPr algn="l"/>
+                      <a:r>
+                        <a:rPr sz="950" b="0">
+                          <a:solidFill>
+                            <a:srgbClr val="1F2A24"/>
+                          </a:solidFill>
+                          <a:latin typeface="Microsoft YaHei"/>
+                        </a:rPr>
+                        <a:t>隐私边界与管理员可见性</a:t>
+                      </a:r>
+                    </a:p>
+                  </a:txBody>
+                  <a:tcPr marL="73152" marR="54864" marT="27432" marB="27432" anchor="ctr">
+                    <a:solidFill>
+                      <a:srgbClr val="ECE7DA"/>
                     </a:solidFill>
                   </a:tcPr>
                 </a:tc>
@@ -14373,7 +14444,7 @@
                 </a:solidFill>
                 <a:latin typeface="Microsoft YaHei"/>
               </a:rPr>
-              <a:t>• 8 个核心实体，15 张表，完整 E-R 与范式分析</a:t>
+              <a:t>• 8 个核心实体，16 张表，完整 E-R 与范式分析</a:t>
             </a:r>
           </a:p>
           <a:p>
@@ -14468,7 +14539,26 @@
                 </a:solidFill>
                 <a:latin typeface="Microsoft YaHei"/>
               </a:rPr>
-              <a:t>• 268 项测试 + 40 项验收，全部通过</a:t>
+              <a:t>• 结构变更可审计，但审计不复制学习内容</a:t>
+            </a:r>
+          </a:p>
+          <a:p>
+            <a:pPr>
+              <a:lnSpc>
+                <a:spcPct val="118000"/>
+              </a:lnSpc>
+              <a:spcAft>
+                <a:spcPts val="800"/>
+              </a:spcAft>
+            </a:pPr>
+            <a:r>
+              <a:rPr sz="1400">
+                <a:solidFill>
+                  <a:srgbClr val="D9C8A8"/>
+                </a:solidFill>
+                <a:latin typeface="Microsoft YaHei"/>
+              </a:rPr>
+              <a:t>• 274 项测试 + 41 项验收，全部通过</a:t>
             </a:r>
           </a:p>
           <a:p>
@@ -20268,7 +20358,7 @@
                 </a:solidFill>
                 <a:latin typeface="Microsoft YaHei"/>
               </a:rPr>
-              <a:t>• 课程成员、导入批次、Text2SQL 日志、复习事件、采集令牌是操作型实体</a:t>
+              <a:t>• 课程成员、导入批次、Text2SQL 日志、复习事件、采集令牌与审计日志是操作型实体</a:t>
             </a:r>
           </a:p>
           <a:p>
@@ -20654,7 +20744,7 @@
                 </a:solidFill>
                 <a:latin typeface="Microsoft YaHei"/>
               </a:rPr>
-              <a:t>15 张表：核心业务与操作型数据分离</a:t>
+              <a:t>16 张表：核心业务与操作型数据分离</a:t>
             </a:r>
           </a:p>
         </p:txBody>
@@ -20790,7 +20880,7 @@
         </p:nvGraphicFramePr>
         <p:xfrm>
           <a:off x="658368" y="1481328"/>
-          <a:ext cx="10881360" cy="3246117"/>
+          <a:ext cx="10881360" cy="3246120"/>
         </p:xfrm>
         <a:graphic>
           <a:graphicData uri="http://schemas.openxmlformats.org/drawingml/2006/table">
@@ -20803,7 +20893,7 @@
                 <a:gridCol w="3840480"/>
                 <a:gridCol w="5486400"/>
               </a:tblGrid>
-              <a:tr h="463731">
+              <a:tr h="405765">
                 <a:tc>
                   <a:txBody>
                     <a:bodyPr wrap="square"/>
@@ -20811,7 +20901,7 @@
                     <a:p>
                       <a:pPr algn="l"/>
                       <a:r>
-                        <a:rPr sz="1100" b="1">
+                        <a:rPr sz="1050" b="1">
                           <a:solidFill>
                             <a:srgbClr val="FFFFFF"/>
                           </a:solidFill>
@@ -20834,7 +20924,7 @@
                     <a:p>
                       <a:pPr algn="l"/>
                       <a:r>
-                        <a:rPr sz="1100" b="1">
+                        <a:rPr sz="1050" b="1">
                           <a:solidFill>
                             <a:srgbClr val="FFFFFF"/>
                           </a:solidFill>
@@ -20857,7 +20947,7 @@
                     <a:p>
                       <a:pPr algn="l"/>
                       <a:r>
-                        <a:rPr sz="1100" b="1">
+                        <a:rPr sz="1050" b="1">
                           <a:solidFill>
                             <a:srgbClr val="FFFFFF"/>
                           </a:solidFill>
@@ -20874,7 +20964,7 @@
                   </a:tcPr>
                 </a:tc>
               </a:tr>
-              <a:tr h="463731">
+              <a:tr h="405765">
                 <a:tc>
                   <a:txBody>
                     <a:bodyPr wrap="square"/>
@@ -20882,7 +20972,7 @@
                     <a:p>
                       <a:pPr algn="l"/>
                       <a:r>
-                        <a:rPr sz="1100" b="0">
+                        <a:rPr sz="1050" b="0">
                           <a:solidFill>
                             <a:srgbClr val="1F2A24"/>
                           </a:solidFill>
@@ -20905,7 +20995,7 @@
                     <a:p>
                       <a:pPr algn="l"/>
                       <a:r>
-                        <a:rPr sz="1100" b="0">
+                        <a:rPr sz="1050" b="0">
                           <a:solidFill>
                             <a:srgbClr val="1F2A24"/>
                           </a:solidFill>
@@ -20928,7 +21018,7 @@
                     <a:p>
                       <a:pPr algn="l"/>
                       <a:r>
-                        <a:rPr sz="1100" b="0">
+                        <a:rPr sz="1050" b="0">
                           <a:solidFill>
                             <a:srgbClr val="1F2A24"/>
                           </a:solidFill>
@@ -20945,7 +21035,7 @@
                   </a:tcPr>
                 </a:tc>
               </a:tr>
-              <a:tr h="463731">
+              <a:tr h="405765">
                 <a:tc>
                   <a:txBody>
                     <a:bodyPr wrap="square"/>
@@ -20953,7 +21043,7 @@
                     <a:p>
                       <a:pPr algn="l"/>
                       <a:r>
-                        <a:rPr sz="1100" b="0">
+                        <a:rPr sz="1050" b="0">
                           <a:solidFill>
                             <a:srgbClr val="1F2A24"/>
                           </a:solidFill>
@@ -20976,7 +21066,7 @@
                     <a:p>
                       <a:pPr algn="l"/>
                       <a:r>
-                        <a:rPr sz="1100" b="0">
+                        <a:rPr sz="1050" b="0">
                           <a:solidFill>
                             <a:srgbClr val="1F2A24"/>
                           </a:solidFill>
@@ -20999,7 +21089,7 @@
                     <a:p>
                       <a:pPr algn="l"/>
                       <a:r>
-                        <a:rPr sz="1100" b="0">
+                        <a:rPr sz="1050" b="0">
                           <a:solidFill>
                             <a:srgbClr val="1F2A24"/>
                           </a:solidFill>
@@ -21016,7 +21106,7 @@
                   </a:tcPr>
                 </a:tc>
               </a:tr>
-              <a:tr h="463731">
+              <a:tr h="405765">
                 <a:tc>
                   <a:txBody>
                     <a:bodyPr wrap="square"/>
@@ -21024,7 +21114,7 @@
                     <a:p>
                       <a:pPr algn="l"/>
                       <a:r>
-                        <a:rPr sz="1100" b="0">
+                        <a:rPr sz="1050" b="0">
                           <a:solidFill>
                             <a:srgbClr val="1F2A24"/>
                           </a:solidFill>
@@ -21047,7 +21137,7 @@
                     <a:p>
                       <a:pPr algn="l"/>
                       <a:r>
-                        <a:rPr sz="1100" b="0">
+                        <a:rPr sz="1050" b="0">
                           <a:solidFill>
                             <a:srgbClr val="1F2A24"/>
                           </a:solidFill>
@@ -21070,7 +21160,7 @@
                     <a:p>
                       <a:pPr algn="l"/>
                       <a:r>
-                        <a:rPr sz="1100" b="0">
+                        <a:rPr sz="1050" b="0">
                           <a:solidFill>
                             <a:srgbClr val="1F2A24"/>
                           </a:solidFill>
@@ -21087,7 +21177,7 @@
                   </a:tcPr>
                 </a:tc>
               </a:tr>
-              <a:tr h="463731">
+              <a:tr h="405765">
                 <a:tc>
                   <a:txBody>
                     <a:bodyPr wrap="square"/>
@@ -21095,7 +21185,7 @@
                     <a:p>
                       <a:pPr algn="l"/>
                       <a:r>
-                        <a:rPr sz="1100" b="0">
+                        <a:rPr sz="1050" b="0">
                           <a:solidFill>
                             <a:srgbClr val="1F2A24"/>
                           </a:solidFill>
@@ -21118,7 +21208,7 @@
                     <a:p>
                       <a:pPr algn="l"/>
                       <a:r>
-                        <a:rPr sz="1100" b="0">
+                        <a:rPr sz="1050" b="0">
                           <a:solidFill>
                             <a:srgbClr val="1F2A24"/>
                           </a:solidFill>
@@ -21141,7 +21231,7 @@
                     <a:p>
                       <a:pPr algn="l"/>
                       <a:r>
-                        <a:rPr sz="1100" b="0">
+                        <a:rPr sz="1050" b="0">
                           <a:solidFill>
                             <a:srgbClr val="1F2A24"/>
                           </a:solidFill>
@@ -21158,7 +21248,7 @@
                   </a:tcPr>
                 </a:tc>
               </a:tr>
-              <a:tr h="463731">
+              <a:tr h="405765">
                 <a:tc>
                   <a:txBody>
                     <a:bodyPr wrap="square"/>
@@ -21166,7 +21256,7 @@
                     <a:p>
                       <a:pPr algn="l"/>
                       <a:r>
-                        <a:rPr sz="1100" b="0">
+                        <a:rPr sz="1050" b="0">
                           <a:solidFill>
                             <a:srgbClr val="1F2A24"/>
                           </a:solidFill>
@@ -21189,7 +21279,7 @@
                     <a:p>
                       <a:pPr algn="l"/>
                       <a:r>
-                        <a:rPr sz="1100" b="0">
+                        <a:rPr sz="1050" b="0">
                           <a:solidFill>
                             <a:srgbClr val="1F2A24"/>
                           </a:solidFill>
@@ -21212,7 +21302,7 @@
                     <a:p>
                       <a:pPr algn="l"/>
                       <a:r>
-                        <a:rPr sz="1100" b="0">
+                        <a:rPr sz="1050" b="0">
                           <a:solidFill>
                             <a:srgbClr val="1F2A24"/>
                           </a:solidFill>
@@ -21229,7 +21319,7 @@
                   </a:tcPr>
                 </a:tc>
               </a:tr>
-              <a:tr h="463731">
+              <a:tr h="405765">
                 <a:tc>
                   <a:txBody>
                     <a:bodyPr wrap="square"/>
@@ -21237,7 +21327,7 @@
                     <a:p>
                       <a:pPr algn="l"/>
                       <a:r>
-                        <a:rPr sz="1100" b="0">
+                        <a:rPr sz="1050" b="0">
                           <a:solidFill>
                             <a:srgbClr val="1F2A24"/>
                           </a:solidFill>
@@ -21260,7 +21350,7 @@
                     <a:p>
                       <a:pPr algn="l"/>
                       <a:r>
-                        <a:rPr sz="1100" b="0">
+                        <a:rPr sz="1050" b="0">
                           <a:solidFill>
                             <a:srgbClr val="1F2A24"/>
                           </a:solidFill>
@@ -21283,7 +21373,7 @@
                     <a:p>
                       <a:pPr algn="l"/>
                       <a:r>
-                        <a:rPr sz="1100" b="0">
+                        <a:rPr sz="1050" b="0">
                           <a:solidFill>
                             <a:srgbClr val="1F2A24"/>
                           </a:solidFill>
@@ -21296,6 +21386,77 @@
                   <a:tcPr marL="73152" marR="54864" marT="27432" marB="27432" anchor="ctr">
                     <a:solidFill>
                       <a:srgbClr val="ECE7DA"/>
+                    </a:solidFill>
+                  </a:tcPr>
+                </a:tc>
+              </a:tr>
+              <a:tr h="405765">
+                <a:tc>
+                  <a:txBody>
+                    <a:bodyPr wrap="square"/>
+                    <a:lstStyle/>
+                    <a:p>
+                      <a:pPr algn="l"/>
+                      <a:r>
+                        <a:rPr sz="1050" b="0">
+                          <a:solidFill>
+                            <a:srgbClr val="1F2A24"/>
+                          </a:solidFill>
+                          <a:latin typeface="Microsoft YaHei"/>
+                        </a:rPr>
+                        <a:t>审计</a:t>
+                      </a:r>
+                    </a:p>
+                  </a:txBody>
+                  <a:tcPr marL="73152" marR="54864" marT="27432" marB="27432" anchor="ctr">
+                    <a:solidFill>
+                      <a:srgbClr val="FFFFFF"/>
+                    </a:solidFill>
+                  </a:tcPr>
+                </a:tc>
+                <a:tc>
+                  <a:txBody>
+                    <a:bodyPr wrap="square"/>
+                    <a:lstStyle/>
+                    <a:p>
+                      <a:pPr algn="l"/>
+                      <a:r>
+                        <a:rPr sz="1050" b="0">
+                          <a:solidFill>
+                            <a:srgbClr val="1F2A24"/>
+                          </a:solidFill>
+                          <a:latin typeface="Microsoft YaHei"/>
+                        </a:rPr>
+                        <a:t>audit_log</a:t>
+                      </a:r>
+                    </a:p>
+                  </a:txBody>
+                  <a:tcPr marL="73152" marR="54864" marT="27432" marB="27432" anchor="ctr">
+                    <a:solidFill>
+                      <a:srgbClr val="FFFFFF"/>
+                    </a:solidFill>
+                  </a:tcPr>
+                </a:tc>
+                <a:tc>
+                  <a:txBody>
+                    <a:bodyPr wrap="square"/>
+                    <a:lstStyle/>
+                    <a:p>
+                      <a:pPr algn="l"/>
+                      <a:r>
+                        <a:rPr sz="1050" b="0">
+                          <a:solidFill>
+                            <a:srgbClr val="1F2A24"/>
+                          </a:solidFill>
+                          <a:latin typeface="Microsoft YaHei"/>
+                        </a:rPr>
+                        <a:t>只记对象/动作/主键/变更列名；应用角色只读</a:t>
+                      </a:r>
+                    </a:p>
+                  </a:txBody>
+                  <a:tcPr marL="73152" marR="54864" marT="27432" marB="27432" anchor="ctr">
+                    <a:solidFill>
+                      <a:srgbClr val="FFFFFF"/>
                     </a:solidFill>
                   </a:tcPr>
                 </a:tc>
@@ -22370,7 +22531,7 @@
                           </a:solidFill>
                           <a:latin typeface="Microsoft YaHei"/>
                         </a:rPr>
-                        <a:t>15 张表全部有 PK；关键关系均有 FK</a:t>
+                        <a:t>16 张表全部有 PK；关键关系均有 FK</a:t>
                       </a:r>
                     </a:p>
                   </a:txBody>
@@ -22562,7 +22723,7 @@
                           </a:solidFill>
                           <a:latin typeface="Microsoft YaHei"/>
                         </a:rPr>
-                        <a:t>标签与会话同 owner；先修边同属主且不形成环</a:t>
+                        <a:t>同 owner；先修边防环；结构变更审计元数据</a:t>
                       </a:r>
                     </a:p>
                   </a:txBody>
@@ -25127,8 +25288,8 @@
         </p:blipFill>
         <p:spPr>
           <a:xfrm>
-            <a:off x="7562128" y="1417320"/>
-            <a:ext cx="2157903" cy="4754880"/>
+            <a:off x="7635642" y="1417320"/>
+            <a:ext cx="2010874" cy="4754880"/>
           </a:xfrm>
           <a:prstGeom prst="rect">
             <a:avLst/>

--- a/docs/汇报.pptx
+++ b/docs/汇报.pptx
@@ -9798,8 +9798,8 @@
         </p:blipFill>
         <p:spPr>
           <a:xfrm>
-            <a:off x="6654145" y="2331720"/>
-            <a:ext cx="4751109" cy="3840480"/>
+            <a:off x="6556403" y="2331720"/>
+            <a:ext cx="4946593" cy="3840480"/>
           </a:xfrm>
           <a:prstGeom prst="rect">
             <a:avLst/>
@@ -11238,7 +11238,7 @@
                 </a:solidFill>
                 <a:latin typeface="Microsoft YaHei"/>
               </a:rPr>
-              <a:t>274 项测试与 41 项端到端验收全部通过</a:t>
+              <a:t>279 项测试与 42 项端到端验收全部通过</a:t>
             </a:r>
           </a:p>
         </p:txBody>
@@ -11445,7 +11445,7 @@
                 </a:solidFill>
                 <a:latin typeface="Microsoft YaHei"/>
               </a:rPr>
-              <a:t>274</a:t>
+              <a:t>279</a:t>
             </a:r>
           </a:p>
         </p:txBody>
@@ -11570,7 +11570,7 @@
                 </a:solidFill>
                 <a:latin typeface="Microsoft YaHei"/>
               </a:rPr>
-              <a:t>41</a:t>
+              <a:t>42</a:t>
             </a:r>
           </a:p>
         </p:txBody>
@@ -11834,7 +11834,7 @@
                 </a:solidFill>
                 <a:latin typeface="Consolas"/>
               </a:rPr>
-              <a:t># 155 unit + 119 integration</a:t>
+              <a:t># 155 unit + 124 integration</a:t>
             </a:r>
           </a:p>
           <a:p>
@@ -11921,7 +11921,7 @@
                 </a:solidFill>
                 <a:latin typeface="Microsoft YaHei"/>
               </a:rPr>
-              <a:t>输出：41/41 PASS，0 FAIL，约 2–4 秒</a:t>
+              <a:t>输出：42/42 PASS，0 FAIL，约 2–4 秒</a:t>
             </a:r>
           </a:p>
           <a:p>
@@ -12625,7 +12625,7 @@
                 </a:solidFill>
                 <a:latin typeface="Microsoft YaHei"/>
               </a:rPr>
-              <a:t>✓  数据库：RLS 对比、审计元数据与角色只读</a:t>
+              <a:t>✓  数据库：RLS 对比、审计元数据、观测指标与角色只读</a:t>
             </a:r>
           </a:p>
         </p:txBody>
@@ -12986,7 +12986,7 @@
         </p:nvGraphicFramePr>
         <p:xfrm>
           <a:off x="658368" y="1481328"/>
-          <a:ext cx="7406640" cy="3566156"/>
+          <a:ext cx="7406640" cy="3566160"/>
         </p:xfrm>
         <a:graphic>
           <a:graphicData uri="http://schemas.openxmlformats.org/drawingml/2006/table">
@@ -12999,7 +12999,7 @@
                 <a:gridCol w="2423160"/>
                 <a:gridCol w="2011680"/>
               </a:tblGrid>
-              <a:tr h="324196">
+              <a:tr h="297180">
                 <a:tc>
                   <a:txBody>
                     <a:bodyPr wrap="square"/>
@@ -13070,7 +13070,7 @@
                   </a:tcPr>
                 </a:tc>
               </a:tr>
-              <a:tr h="324196">
+              <a:tr h="297180">
                 <a:tc>
                   <a:txBody>
                     <a:bodyPr wrap="square"/>
@@ -13141,7 +13141,7 @@
                   </a:tcPr>
                 </a:tc>
               </a:tr>
-              <a:tr h="324196">
+              <a:tr h="297180">
                 <a:tc>
                   <a:txBody>
                     <a:bodyPr wrap="square"/>
@@ -13212,7 +13212,7 @@
                   </a:tcPr>
                 </a:tc>
               </a:tr>
-              <a:tr h="324196">
+              <a:tr h="297180">
                 <a:tc>
                   <a:txBody>
                     <a:bodyPr wrap="square"/>
@@ -13283,7 +13283,7 @@
                   </a:tcPr>
                 </a:tc>
               </a:tr>
-              <a:tr h="324196">
+              <a:tr h="297180">
                 <a:tc>
                   <a:txBody>
                     <a:bodyPr wrap="square"/>
@@ -13354,7 +13354,7 @@
                   </a:tcPr>
                 </a:tc>
               </a:tr>
-              <a:tr h="324196">
+              <a:tr h="297180">
                 <a:tc>
                   <a:txBody>
                     <a:bodyPr wrap="square"/>
@@ -13425,7 +13425,7 @@
                   </a:tcPr>
                 </a:tc>
               </a:tr>
-              <a:tr h="324196">
+              <a:tr h="297180">
                 <a:tc>
                   <a:txBody>
                     <a:bodyPr wrap="square"/>
@@ -13496,7 +13496,7 @@
                   </a:tcPr>
                 </a:tc>
               </a:tr>
-              <a:tr h="324196">
+              <a:tr h="297180">
                 <a:tc>
                   <a:txBody>
                     <a:bodyPr wrap="square"/>
@@ -13567,7 +13567,7 @@
                   </a:tcPr>
                 </a:tc>
               </a:tr>
-              <a:tr h="324196">
+              <a:tr h="297180">
                 <a:tc>
                   <a:txBody>
                     <a:bodyPr wrap="square"/>
@@ -13638,7 +13638,7 @@
                   </a:tcPr>
                 </a:tc>
               </a:tr>
-              <a:tr h="324196">
+              <a:tr h="297180">
                 <a:tc>
                   <a:txBody>
                     <a:bodyPr wrap="square"/>
@@ -13709,7 +13709,7 @@
                   </a:tcPr>
                 </a:tc>
               </a:tr>
-              <a:tr h="324196">
+              <a:tr h="297180">
                 <a:tc>
                   <a:txBody>
                     <a:bodyPr wrap="square"/>
@@ -13780,6 +13780,77 @@
                   </a:tcPr>
                 </a:tc>
               </a:tr>
+              <a:tr h="297180">
+                <a:tc>
+                  <a:txBody>
+                    <a:bodyPr wrap="square"/>
+                    <a:lstStyle/>
+                    <a:p>
+                      <a:pPr algn="l"/>
+                      <a:r>
+                        <a:rPr sz="950" b="0">
+                          <a:solidFill>
+                            <a:srgbClr val="1F2A24"/>
+                          </a:solidFill>
+                          <a:latin typeface="Microsoft YaHei"/>
+                        </a:rPr>
+                        <a:t>管理员自由 SQL 观测面板</a:t>
+                      </a:r>
+                    </a:p>
+                  </a:txBody>
+                  <a:tcPr marL="73152" marR="54864" marT="27432" marB="27432" anchor="ctr">
+                    <a:solidFill>
+                      <a:srgbClr val="FFFFFF"/>
+                    </a:solidFill>
+                  </a:tcPr>
+                </a:tc>
+                <a:tc>
+                  <a:txBody>
+                    <a:bodyPr wrap="square"/>
+                    <a:lstStyle/>
+                    <a:p>
+                      <a:pPr algn="l"/>
+                      <a:r>
+                        <a:rPr sz="950" b="0">
+                          <a:solidFill>
+                            <a:srgbClr val="1F2A24"/>
+                          </a:solidFill>
+                          <a:latin typeface="Microsoft YaHei"/>
+                        </a:rPr>
+                        <a:t>白名单指标 + 执行计划</a:t>
+                      </a:r>
+                    </a:p>
+                  </a:txBody>
+                  <a:tcPr marL="73152" marR="54864" marT="27432" marB="27432" anchor="ctr">
+                    <a:solidFill>
+                      <a:srgbClr val="FFFFFF"/>
+                    </a:solidFill>
+                  </a:tcPr>
+                </a:tc>
+                <a:tc>
+                  <a:txBody>
+                    <a:bodyPr wrap="square"/>
+                    <a:lstStyle/>
+                    <a:p>
+                      <a:pPr algn="l"/>
+                      <a:r>
+                        <a:rPr sz="950" b="0">
+                          <a:solidFill>
+                            <a:srgbClr val="1F2A24"/>
+                          </a:solidFill>
+                          <a:latin typeface="Microsoft YaHei"/>
+                        </a:rPr>
+                        <a:t>可观测不等于可读内容</a:t>
+                      </a:r>
+                    </a:p>
+                  </a:txBody>
+                  <a:tcPr marL="73152" marR="54864" marT="27432" marB="27432" anchor="ctr">
+                    <a:solidFill>
+                      <a:srgbClr val="FFFFFF"/>
+                    </a:solidFill>
+                  </a:tcPr>
+                </a:tc>
+              </a:tr>
             </a:tbl>
           </a:graphicData>
         </a:graphic>
@@ -14539,7 +14610,7 @@
                 </a:solidFill>
                 <a:latin typeface="Microsoft YaHei"/>
               </a:rPr>
-              <a:t>• 结构变更可审计，但审计不复制学习内容</a:t>
+              <a:t>• 结构变更可审计，数据库可观测但不越权读内容</a:t>
             </a:r>
           </a:p>
           <a:p>
@@ -14558,7 +14629,7 @@
                 </a:solidFill>
                 <a:latin typeface="Microsoft YaHei"/>
               </a:rPr>
-              <a:t>• 274 项测试 + 41 项验收，全部通过</a:t>
+              <a:t>• 279 项测试 + 42 项验收，全部通过</a:t>
             </a:r>
           </a:p>
           <a:p>
@@ -25288,8 +25359,8 @@
         </p:blipFill>
         <p:spPr>
           <a:xfrm>
-            <a:off x="7635642" y="1417320"/>
-            <a:ext cx="2010874" cy="4754880"/>
+            <a:off x="7562128" y="1417320"/>
+            <a:ext cx="2157903" cy="4754880"/>
           </a:xfrm>
           <a:prstGeom prst="rect">
             <a:avLst/>
